--- a/backend/templates/pptx/colorful_agency.pptx
+++ b/backend/templates/pptx/colorful_agency.pptx
@@ -1770,7 +1770,7 @@
               <a:buNone/>
             </a:pPr>
             <a:r>
-              <a:rPr lang="en-US" sz="4400" b="1" dirty="0">
+              <a:rPr lang="en-US" sz="4000" b="1" dirty="0">
                 <a:solidFill>
                   <a:srgbClr val="0F172A"/>
                 </a:solidFill>
@@ -1780,7 +1780,7 @@
               </a:rPr>
               <a:t>{{client_name}}</a:t>
             </a:r>
-            <a:endParaRPr lang="en-US" sz="4400" dirty="0"/>
+            <a:endParaRPr lang="en-US" sz="4000" dirty="0"/>
           </a:p>
         </p:txBody>
       </p:sp>
@@ -1809,7 +1809,7 @@
               <a:buNone/>
             </a:pPr>
             <a:r>
-              <a:rPr lang="en-US" sz="1600" dirty="0">
+              <a:rPr lang="en-US" sz="1400" dirty="0">
                 <a:solidFill>
                   <a:srgbClr val="64748B"/>
                 </a:solidFill>
@@ -1819,7 +1819,7 @@
               </a:rPr>
               <a:t>{{report_period}}</a:t>
             </a:r>
-            <a:endParaRPr lang="en-US" sz="1600" dirty="0"/>
+            <a:endParaRPr lang="en-US" sz="1400" dirty="0"/>
           </a:p>
         </p:txBody>
       </p:sp>
@@ -1848,7 +1848,7 @@
               <a:buNone/>
             </a:pPr>
             <a:r>
-              <a:rPr lang="en-US" sz="1300" dirty="0">
+              <a:rPr lang="en-US" sz="1200" dirty="0">
                 <a:solidFill>
                   <a:srgbClr val="94A3B8"/>
                 </a:solidFill>
@@ -1858,7 +1858,7 @@
               </a:rPr>
               <a:t>{{report_type}}</a:t>
             </a:r>
-            <a:endParaRPr lang="en-US" sz="1300" dirty="0"/>
+            <a:endParaRPr lang="en-US" sz="1200" dirty="0"/>
           </a:p>
         </p:txBody>
       </p:sp>
@@ -2079,7 +2079,7 @@
               <a:buNone/>
             </a:pPr>
             <a:r>
-              <a:rPr lang="en-US" sz="1300" dirty="0">
+              <a:rPr lang="en-US" sz="1200" dirty="0">
                 <a:solidFill>
                   <a:srgbClr val="334155"/>
                 </a:solidFill>
@@ -2089,7 +2089,7 @@
               </a:rPr>
               <a:t>{{executive_summary}}</a:t>
             </a:r>
-            <a:endParaRPr lang="en-US" sz="1300" dirty="0"/>
+            <a:endParaRPr lang="en-US" sz="1200" dirty="0"/>
           </a:p>
         </p:txBody>
       </p:sp>
@@ -2334,7 +2334,7 @@
               <a:buNone/>
             </a:pPr>
             <a:r>
-              <a:rPr lang="en-US" sz="3000" b="1" dirty="0">
+              <a:rPr lang="en-US" sz="3200" b="1" dirty="0">
                 <a:solidFill>
                   <a:srgbClr val="0F172A"/>
                 </a:solidFill>
@@ -2344,7 +2344,7 @@
               </a:rPr>
               <a:t>{{kpi_0_value}}</a:t>
             </a:r>
-            <a:endParaRPr lang="en-US" sz="3000" dirty="0"/>
+            <a:endParaRPr lang="en-US" sz="3200" dirty="0"/>
           </a:p>
         </p:txBody>
       </p:sp>
@@ -2498,7 +2498,7 @@
               <a:buNone/>
             </a:pPr>
             <a:r>
-              <a:rPr lang="en-US" sz="3000" b="1" dirty="0">
+              <a:rPr lang="en-US" sz="3200" b="1" dirty="0">
                 <a:solidFill>
                   <a:srgbClr val="0F172A"/>
                 </a:solidFill>
@@ -2508,7 +2508,7 @@
               </a:rPr>
               <a:t>{{kpi_1_value}}</a:t>
             </a:r>
-            <a:endParaRPr lang="en-US" sz="3000" dirty="0"/>
+            <a:endParaRPr lang="en-US" sz="3200" dirty="0"/>
           </a:p>
         </p:txBody>
       </p:sp>
@@ -2662,7 +2662,7 @@
               <a:buNone/>
             </a:pPr>
             <a:r>
-              <a:rPr lang="en-US" sz="3000" b="1" dirty="0">
+              <a:rPr lang="en-US" sz="3200" b="1" dirty="0">
                 <a:solidFill>
                   <a:srgbClr val="0F172A"/>
                 </a:solidFill>
@@ -2672,7 +2672,7 @@
               </a:rPr>
               <a:t>{{kpi_2_value}}</a:t>
             </a:r>
-            <a:endParaRPr lang="en-US" sz="3000" dirty="0"/>
+            <a:endParaRPr lang="en-US" sz="3200" dirty="0"/>
           </a:p>
         </p:txBody>
       </p:sp>
@@ -2826,7 +2826,7 @@
               <a:buNone/>
             </a:pPr>
             <a:r>
-              <a:rPr lang="en-US" sz="3000" b="1" dirty="0">
+              <a:rPr lang="en-US" sz="3200" b="1" dirty="0">
                 <a:solidFill>
                   <a:srgbClr val="0F172A"/>
                 </a:solidFill>
@@ -2836,7 +2836,7 @@
               </a:rPr>
               <a:t>{{kpi_3_value}}</a:t>
             </a:r>
-            <a:endParaRPr lang="en-US" sz="3000" dirty="0"/>
+            <a:endParaRPr lang="en-US" sz="3200" dirty="0"/>
           </a:p>
         </p:txBody>
       </p:sp>
@@ -2990,7 +2990,7 @@
               <a:buNone/>
             </a:pPr>
             <a:r>
-              <a:rPr lang="en-US" sz="3000" b="1" dirty="0">
+              <a:rPr lang="en-US" sz="3200" b="1" dirty="0">
                 <a:solidFill>
                   <a:srgbClr val="0F172A"/>
                 </a:solidFill>
@@ -3000,7 +3000,7 @@
               </a:rPr>
               <a:t>{{kpi_4_value}}</a:t>
             </a:r>
-            <a:endParaRPr lang="en-US" sz="3000" dirty="0"/>
+            <a:endParaRPr lang="en-US" sz="3200" dirty="0"/>
           </a:p>
         </p:txBody>
       </p:sp>
@@ -3154,7 +3154,7 @@
               <a:buNone/>
             </a:pPr>
             <a:r>
-              <a:rPr lang="en-US" sz="3000" b="1" dirty="0">
+              <a:rPr lang="en-US" sz="3200" b="1" dirty="0">
                 <a:solidFill>
                   <a:srgbClr val="0F172A"/>
                 </a:solidFill>
@@ -3164,7 +3164,7 @@
               </a:rPr>
               <a:t>{{kpi_5_value}}</a:t>
             </a:r>
-            <a:endParaRPr lang="en-US" sz="3000" dirty="0"/>
+            <a:endParaRPr lang="en-US" sz="3200" dirty="0"/>
           </a:p>
         </p:txBody>
       </p:sp>
@@ -3993,7 +3993,7 @@
               <a:buNone/>
             </a:pPr>
             <a:r>
-              <a:rPr lang="en-US" sz="1300" dirty="0">
+              <a:rPr lang="en-US" sz="1200" dirty="0">
                 <a:solidFill>
                   <a:srgbClr val="334155"/>
                 </a:solidFill>
@@ -4003,7 +4003,7 @@
               </a:rPr>
               <a:t>{{key_wins}}</a:t>
             </a:r>
-            <a:endParaRPr lang="en-US" sz="1300" dirty="0"/>
+            <a:endParaRPr lang="en-US" sz="1200" dirty="0"/>
           </a:p>
         </p:txBody>
       </p:sp>
@@ -4185,7 +4185,7 @@
               <a:buNone/>
             </a:pPr>
             <a:r>
-              <a:rPr lang="en-US" sz="1300" dirty="0">
+              <a:rPr lang="en-US" sz="1200" dirty="0">
                 <a:solidFill>
                   <a:srgbClr val="334155"/>
                 </a:solidFill>
@@ -4195,7 +4195,7 @@
               </a:rPr>
               <a:t>{{concerns}}</a:t>
             </a:r>
-            <a:endParaRPr lang="en-US" sz="1300" dirty="0"/>
+            <a:endParaRPr lang="en-US" sz="1200" dirty="0"/>
           </a:p>
         </p:txBody>
       </p:sp>
@@ -4357,7 +4357,7 @@
               <a:buNone/>
             </a:pPr>
             <a:r>
-              <a:rPr lang="en-US" sz="1300" dirty="0">
+              <a:rPr lang="en-US" sz="1200" dirty="0">
                 <a:solidFill>
                   <a:srgbClr val="334155"/>
                 </a:solidFill>
@@ -4367,7 +4367,7 @@
               </a:rPr>
               <a:t>{{next_steps}}</a:t>
             </a:r>
-            <a:endParaRPr lang="en-US" sz="1300" dirty="0"/>
+            <a:endParaRPr lang="en-US" sz="1200" dirty="0"/>
           </a:p>
         </p:txBody>
       </p:sp>
@@ -4588,7 +4588,7 @@
               <a:buNone/>
             </a:pPr>
             <a:r>
-              <a:rPr lang="en-US" sz="1300" dirty="0">
+              <a:rPr lang="en-US" sz="1200" dirty="0">
                 <a:solidFill>
                   <a:srgbClr val="334155"/>
                 </a:solidFill>
@@ -4598,7 +4598,7 @@
               </a:rPr>
               <a:t>{{custom_section_text}}</a:t>
             </a:r>
-            <a:endParaRPr lang="en-US" sz="1300" dirty="0"/>
+            <a:endParaRPr lang="en-US" sz="1200" dirty="0"/>
           </a:p>
         </p:txBody>
       </p:sp>

--- a/backend/templates/pptx/colorful_agency.pptx
+++ b/backend/templates/pptx/colorful_agency.pptx
@@ -14,9 +14,19 @@
     <p:sldId id="262" r:id="rId8"/>
     <p:sldId id="263" r:id="rId9"/>
     <p:sldId id="264" r:id="rId10"/>
+    <p:sldId id="265" r:id="rId11"/>
+    <p:sldId id="266" r:id="rId12"/>
+    <p:sldId id="267" r:id="rId13"/>
+    <p:sldId id="268" r:id="rId14"/>
+    <p:sldId id="269" r:id="rId15"/>
+    <p:sldId id="270" r:id="rId16"/>
+    <p:sldId id="271" r:id="rId17"/>
+    <p:sldId id="272" r:id="rId18"/>
+    <p:sldId id="273" r:id="rId19"/>
+    <p:sldId id="274" r:id="rId20"/>
   </p:sldIdLst>
   <p:notesMasterIdLst>
-    <p:notesMasterId r:id="rId11"/>
+    <p:notesMasterId r:id="rId21"/>
   </p:notesMasterIdLst>
   <p:sldSz cx="12192000" cy="6858000"/>
   <p:notesSz cx="6858000" cy="12192000"/>
@@ -534,6 +544,886 @@
             <a:fld id="{F7021451-1387-4CA6-816F-3879F97B5CBC}" type="slidenum">
               <a:rPr lang="en-US"/>
               <a:t>1</a:t>
+            </a:fld>
+            <a:endParaRPr lang="en-US"/>
+          </a:p>
+        </p:txBody>
+      </p:sp>
+    </p:spTree>
+    <p:extLst>
+      <p:ext uri="{BB962C8B-B14F-4D97-AF65-F5344CB8AC3E}">
+        <p14:creationId xmlns:p14="http://schemas.microsoft.com/office/powerpoint/2010/main" val="1024086991"/>
+      </p:ext>
+    </p:extLst>
+  </p:cSld>
+  <p:clrMapOvr>
+    <a:masterClrMapping/>
+  </p:clrMapOvr>
+</p:notes>
+</file>
+
+<file path=ppt/notesSlides/notesSlide10.xml><?xml version="1.0" encoding="utf-8"?>
+<p:notes xmlns:a="http://schemas.openxmlformats.org/drawingml/2006/main" xmlns:r="http://schemas.openxmlformats.org/officeDocument/2006/relationships" xmlns:p="http://schemas.openxmlformats.org/presentationml/2006/main">
+  <p:cSld>
+    <p:spTree>
+      <p:nvGrpSpPr>
+        <p:cNvPr id="1" name=""/>
+        <p:cNvGrpSpPr/>
+        <p:nvPr/>
+      </p:nvGrpSpPr>
+      <p:grpSpPr>
+        <a:xfrm>
+          <a:off x="0" y="0"/>
+          <a:ext cx="0" cy="0"/>
+          <a:chOff x="0" y="0"/>
+          <a:chExt cx="0" cy="0"/>
+        </a:xfrm>
+      </p:grpSpPr>
+      <p:sp>
+        <p:nvSpPr>
+          <p:cNvPr id="2" name="Slide Image Placeholder 1"/>
+          <p:cNvSpPr>
+            <a:spLocks noGrp="1" noRot="1" noChangeAspect="1"/>
+          </p:cNvSpPr>
+          <p:nvPr>
+            <p:ph type="sldImg"/>
+          </p:nvPr>
+        </p:nvSpPr>
+        <p:spPr/>
+      </p:sp>
+      <p:sp>
+        <p:nvSpPr>
+          <p:cNvPr id="3" name="Notes Placeholder 2"/>
+          <p:cNvSpPr>
+            <a:spLocks noGrp="1"/>
+          </p:cNvSpPr>
+          <p:nvPr>
+            <p:ph type="body" idx="1"/>
+          </p:nvPr>
+        </p:nvSpPr>
+        <p:spPr/>
+        <p:txBody>
+          <a:bodyPr/>
+          <a:lstStyle/>
+          <a:p>
+            <a:r>
+              <a:rPr lang="en-US" dirty="0"/>
+              <a:t/>
+            </a:r>
+            <a:endParaRPr lang="en-US" dirty="0"/>
+          </a:p>
+        </p:txBody>
+      </p:sp>
+      <p:sp>
+        <p:nvSpPr>
+          <p:cNvPr id="4" name="Slide Number Placeholder 3"/>
+          <p:cNvSpPr>
+            <a:spLocks noGrp="1"/>
+          </p:cNvSpPr>
+          <p:nvPr>
+            <p:ph type="sldNum" sz="quarter" idx="10"/>
+          </p:nvPr>
+        </p:nvSpPr>
+        <p:spPr/>
+        <p:txBody>
+          <a:bodyPr/>
+          <a:lstStyle/>
+          <a:p>
+            <a:fld id="{F7021451-1387-4CA6-816F-3879F97B5CBC}" type="slidenum">
+              <a:rPr lang="en-US"/>
+              <a:t>10</a:t>
+            </a:fld>
+            <a:endParaRPr lang="en-US"/>
+          </a:p>
+        </p:txBody>
+      </p:sp>
+    </p:spTree>
+    <p:extLst>
+      <p:ext uri="{BB962C8B-B14F-4D97-AF65-F5344CB8AC3E}">
+        <p14:creationId xmlns:p14="http://schemas.microsoft.com/office/powerpoint/2010/main" val="1024086991"/>
+      </p:ext>
+    </p:extLst>
+  </p:cSld>
+  <p:clrMapOvr>
+    <a:masterClrMapping/>
+  </p:clrMapOvr>
+</p:notes>
+</file>
+
+<file path=ppt/notesSlides/notesSlide11.xml><?xml version="1.0" encoding="utf-8"?>
+<p:notes xmlns:a="http://schemas.openxmlformats.org/drawingml/2006/main" xmlns:r="http://schemas.openxmlformats.org/officeDocument/2006/relationships" xmlns:p="http://schemas.openxmlformats.org/presentationml/2006/main">
+  <p:cSld>
+    <p:spTree>
+      <p:nvGrpSpPr>
+        <p:cNvPr id="1" name=""/>
+        <p:cNvGrpSpPr/>
+        <p:nvPr/>
+      </p:nvGrpSpPr>
+      <p:grpSpPr>
+        <a:xfrm>
+          <a:off x="0" y="0"/>
+          <a:ext cx="0" cy="0"/>
+          <a:chOff x="0" y="0"/>
+          <a:chExt cx="0" cy="0"/>
+        </a:xfrm>
+      </p:grpSpPr>
+      <p:sp>
+        <p:nvSpPr>
+          <p:cNvPr id="2" name="Slide Image Placeholder 1"/>
+          <p:cNvSpPr>
+            <a:spLocks noGrp="1" noRot="1" noChangeAspect="1"/>
+          </p:cNvSpPr>
+          <p:nvPr>
+            <p:ph type="sldImg"/>
+          </p:nvPr>
+        </p:nvSpPr>
+        <p:spPr/>
+      </p:sp>
+      <p:sp>
+        <p:nvSpPr>
+          <p:cNvPr id="3" name="Notes Placeholder 2"/>
+          <p:cNvSpPr>
+            <a:spLocks noGrp="1"/>
+          </p:cNvSpPr>
+          <p:nvPr>
+            <p:ph type="body" idx="1"/>
+          </p:nvPr>
+        </p:nvSpPr>
+        <p:spPr/>
+        <p:txBody>
+          <a:bodyPr/>
+          <a:lstStyle/>
+          <a:p>
+            <a:r>
+              <a:rPr lang="en-US" dirty="0"/>
+              <a:t/>
+            </a:r>
+            <a:endParaRPr lang="en-US" dirty="0"/>
+          </a:p>
+        </p:txBody>
+      </p:sp>
+      <p:sp>
+        <p:nvSpPr>
+          <p:cNvPr id="4" name="Slide Number Placeholder 3"/>
+          <p:cNvSpPr>
+            <a:spLocks noGrp="1"/>
+          </p:cNvSpPr>
+          <p:nvPr>
+            <p:ph type="sldNum" sz="quarter" idx="10"/>
+          </p:nvPr>
+        </p:nvSpPr>
+        <p:spPr/>
+        <p:txBody>
+          <a:bodyPr/>
+          <a:lstStyle/>
+          <a:p>
+            <a:fld id="{F7021451-1387-4CA6-816F-3879F97B5CBC}" type="slidenum">
+              <a:rPr lang="en-US"/>
+              <a:t>11</a:t>
+            </a:fld>
+            <a:endParaRPr lang="en-US"/>
+          </a:p>
+        </p:txBody>
+      </p:sp>
+    </p:spTree>
+    <p:extLst>
+      <p:ext uri="{BB962C8B-B14F-4D97-AF65-F5344CB8AC3E}">
+        <p14:creationId xmlns:p14="http://schemas.microsoft.com/office/powerpoint/2010/main" val="1024086991"/>
+      </p:ext>
+    </p:extLst>
+  </p:cSld>
+  <p:clrMapOvr>
+    <a:masterClrMapping/>
+  </p:clrMapOvr>
+</p:notes>
+</file>
+
+<file path=ppt/notesSlides/notesSlide12.xml><?xml version="1.0" encoding="utf-8"?>
+<p:notes xmlns:a="http://schemas.openxmlformats.org/drawingml/2006/main" xmlns:r="http://schemas.openxmlformats.org/officeDocument/2006/relationships" xmlns:p="http://schemas.openxmlformats.org/presentationml/2006/main">
+  <p:cSld>
+    <p:spTree>
+      <p:nvGrpSpPr>
+        <p:cNvPr id="1" name=""/>
+        <p:cNvGrpSpPr/>
+        <p:nvPr/>
+      </p:nvGrpSpPr>
+      <p:grpSpPr>
+        <a:xfrm>
+          <a:off x="0" y="0"/>
+          <a:ext cx="0" cy="0"/>
+          <a:chOff x="0" y="0"/>
+          <a:chExt cx="0" cy="0"/>
+        </a:xfrm>
+      </p:grpSpPr>
+      <p:sp>
+        <p:nvSpPr>
+          <p:cNvPr id="2" name="Slide Image Placeholder 1"/>
+          <p:cNvSpPr>
+            <a:spLocks noGrp="1" noRot="1" noChangeAspect="1"/>
+          </p:cNvSpPr>
+          <p:nvPr>
+            <p:ph type="sldImg"/>
+          </p:nvPr>
+        </p:nvSpPr>
+        <p:spPr/>
+      </p:sp>
+      <p:sp>
+        <p:nvSpPr>
+          <p:cNvPr id="3" name="Notes Placeholder 2"/>
+          <p:cNvSpPr>
+            <a:spLocks noGrp="1"/>
+          </p:cNvSpPr>
+          <p:nvPr>
+            <p:ph type="body" idx="1"/>
+          </p:nvPr>
+        </p:nvSpPr>
+        <p:spPr/>
+        <p:txBody>
+          <a:bodyPr/>
+          <a:lstStyle/>
+          <a:p>
+            <a:r>
+              <a:rPr lang="en-US" dirty="0"/>
+              <a:t/>
+            </a:r>
+            <a:endParaRPr lang="en-US" dirty="0"/>
+          </a:p>
+        </p:txBody>
+      </p:sp>
+      <p:sp>
+        <p:nvSpPr>
+          <p:cNvPr id="4" name="Slide Number Placeholder 3"/>
+          <p:cNvSpPr>
+            <a:spLocks noGrp="1"/>
+          </p:cNvSpPr>
+          <p:nvPr>
+            <p:ph type="sldNum" sz="quarter" idx="10"/>
+          </p:nvPr>
+        </p:nvSpPr>
+        <p:spPr/>
+        <p:txBody>
+          <a:bodyPr/>
+          <a:lstStyle/>
+          <a:p>
+            <a:fld id="{F7021451-1387-4CA6-816F-3879F97B5CBC}" type="slidenum">
+              <a:rPr lang="en-US"/>
+              <a:t>12</a:t>
+            </a:fld>
+            <a:endParaRPr lang="en-US"/>
+          </a:p>
+        </p:txBody>
+      </p:sp>
+    </p:spTree>
+    <p:extLst>
+      <p:ext uri="{BB962C8B-B14F-4D97-AF65-F5344CB8AC3E}">
+        <p14:creationId xmlns:p14="http://schemas.microsoft.com/office/powerpoint/2010/main" val="1024086991"/>
+      </p:ext>
+    </p:extLst>
+  </p:cSld>
+  <p:clrMapOvr>
+    <a:masterClrMapping/>
+  </p:clrMapOvr>
+</p:notes>
+</file>
+
+<file path=ppt/notesSlides/notesSlide13.xml><?xml version="1.0" encoding="utf-8"?>
+<p:notes xmlns:a="http://schemas.openxmlformats.org/drawingml/2006/main" xmlns:r="http://schemas.openxmlformats.org/officeDocument/2006/relationships" xmlns:p="http://schemas.openxmlformats.org/presentationml/2006/main">
+  <p:cSld>
+    <p:spTree>
+      <p:nvGrpSpPr>
+        <p:cNvPr id="1" name=""/>
+        <p:cNvGrpSpPr/>
+        <p:nvPr/>
+      </p:nvGrpSpPr>
+      <p:grpSpPr>
+        <a:xfrm>
+          <a:off x="0" y="0"/>
+          <a:ext cx="0" cy="0"/>
+          <a:chOff x="0" y="0"/>
+          <a:chExt cx="0" cy="0"/>
+        </a:xfrm>
+      </p:grpSpPr>
+      <p:sp>
+        <p:nvSpPr>
+          <p:cNvPr id="2" name="Slide Image Placeholder 1"/>
+          <p:cNvSpPr>
+            <a:spLocks noGrp="1" noRot="1" noChangeAspect="1"/>
+          </p:cNvSpPr>
+          <p:nvPr>
+            <p:ph type="sldImg"/>
+          </p:nvPr>
+        </p:nvSpPr>
+        <p:spPr/>
+      </p:sp>
+      <p:sp>
+        <p:nvSpPr>
+          <p:cNvPr id="3" name="Notes Placeholder 2"/>
+          <p:cNvSpPr>
+            <a:spLocks noGrp="1"/>
+          </p:cNvSpPr>
+          <p:nvPr>
+            <p:ph type="body" idx="1"/>
+          </p:nvPr>
+        </p:nvSpPr>
+        <p:spPr/>
+        <p:txBody>
+          <a:bodyPr/>
+          <a:lstStyle/>
+          <a:p>
+            <a:r>
+              <a:rPr lang="en-US" dirty="0"/>
+              <a:t/>
+            </a:r>
+            <a:endParaRPr lang="en-US" dirty="0"/>
+          </a:p>
+        </p:txBody>
+      </p:sp>
+      <p:sp>
+        <p:nvSpPr>
+          <p:cNvPr id="4" name="Slide Number Placeholder 3"/>
+          <p:cNvSpPr>
+            <a:spLocks noGrp="1"/>
+          </p:cNvSpPr>
+          <p:nvPr>
+            <p:ph type="sldNum" sz="quarter" idx="10"/>
+          </p:nvPr>
+        </p:nvSpPr>
+        <p:spPr/>
+        <p:txBody>
+          <a:bodyPr/>
+          <a:lstStyle/>
+          <a:p>
+            <a:fld id="{F7021451-1387-4CA6-816F-3879F97B5CBC}" type="slidenum">
+              <a:rPr lang="en-US"/>
+              <a:t>13</a:t>
+            </a:fld>
+            <a:endParaRPr lang="en-US"/>
+          </a:p>
+        </p:txBody>
+      </p:sp>
+    </p:spTree>
+    <p:extLst>
+      <p:ext uri="{BB962C8B-B14F-4D97-AF65-F5344CB8AC3E}">
+        <p14:creationId xmlns:p14="http://schemas.microsoft.com/office/powerpoint/2010/main" val="1024086991"/>
+      </p:ext>
+    </p:extLst>
+  </p:cSld>
+  <p:clrMapOvr>
+    <a:masterClrMapping/>
+  </p:clrMapOvr>
+</p:notes>
+</file>
+
+<file path=ppt/notesSlides/notesSlide14.xml><?xml version="1.0" encoding="utf-8"?>
+<p:notes xmlns:a="http://schemas.openxmlformats.org/drawingml/2006/main" xmlns:r="http://schemas.openxmlformats.org/officeDocument/2006/relationships" xmlns:p="http://schemas.openxmlformats.org/presentationml/2006/main">
+  <p:cSld>
+    <p:spTree>
+      <p:nvGrpSpPr>
+        <p:cNvPr id="1" name=""/>
+        <p:cNvGrpSpPr/>
+        <p:nvPr/>
+      </p:nvGrpSpPr>
+      <p:grpSpPr>
+        <a:xfrm>
+          <a:off x="0" y="0"/>
+          <a:ext cx="0" cy="0"/>
+          <a:chOff x="0" y="0"/>
+          <a:chExt cx="0" cy="0"/>
+        </a:xfrm>
+      </p:grpSpPr>
+      <p:sp>
+        <p:nvSpPr>
+          <p:cNvPr id="2" name="Slide Image Placeholder 1"/>
+          <p:cNvSpPr>
+            <a:spLocks noGrp="1" noRot="1" noChangeAspect="1"/>
+          </p:cNvSpPr>
+          <p:nvPr>
+            <p:ph type="sldImg"/>
+          </p:nvPr>
+        </p:nvSpPr>
+        <p:spPr/>
+      </p:sp>
+      <p:sp>
+        <p:nvSpPr>
+          <p:cNvPr id="3" name="Notes Placeholder 2"/>
+          <p:cNvSpPr>
+            <a:spLocks noGrp="1"/>
+          </p:cNvSpPr>
+          <p:nvPr>
+            <p:ph type="body" idx="1"/>
+          </p:nvPr>
+        </p:nvSpPr>
+        <p:spPr/>
+        <p:txBody>
+          <a:bodyPr/>
+          <a:lstStyle/>
+          <a:p>
+            <a:r>
+              <a:rPr lang="en-US" dirty="0"/>
+              <a:t/>
+            </a:r>
+            <a:endParaRPr lang="en-US" dirty="0"/>
+          </a:p>
+        </p:txBody>
+      </p:sp>
+      <p:sp>
+        <p:nvSpPr>
+          <p:cNvPr id="4" name="Slide Number Placeholder 3"/>
+          <p:cNvSpPr>
+            <a:spLocks noGrp="1"/>
+          </p:cNvSpPr>
+          <p:nvPr>
+            <p:ph type="sldNum" sz="quarter" idx="10"/>
+          </p:nvPr>
+        </p:nvSpPr>
+        <p:spPr/>
+        <p:txBody>
+          <a:bodyPr/>
+          <a:lstStyle/>
+          <a:p>
+            <a:fld id="{F7021451-1387-4CA6-816F-3879F97B5CBC}" type="slidenum">
+              <a:rPr lang="en-US"/>
+              <a:t>14</a:t>
+            </a:fld>
+            <a:endParaRPr lang="en-US"/>
+          </a:p>
+        </p:txBody>
+      </p:sp>
+    </p:spTree>
+    <p:extLst>
+      <p:ext uri="{BB962C8B-B14F-4D97-AF65-F5344CB8AC3E}">
+        <p14:creationId xmlns:p14="http://schemas.microsoft.com/office/powerpoint/2010/main" val="1024086991"/>
+      </p:ext>
+    </p:extLst>
+  </p:cSld>
+  <p:clrMapOvr>
+    <a:masterClrMapping/>
+  </p:clrMapOvr>
+</p:notes>
+</file>
+
+<file path=ppt/notesSlides/notesSlide15.xml><?xml version="1.0" encoding="utf-8"?>
+<p:notes xmlns:a="http://schemas.openxmlformats.org/drawingml/2006/main" xmlns:r="http://schemas.openxmlformats.org/officeDocument/2006/relationships" xmlns:p="http://schemas.openxmlformats.org/presentationml/2006/main">
+  <p:cSld>
+    <p:spTree>
+      <p:nvGrpSpPr>
+        <p:cNvPr id="1" name=""/>
+        <p:cNvGrpSpPr/>
+        <p:nvPr/>
+      </p:nvGrpSpPr>
+      <p:grpSpPr>
+        <a:xfrm>
+          <a:off x="0" y="0"/>
+          <a:ext cx="0" cy="0"/>
+          <a:chOff x="0" y="0"/>
+          <a:chExt cx="0" cy="0"/>
+        </a:xfrm>
+      </p:grpSpPr>
+      <p:sp>
+        <p:nvSpPr>
+          <p:cNvPr id="2" name="Slide Image Placeholder 1"/>
+          <p:cNvSpPr>
+            <a:spLocks noGrp="1" noRot="1" noChangeAspect="1"/>
+          </p:cNvSpPr>
+          <p:nvPr>
+            <p:ph type="sldImg"/>
+          </p:nvPr>
+        </p:nvSpPr>
+        <p:spPr/>
+      </p:sp>
+      <p:sp>
+        <p:nvSpPr>
+          <p:cNvPr id="3" name="Notes Placeholder 2"/>
+          <p:cNvSpPr>
+            <a:spLocks noGrp="1"/>
+          </p:cNvSpPr>
+          <p:nvPr>
+            <p:ph type="body" idx="1"/>
+          </p:nvPr>
+        </p:nvSpPr>
+        <p:spPr/>
+        <p:txBody>
+          <a:bodyPr/>
+          <a:lstStyle/>
+          <a:p>
+            <a:r>
+              <a:rPr lang="en-US" dirty="0"/>
+              <a:t/>
+            </a:r>
+            <a:endParaRPr lang="en-US" dirty="0"/>
+          </a:p>
+        </p:txBody>
+      </p:sp>
+      <p:sp>
+        <p:nvSpPr>
+          <p:cNvPr id="4" name="Slide Number Placeholder 3"/>
+          <p:cNvSpPr>
+            <a:spLocks noGrp="1"/>
+          </p:cNvSpPr>
+          <p:nvPr>
+            <p:ph type="sldNum" sz="quarter" idx="10"/>
+          </p:nvPr>
+        </p:nvSpPr>
+        <p:spPr/>
+        <p:txBody>
+          <a:bodyPr/>
+          <a:lstStyle/>
+          <a:p>
+            <a:fld id="{F7021451-1387-4CA6-816F-3879F97B5CBC}" type="slidenum">
+              <a:rPr lang="en-US"/>
+              <a:t>15</a:t>
+            </a:fld>
+            <a:endParaRPr lang="en-US"/>
+          </a:p>
+        </p:txBody>
+      </p:sp>
+    </p:spTree>
+    <p:extLst>
+      <p:ext uri="{BB962C8B-B14F-4D97-AF65-F5344CB8AC3E}">
+        <p14:creationId xmlns:p14="http://schemas.microsoft.com/office/powerpoint/2010/main" val="1024086991"/>
+      </p:ext>
+    </p:extLst>
+  </p:cSld>
+  <p:clrMapOvr>
+    <a:masterClrMapping/>
+  </p:clrMapOvr>
+</p:notes>
+</file>
+
+<file path=ppt/notesSlides/notesSlide16.xml><?xml version="1.0" encoding="utf-8"?>
+<p:notes xmlns:a="http://schemas.openxmlformats.org/drawingml/2006/main" xmlns:r="http://schemas.openxmlformats.org/officeDocument/2006/relationships" xmlns:p="http://schemas.openxmlformats.org/presentationml/2006/main">
+  <p:cSld>
+    <p:spTree>
+      <p:nvGrpSpPr>
+        <p:cNvPr id="1" name=""/>
+        <p:cNvGrpSpPr/>
+        <p:nvPr/>
+      </p:nvGrpSpPr>
+      <p:grpSpPr>
+        <a:xfrm>
+          <a:off x="0" y="0"/>
+          <a:ext cx="0" cy="0"/>
+          <a:chOff x="0" y="0"/>
+          <a:chExt cx="0" cy="0"/>
+        </a:xfrm>
+      </p:grpSpPr>
+      <p:sp>
+        <p:nvSpPr>
+          <p:cNvPr id="2" name="Slide Image Placeholder 1"/>
+          <p:cNvSpPr>
+            <a:spLocks noGrp="1" noRot="1" noChangeAspect="1"/>
+          </p:cNvSpPr>
+          <p:nvPr>
+            <p:ph type="sldImg"/>
+          </p:nvPr>
+        </p:nvSpPr>
+        <p:spPr/>
+      </p:sp>
+      <p:sp>
+        <p:nvSpPr>
+          <p:cNvPr id="3" name="Notes Placeholder 2"/>
+          <p:cNvSpPr>
+            <a:spLocks noGrp="1"/>
+          </p:cNvSpPr>
+          <p:nvPr>
+            <p:ph type="body" idx="1"/>
+          </p:nvPr>
+        </p:nvSpPr>
+        <p:spPr/>
+        <p:txBody>
+          <a:bodyPr/>
+          <a:lstStyle/>
+          <a:p>
+            <a:r>
+              <a:rPr lang="en-US" dirty="0"/>
+              <a:t/>
+            </a:r>
+            <a:endParaRPr lang="en-US" dirty="0"/>
+          </a:p>
+        </p:txBody>
+      </p:sp>
+      <p:sp>
+        <p:nvSpPr>
+          <p:cNvPr id="4" name="Slide Number Placeholder 3"/>
+          <p:cNvSpPr>
+            <a:spLocks noGrp="1"/>
+          </p:cNvSpPr>
+          <p:nvPr>
+            <p:ph type="sldNum" sz="quarter" idx="10"/>
+          </p:nvPr>
+        </p:nvSpPr>
+        <p:spPr/>
+        <p:txBody>
+          <a:bodyPr/>
+          <a:lstStyle/>
+          <a:p>
+            <a:fld id="{F7021451-1387-4CA6-816F-3879F97B5CBC}" type="slidenum">
+              <a:rPr lang="en-US"/>
+              <a:t>16</a:t>
+            </a:fld>
+            <a:endParaRPr lang="en-US"/>
+          </a:p>
+        </p:txBody>
+      </p:sp>
+    </p:spTree>
+    <p:extLst>
+      <p:ext uri="{BB962C8B-B14F-4D97-AF65-F5344CB8AC3E}">
+        <p14:creationId xmlns:p14="http://schemas.microsoft.com/office/powerpoint/2010/main" val="1024086991"/>
+      </p:ext>
+    </p:extLst>
+  </p:cSld>
+  <p:clrMapOvr>
+    <a:masterClrMapping/>
+  </p:clrMapOvr>
+</p:notes>
+</file>
+
+<file path=ppt/notesSlides/notesSlide17.xml><?xml version="1.0" encoding="utf-8"?>
+<p:notes xmlns:a="http://schemas.openxmlformats.org/drawingml/2006/main" xmlns:r="http://schemas.openxmlformats.org/officeDocument/2006/relationships" xmlns:p="http://schemas.openxmlformats.org/presentationml/2006/main">
+  <p:cSld>
+    <p:spTree>
+      <p:nvGrpSpPr>
+        <p:cNvPr id="1" name=""/>
+        <p:cNvGrpSpPr/>
+        <p:nvPr/>
+      </p:nvGrpSpPr>
+      <p:grpSpPr>
+        <a:xfrm>
+          <a:off x="0" y="0"/>
+          <a:ext cx="0" cy="0"/>
+          <a:chOff x="0" y="0"/>
+          <a:chExt cx="0" cy="0"/>
+        </a:xfrm>
+      </p:grpSpPr>
+      <p:sp>
+        <p:nvSpPr>
+          <p:cNvPr id="2" name="Slide Image Placeholder 1"/>
+          <p:cNvSpPr>
+            <a:spLocks noGrp="1" noRot="1" noChangeAspect="1"/>
+          </p:cNvSpPr>
+          <p:nvPr>
+            <p:ph type="sldImg"/>
+          </p:nvPr>
+        </p:nvSpPr>
+        <p:spPr/>
+      </p:sp>
+      <p:sp>
+        <p:nvSpPr>
+          <p:cNvPr id="3" name="Notes Placeholder 2"/>
+          <p:cNvSpPr>
+            <a:spLocks noGrp="1"/>
+          </p:cNvSpPr>
+          <p:nvPr>
+            <p:ph type="body" idx="1"/>
+          </p:nvPr>
+        </p:nvSpPr>
+        <p:spPr/>
+        <p:txBody>
+          <a:bodyPr/>
+          <a:lstStyle/>
+          <a:p>
+            <a:r>
+              <a:rPr lang="en-US" dirty="0"/>
+              <a:t/>
+            </a:r>
+            <a:endParaRPr lang="en-US" dirty="0"/>
+          </a:p>
+        </p:txBody>
+      </p:sp>
+      <p:sp>
+        <p:nvSpPr>
+          <p:cNvPr id="4" name="Slide Number Placeholder 3"/>
+          <p:cNvSpPr>
+            <a:spLocks noGrp="1"/>
+          </p:cNvSpPr>
+          <p:nvPr>
+            <p:ph type="sldNum" sz="quarter" idx="10"/>
+          </p:nvPr>
+        </p:nvSpPr>
+        <p:spPr/>
+        <p:txBody>
+          <a:bodyPr/>
+          <a:lstStyle/>
+          <a:p>
+            <a:fld id="{F7021451-1387-4CA6-816F-3879F97B5CBC}" type="slidenum">
+              <a:rPr lang="en-US"/>
+              <a:t>17</a:t>
+            </a:fld>
+            <a:endParaRPr lang="en-US"/>
+          </a:p>
+        </p:txBody>
+      </p:sp>
+    </p:spTree>
+    <p:extLst>
+      <p:ext uri="{BB962C8B-B14F-4D97-AF65-F5344CB8AC3E}">
+        <p14:creationId xmlns:p14="http://schemas.microsoft.com/office/powerpoint/2010/main" val="1024086991"/>
+      </p:ext>
+    </p:extLst>
+  </p:cSld>
+  <p:clrMapOvr>
+    <a:masterClrMapping/>
+  </p:clrMapOvr>
+</p:notes>
+</file>
+
+<file path=ppt/notesSlides/notesSlide18.xml><?xml version="1.0" encoding="utf-8"?>
+<p:notes xmlns:a="http://schemas.openxmlformats.org/drawingml/2006/main" xmlns:r="http://schemas.openxmlformats.org/officeDocument/2006/relationships" xmlns:p="http://schemas.openxmlformats.org/presentationml/2006/main">
+  <p:cSld>
+    <p:spTree>
+      <p:nvGrpSpPr>
+        <p:cNvPr id="1" name=""/>
+        <p:cNvGrpSpPr/>
+        <p:nvPr/>
+      </p:nvGrpSpPr>
+      <p:grpSpPr>
+        <a:xfrm>
+          <a:off x="0" y="0"/>
+          <a:ext cx="0" cy="0"/>
+          <a:chOff x="0" y="0"/>
+          <a:chExt cx="0" cy="0"/>
+        </a:xfrm>
+      </p:grpSpPr>
+      <p:sp>
+        <p:nvSpPr>
+          <p:cNvPr id="2" name="Slide Image Placeholder 1"/>
+          <p:cNvSpPr>
+            <a:spLocks noGrp="1" noRot="1" noChangeAspect="1"/>
+          </p:cNvSpPr>
+          <p:nvPr>
+            <p:ph type="sldImg"/>
+          </p:nvPr>
+        </p:nvSpPr>
+        <p:spPr/>
+      </p:sp>
+      <p:sp>
+        <p:nvSpPr>
+          <p:cNvPr id="3" name="Notes Placeholder 2"/>
+          <p:cNvSpPr>
+            <a:spLocks noGrp="1"/>
+          </p:cNvSpPr>
+          <p:nvPr>
+            <p:ph type="body" idx="1"/>
+          </p:nvPr>
+        </p:nvSpPr>
+        <p:spPr/>
+        <p:txBody>
+          <a:bodyPr/>
+          <a:lstStyle/>
+          <a:p>
+            <a:r>
+              <a:rPr lang="en-US" dirty="0"/>
+              <a:t/>
+            </a:r>
+            <a:endParaRPr lang="en-US" dirty="0"/>
+          </a:p>
+        </p:txBody>
+      </p:sp>
+      <p:sp>
+        <p:nvSpPr>
+          <p:cNvPr id="4" name="Slide Number Placeholder 3"/>
+          <p:cNvSpPr>
+            <a:spLocks noGrp="1"/>
+          </p:cNvSpPr>
+          <p:nvPr>
+            <p:ph type="sldNum" sz="quarter" idx="10"/>
+          </p:nvPr>
+        </p:nvSpPr>
+        <p:spPr/>
+        <p:txBody>
+          <a:bodyPr/>
+          <a:lstStyle/>
+          <a:p>
+            <a:fld id="{F7021451-1387-4CA6-816F-3879F97B5CBC}" type="slidenum">
+              <a:rPr lang="en-US"/>
+              <a:t>18</a:t>
+            </a:fld>
+            <a:endParaRPr lang="en-US"/>
+          </a:p>
+        </p:txBody>
+      </p:sp>
+    </p:spTree>
+    <p:extLst>
+      <p:ext uri="{BB962C8B-B14F-4D97-AF65-F5344CB8AC3E}">
+        <p14:creationId xmlns:p14="http://schemas.microsoft.com/office/powerpoint/2010/main" val="1024086991"/>
+      </p:ext>
+    </p:extLst>
+  </p:cSld>
+  <p:clrMapOvr>
+    <a:masterClrMapping/>
+  </p:clrMapOvr>
+</p:notes>
+</file>
+
+<file path=ppt/notesSlides/notesSlide19.xml><?xml version="1.0" encoding="utf-8"?>
+<p:notes xmlns:a="http://schemas.openxmlformats.org/drawingml/2006/main" xmlns:r="http://schemas.openxmlformats.org/officeDocument/2006/relationships" xmlns:p="http://schemas.openxmlformats.org/presentationml/2006/main">
+  <p:cSld>
+    <p:spTree>
+      <p:nvGrpSpPr>
+        <p:cNvPr id="1" name=""/>
+        <p:cNvGrpSpPr/>
+        <p:nvPr/>
+      </p:nvGrpSpPr>
+      <p:grpSpPr>
+        <a:xfrm>
+          <a:off x="0" y="0"/>
+          <a:ext cx="0" cy="0"/>
+          <a:chOff x="0" y="0"/>
+          <a:chExt cx="0" cy="0"/>
+        </a:xfrm>
+      </p:grpSpPr>
+      <p:sp>
+        <p:nvSpPr>
+          <p:cNvPr id="2" name="Slide Image Placeholder 1"/>
+          <p:cNvSpPr>
+            <a:spLocks noGrp="1" noRot="1" noChangeAspect="1"/>
+          </p:cNvSpPr>
+          <p:nvPr>
+            <p:ph type="sldImg"/>
+          </p:nvPr>
+        </p:nvSpPr>
+        <p:spPr/>
+      </p:sp>
+      <p:sp>
+        <p:nvSpPr>
+          <p:cNvPr id="3" name="Notes Placeholder 2"/>
+          <p:cNvSpPr>
+            <a:spLocks noGrp="1"/>
+          </p:cNvSpPr>
+          <p:nvPr>
+            <p:ph type="body" idx="1"/>
+          </p:nvPr>
+        </p:nvSpPr>
+        <p:spPr/>
+        <p:txBody>
+          <a:bodyPr/>
+          <a:lstStyle/>
+          <a:p>
+            <a:r>
+              <a:rPr lang="en-US" dirty="0"/>
+              <a:t/>
+            </a:r>
+            <a:endParaRPr lang="en-US" dirty="0"/>
+          </a:p>
+        </p:txBody>
+      </p:sp>
+      <p:sp>
+        <p:nvSpPr>
+          <p:cNvPr id="4" name="Slide Number Placeholder 3"/>
+          <p:cNvSpPr>
+            <a:spLocks noGrp="1"/>
+          </p:cNvSpPr>
+          <p:nvPr>
+            <p:ph type="sldNum" sz="quarter" idx="10"/>
+          </p:nvPr>
+        </p:nvSpPr>
+        <p:spPr/>
+        <p:txBody>
+          <a:bodyPr/>
+          <a:lstStyle/>
+          <a:p>
+            <a:fld id="{F7021451-1387-4CA6-816F-3879F97B5CBC}" type="slidenum">
+              <a:rPr lang="en-US"/>
+              <a:t>19</a:t>
             </a:fld>
             <a:endParaRPr lang="en-US"/>
           </a:p>
@@ -1968,6 +2858,3061 @@
 </p:sld>
 </file>
 
+<file path=ppt/slides/slide10.xml><?xml version="1.0" encoding="utf-8"?>
+<p:sld xmlns:a="http://schemas.openxmlformats.org/drawingml/2006/main" xmlns:r="http://schemas.openxmlformats.org/officeDocument/2006/relationships" xmlns:p="http://schemas.openxmlformats.org/presentationml/2006/main">
+  <p:cSld name="Slide 10">
+    <p:bg>
+      <p:bgPr>
+        <a:solidFill>
+          <a:srgbClr val="F8FAFC"/>
+        </a:solidFill>
+      </p:bgPr>
+    </p:bg>
+    <p:spTree>
+      <p:nvGrpSpPr>
+        <p:cNvPr id="1" name=""/>
+        <p:cNvGrpSpPr/>
+        <p:nvPr/>
+      </p:nvGrpSpPr>
+      <p:grpSpPr>
+        <a:xfrm>
+          <a:off x="0" y="0"/>
+          <a:ext cx="0" cy="0"/>
+          <a:chOff x="0" y="0"/>
+          <a:chExt cx="0" cy="0"/>
+        </a:xfrm>
+      </p:grpSpPr>
+      <p:sp>
+        <p:nvSpPr>
+          <p:cNvPr id="2" name="Shape 0"/>
+          <p:cNvSpPr/>
+          <p:nvPr/>
+        </p:nvSpPr>
+        <p:spPr>
+          <a:xfrm>
+            <a:off x="0" y="0"/>
+            <a:ext cx="54864" cy="6858000"/>
+          </a:xfrm>
+          <a:prstGeom prst="rect">
+            <a:avLst/>
+          </a:prstGeom>
+          <a:solidFill>
+            <a:srgbClr val="8B5CF6"/>
+          </a:solidFill>
+          <a:ln/>
+        </p:spPr>
+      </p:sp>
+      <p:sp>
+        <p:nvSpPr>
+          <p:cNvPr id="3" name="Text 1"/>
+          <p:cNvSpPr/>
+          <p:nvPr/>
+        </p:nvSpPr>
+        <p:spPr>
+          <a:xfrm>
+            <a:off x="731520" y="411480"/>
+            <a:ext cx="10698480" cy="640080"/>
+          </a:xfrm>
+          <a:prstGeom prst="rect">
+            <a:avLst/>
+          </a:prstGeom>
+          <a:noFill/>
+          <a:ln/>
+        </p:spPr>
+        <p:txBody>
+          <a:bodyPr wrap="square" lIns="0" tIns="0" rIns="0" bIns="0" rtlCol="0" anchor="ctr"/>
+          <a:lstStyle/>
+          <a:p>
+            <a:pPr indent="0" marL="0">
+              <a:buNone/>
+            </a:pPr>
+            <a:r>
+              <a:rPr lang="en-US" sz="2800" b="1" dirty="0">
+                <a:solidFill>
+                  <a:srgbClr val="0F172A"/>
+                </a:solidFill>
+                <a:latin typeface="Calibri" pitchFamily="34" charset="0"/>
+                <a:ea typeface="Calibri" pitchFamily="34" charset="-122"/>
+                <a:cs typeface="Calibri" pitchFamily="34" charset="-120"/>
+              </a:rPr>
+              <a:t>Meta Ads — Top Ads</a:t>
+            </a:r>
+            <a:endParaRPr lang="en-US" sz="2800" dirty="0"/>
+          </a:p>
+        </p:txBody>
+      </p:sp>
+      <p:sp>
+        <p:nvSpPr>
+          <p:cNvPr id="4" name="Shape 2"/>
+          <p:cNvSpPr/>
+          <p:nvPr/>
+        </p:nvSpPr>
+        <p:spPr>
+          <a:xfrm>
+            <a:off x="731520" y="1371600"/>
+            <a:ext cx="10698480" cy="3657600"/>
+          </a:xfrm>
+          <a:prstGeom prst="rect">
+            <a:avLst/>
+          </a:prstGeom>
+          <a:solidFill>
+            <a:srgbClr val="FFFFFF"/>
+          </a:solidFill>
+          <a:ln/>
+          <a:effectLst>
+            <a:outerShdw sx="100000" sy="100000" kx="0" ky="0" algn="bl" rotWithShape="0" blurRad="63500" dist="25400" dir="8100000">
+              <a:srgbClr val="000000">
+                <a:alpha val="7000"/>
+              </a:srgbClr>
+            </a:outerShdw>
+          </a:effectLst>
+        </p:spPr>
+      </p:sp>
+      <p:sp>
+        <p:nvSpPr>
+          <p:cNvPr id="5" name="Text 3"/>
+          <p:cNvSpPr/>
+          <p:nvPr/>
+        </p:nvSpPr>
+        <p:spPr>
+          <a:xfrm>
+            <a:off x="731520" y="1371600"/>
+            <a:ext cx="10698480" cy="3657600"/>
+          </a:xfrm>
+          <a:prstGeom prst="rect">
+            <a:avLst/>
+          </a:prstGeom>
+          <a:noFill/>
+          <a:ln/>
+        </p:spPr>
+        <p:txBody>
+          <a:bodyPr wrap="square" rtlCol="0" anchor="ctr"/>
+          <a:lstStyle/>
+          <a:p>
+            <a:pPr algn="ctr" indent="0" marL="0">
+              <a:buNone/>
+            </a:pPr>
+            <a:r>
+              <a:rPr lang="en-US" sz="1000" dirty="0">
+                <a:solidFill>
+                  <a:srgbClr val="94A3B8"/>
+                </a:solidFill>
+                <a:latin typeface="Calibri" pitchFamily="34" charset="0"/>
+                <a:ea typeface="Calibri" pitchFamily="34" charset="-122"/>
+                <a:cs typeface="Calibri" pitchFamily="34" charset="-120"/>
+              </a:rPr>
+              <a:t>{{chart_campaigns}}</a:t>
+            </a:r>
+            <a:endParaRPr lang="en-US" sz="1000" dirty="0"/>
+          </a:p>
+        </p:txBody>
+      </p:sp>
+      <p:sp>
+        <p:nvSpPr>
+          <p:cNvPr id="6" name="Text 4"/>
+          <p:cNvSpPr/>
+          <p:nvPr/>
+        </p:nvSpPr>
+        <p:spPr>
+          <a:xfrm>
+            <a:off x="731520" y="5257800"/>
+            <a:ext cx="10698480" cy="1097280"/>
+          </a:xfrm>
+          <a:prstGeom prst="rect">
+            <a:avLst/>
+          </a:prstGeom>
+          <a:noFill/>
+          <a:ln/>
+        </p:spPr>
+        <p:txBody>
+          <a:bodyPr wrap="square" rtlCol="0" anchor="t"/>
+          <a:lstStyle/>
+          <a:p>
+            <a:pPr indent="0" marL="0">
+              <a:lnSpc>
+                <a:spcPct val="135000"/>
+              </a:lnSpc>
+              <a:buNone/>
+            </a:pPr>
+            <a:r>
+              <a:rPr lang="en-US" sz="1200" dirty="0">
+                <a:solidFill>
+                  <a:srgbClr val="334155"/>
+                </a:solidFill>
+                <a:latin typeface="Calibri" pitchFamily="34" charset="0"/>
+                <a:ea typeface="Calibri" pitchFamily="34" charset="-122"/>
+                <a:cs typeface="Calibri" pitchFamily="34" charset="-120"/>
+              </a:rPr>
+              <a:t>{{ads_narrative}}</a:t>
+            </a:r>
+            <a:endParaRPr lang="en-US" sz="1200" dirty="0"/>
+          </a:p>
+        </p:txBody>
+      </p:sp>
+      <p:sp>
+        <p:nvSpPr>
+          <p:cNvPr id="7" name="Text 5"/>
+          <p:cNvSpPr/>
+          <p:nvPr/>
+        </p:nvSpPr>
+        <p:spPr>
+          <a:xfrm>
+            <a:off x="731520" y="6510528"/>
+            <a:ext cx="10698480" cy="256032"/>
+          </a:xfrm>
+          <a:prstGeom prst="rect">
+            <a:avLst/>
+          </a:prstGeom>
+          <a:noFill/>
+          <a:ln/>
+        </p:spPr>
+        <p:txBody>
+          <a:bodyPr wrap="square" rtlCol="0" anchor="ctr"/>
+          <a:lstStyle/>
+          <a:p>
+            <a:pPr indent="0" marL="0">
+              <a:buNone/>
+            </a:pPr>
+            <a:r>
+              <a:rPr lang="en-US" sz="800" dirty="0">
+                <a:solidFill>
+                  <a:srgbClr val="94A3B8"/>
+                </a:solidFill>
+                <a:latin typeface="Calibri" pitchFamily="34" charset="0"/>
+                <a:ea typeface="Calibri" pitchFamily="34" charset="-122"/>
+                <a:cs typeface="Calibri" pitchFamily="34" charset="-120"/>
+              </a:rPr>
+              <a:t>{{agency_name}}  •  Confidential  •  Page 10</a:t>
+            </a:r>
+            <a:endParaRPr lang="en-US" sz="800" dirty="0"/>
+          </a:p>
+        </p:txBody>
+      </p:sp>
+    </p:spTree>
+  </p:cSld>
+  <p:clrMapOvr>
+    <a:masterClrMapping/>
+  </p:clrMapOvr>
+</p:sld>
+</file>
+
+<file path=ppt/slides/slide11.xml><?xml version="1.0" encoding="utf-8"?>
+<p:sld xmlns:a="http://schemas.openxmlformats.org/drawingml/2006/main" xmlns:r="http://schemas.openxmlformats.org/officeDocument/2006/relationships" xmlns:p="http://schemas.openxmlformats.org/presentationml/2006/main">
+  <p:cSld name="Slide 11">
+    <p:bg>
+      <p:bgPr>
+        <a:solidFill>
+          <a:srgbClr val="F8FAFC"/>
+        </a:solidFill>
+      </p:bgPr>
+    </p:bg>
+    <p:spTree>
+      <p:nvGrpSpPr>
+        <p:cNvPr id="1" name=""/>
+        <p:cNvGrpSpPr/>
+        <p:nvPr/>
+      </p:nvGrpSpPr>
+      <p:grpSpPr>
+        <a:xfrm>
+          <a:off x="0" y="0"/>
+          <a:ext cx="0" cy="0"/>
+          <a:chOff x="0" y="0"/>
+          <a:chExt cx="0" cy="0"/>
+        </a:xfrm>
+      </p:grpSpPr>
+      <p:sp>
+        <p:nvSpPr>
+          <p:cNvPr id="2" name="Shape 0"/>
+          <p:cNvSpPr/>
+          <p:nvPr/>
+        </p:nvSpPr>
+        <p:spPr>
+          <a:xfrm>
+            <a:off x="0" y="0"/>
+            <a:ext cx="54864" cy="6858000"/>
+          </a:xfrm>
+          <a:prstGeom prst="rect">
+            <a:avLst/>
+          </a:prstGeom>
+          <a:solidFill>
+            <a:srgbClr val="14B8A6"/>
+          </a:solidFill>
+          <a:ln/>
+        </p:spPr>
+      </p:sp>
+      <p:sp>
+        <p:nvSpPr>
+          <p:cNvPr id="3" name="Text 1"/>
+          <p:cNvSpPr/>
+          <p:nvPr/>
+        </p:nvSpPr>
+        <p:spPr>
+          <a:xfrm>
+            <a:off x="731520" y="411480"/>
+            <a:ext cx="10698480" cy="640080"/>
+          </a:xfrm>
+          <a:prstGeom prst="rect">
+            <a:avLst/>
+          </a:prstGeom>
+          <a:noFill/>
+          <a:ln/>
+        </p:spPr>
+        <p:txBody>
+          <a:bodyPr wrap="square" lIns="0" tIns="0" rIns="0" bIns="0" rtlCol="0" anchor="ctr"/>
+          <a:lstStyle/>
+          <a:p>
+            <a:pPr indent="0" marL="0">
+              <a:buNone/>
+            </a:pPr>
+            <a:r>
+              <a:rPr lang="en-US" sz="2800" b="1" dirty="0">
+                <a:solidFill>
+                  <a:srgbClr val="0F172A"/>
+                </a:solidFill>
+                <a:latin typeface="Calibri" pitchFamily="34" charset="0"/>
+                <a:ea typeface="Calibri" pitchFamily="34" charset="-122"/>
+                <a:cs typeface="Calibri" pitchFamily="34" charset="-120"/>
+              </a:rPr>
+              <a:t>Search Advertising — Google Ads</a:t>
+            </a:r>
+            <a:endParaRPr lang="en-US" sz="2800" dirty="0"/>
+          </a:p>
+        </p:txBody>
+      </p:sp>
+      <p:sp>
+        <p:nvSpPr>
+          <p:cNvPr id="4" name="Shape 2"/>
+          <p:cNvSpPr/>
+          <p:nvPr/>
+        </p:nvSpPr>
+        <p:spPr>
+          <a:xfrm>
+            <a:off x="731520" y="1371600"/>
+            <a:ext cx="5120640" cy="2743200"/>
+          </a:xfrm>
+          <a:prstGeom prst="rect">
+            <a:avLst/>
+          </a:prstGeom>
+          <a:solidFill>
+            <a:srgbClr val="FFFFFF"/>
+          </a:solidFill>
+          <a:ln/>
+          <a:effectLst>
+            <a:outerShdw sx="100000" sy="100000" kx="0" ky="0" algn="bl" rotWithShape="0" blurRad="63500" dist="25400" dir="8100000">
+              <a:srgbClr val="000000">
+                <a:alpha val="7000"/>
+              </a:srgbClr>
+            </a:outerShdw>
+          </a:effectLst>
+        </p:spPr>
+      </p:sp>
+      <p:sp>
+        <p:nvSpPr>
+          <p:cNvPr id="5" name="Text 3"/>
+          <p:cNvSpPr/>
+          <p:nvPr/>
+        </p:nvSpPr>
+        <p:spPr>
+          <a:xfrm>
+            <a:off x="731520" y="1371600"/>
+            <a:ext cx="5120640" cy="2743200"/>
+          </a:xfrm>
+          <a:prstGeom prst="rect">
+            <a:avLst/>
+          </a:prstGeom>
+          <a:noFill/>
+          <a:ln/>
+        </p:spPr>
+        <p:txBody>
+          <a:bodyPr wrap="square" rtlCol="0" anchor="ctr"/>
+          <a:lstStyle/>
+          <a:p>
+            <a:pPr algn="ctr" indent="0" marL="0">
+              <a:buNone/>
+            </a:pPr>
+            <a:r>
+              <a:rPr lang="en-US" sz="1000" dirty="0">
+                <a:solidFill>
+                  <a:srgbClr val="94A3B8"/>
+                </a:solidFill>
+                <a:latin typeface="Calibri" pitchFamily="34" charset="0"/>
+                <a:ea typeface="Calibri" pitchFamily="34" charset="-122"/>
+                <a:cs typeface="Calibri" pitchFamily="34" charset="-120"/>
+              </a:rPr>
+              <a:t>{{chart_gads_spend}}</a:t>
+            </a:r>
+            <a:endParaRPr lang="en-US" sz="1000" dirty="0"/>
+          </a:p>
+        </p:txBody>
+      </p:sp>
+      <p:sp>
+        <p:nvSpPr>
+          <p:cNvPr id="6" name="Shape 4"/>
+          <p:cNvSpPr/>
+          <p:nvPr/>
+        </p:nvSpPr>
+        <p:spPr>
+          <a:xfrm>
+            <a:off x="6217920" y="1371600"/>
+            <a:ext cx="5212080" cy="2743200"/>
+          </a:xfrm>
+          <a:prstGeom prst="rect">
+            <a:avLst/>
+          </a:prstGeom>
+          <a:solidFill>
+            <a:srgbClr val="FFFFFF"/>
+          </a:solidFill>
+          <a:ln/>
+          <a:effectLst>
+            <a:outerShdw sx="100000" sy="100000" kx="0" ky="0" algn="bl" rotWithShape="0" blurRad="63500" dist="25400" dir="8100000">
+              <a:srgbClr val="000000">
+                <a:alpha val="7000"/>
+              </a:srgbClr>
+            </a:outerShdw>
+          </a:effectLst>
+        </p:spPr>
+      </p:sp>
+      <p:sp>
+        <p:nvSpPr>
+          <p:cNvPr id="7" name="Text 5"/>
+          <p:cNvSpPr/>
+          <p:nvPr/>
+        </p:nvSpPr>
+        <p:spPr>
+          <a:xfrm>
+            <a:off x="6217920" y="1371600"/>
+            <a:ext cx="5212080" cy="2743200"/>
+          </a:xfrm>
+          <a:prstGeom prst="rect">
+            <a:avLst/>
+          </a:prstGeom>
+          <a:noFill/>
+          <a:ln/>
+        </p:spPr>
+        <p:txBody>
+          <a:bodyPr wrap="square" rtlCol="0" anchor="ctr"/>
+          <a:lstStyle/>
+          <a:p>
+            <a:pPr algn="ctr" indent="0" marL="0">
+              <a:buNone/>
+            </a:pPr>
+            <a:r>
+              <a:rPr lang="en-US" sz="1000" dirty="0">
+                <a:solidFill>
+                  <a:srgbClr val="94A3B8"/>
+                </a:solidFill>
+                <a:latin typeface="Calibri" pitchFamily="34" charset="0"/>
+                <a:ea typeface="Calibri" pitchFamily="34" charset="-122"/>
+                <a:cs typeface="Calibri" pitchFamily="34" charset="-120"/>
+              </a:rPr>
+              <a:t>{{chart_gads_campaigns}}</a:t>
+            </a:r>
+            <a:endParaRPr lang="en-US" sz="1000" dirty="0"/>
+          </a:p>
+        </p:txBody>
+      </p:sp>
+      <p:sp>
+        <p:nvSpPr>
+          <p:cNvPr id="8" name="Text 6"/>
+          <p:cNvSpPr/>
+          <p:nvPr/>
+        </p:nvSpPr>
+        <p:spPr>
+          <a:xfrm>
+            <a:off x="731520" y="4389120"/>
+            <a:ext cx="10698480" cy="1828800"/>
+          </a:xfrm>
+          <a:prstGeom prst="rect">
+            <a:avLst/>
+          </a:prstGeom>
+          <a:noFill/>
+          <a:ln/>
+        </p:spPr>
+        <p:txBody>
+          <a:bodyPr wrap="square" rtlCol="0" anchor="t"/>
+          <a:lstStyle/>
+          <a:p>
+            <a:pPr indent="0" marL="0">
+              <a:lnSpc>
+                <a:spcPct val="135000"/>
+              </a:lnSpc>
+              <a:buNone/>
+            </a:pPr>
+            <a:r>
+              <a:rPr lang="en-US" sz="1200" dirty="0">
+                <a:solidFill>
+                  <a:srgbClr val="334155"/>
+                </a:solidFill>
+                <a:latin typeface="Calibri" pitchFamily="34" charset="0"/>
+                <a:ea typeface="Calibri" pitchFamily="34" charset="-122"/>
+                <a:cs typeface="Calibri" pitchFamily="34" charset="-120"/>
+              </a:rPr>
+              <a:t>{{google_ads_narrative}}</a:t>
+            </a:r>
+            <a:endParaRPr lang="en-US" sz="1200" dirty="0"/>
+          </a:p>
+        </p:txBody>
+      </p:sp>
+      <p:sp>
+        <p:nvSpPr>
+          <p:cNvPr id="9" name="Text 7"/>
+          <p:cNvSpPr/>
+          <p:nvPr/>
+        </p:nvSpPr>
+        <p:spPr>
+          <a:xfrm>
+            <a:off x="731520" y="6510528"/>
+            <a:ext cx="10698480" cy="256032"/>
+          </a:xfrm>
+          <a:prstGeom prst="rect">
+            <a:avLst/>
+          </a:prstGeom>
+          <a:noFill/>
+          <a:ln/>
+        </p:spPr>
+        <p:txBody>
+          <a:bodyPr wrap="square" rtlCol="0" anchor="ctr"/>
+          <a:lstStyle/>
+          <a:p>
+            <a:pPr indent="0" marL="0">
+              <a:buNone/>
+            </a:pPr>
+            <a:r>
+              <a:rPr lang="en-US" sz="800" dirty="0">
+                <a:solidFill>
+                  <a:srgbClr val="94A3B8"/>
+                </a:solidFill>
+                <a:latin typeface="Calibri" pitchFamily="34" charset="0"/>
+                <a:ea typeface="Calibri" pitchFamily="34" charset="-122"/>
+                <a:cs typeface="Calibri" pitchFamily="34" charset="-120"/>
+              </a:rPr>
+              <a:t>{{agency_name}}  •  Confidential  •  Page 11</a:t>
+            </a:r>
+            <a:endParaRPr lang="en-US" sz="800" dirty="0"/>
+          </a:p>
+        </p:txBody>
+      </p:sp>
+    </p:spTree>
+  </p:cSld>
+  <p:clrMapOvr>
+    <a:masterClrMapping/>
+  </p:clrMapOvr>
+</p:sld>
+</file>
+
+<file path=ppt/slides/slide12.xml><?xml version="1.0" encoding="utf-8"?>
+<p:sld xmlns:a="http://schemas.openxmlformats.org/drawingml/2006/main" xmlns:r="http://schemas.openxmlformats.org/officeDocument/2006/relationships" xmlns:p="http://schemas.openxmlformats.org/presentationml/2006/main">
+  <p:cSld name="Slide 12">
+    <p:bg>
+      <p:bgPr>
+        <a:solidFill>
+          <a:srgbClr val="F8FAFC"/>
+        </a:solidFill>
+      </p:bgPr>
+    </p:bg>
+    <p:spTree>
+      <p:nvGrpSpPr>
+        <p:cNvPr id="1" name=""/>
+        <p:cNvGrpSpPr/>
+        <p:nvPr/>
+      </p:nvGrpSpPr>
+      <p:grpSpPr>
+        <a:xfrm>
+          <a:off x="0" y="0"/>
+          <a:ext cx="0" cy="0"/>
+          <a:chOff x="0" y="0"/>
+          <a:chExt cx="0" cy="0"/>
+        </a:xfrm>
+      </p:grpSpPr>
+      <p:sp>
+        <p:nvSpPr>
+          <p:cNvPr id="2" name="Shape 0"/>
+          <p:cNvSpPr/>
+          <p:nvPr/>
+        </p:nvSpPr>
+        <p:spPr>
+          <a:xfrm>
+            <a:off x="0" y="0"/>
+            <a:ext cx="54864" cy="6858000"/>
+          </a:xfrm>
+          <a:prstGeom prst="rect">
+            <a:avLst/>
+          </a:prstGeom>
+          <a:solidFill>
+            <a:srgbClr val="14B8A6"/>
+          </a:solidFill>
+          <a:ln/>
+        </p:spPr>
+      </p:sp>
+      <p:sp>
+        <p:nvSpPr>
+          <p:cNvPr id="3" name="Text 1"/>
+          <p:cNvSpPr/>
+          <p:nvPr/>
+        </p:nvSpPr>
+        <p:spPr>
+          <a:xfrm>
+            <a:off x="731520" y="411480"/>
+            <a:ext cx="10698480" cy="640080"/>
+          </a:xfrm>
+          <a:prstGeom prst="rect">
+            <a:avLst/>
+          </a:prstGeom>
+          <a:noFill/>
+          <a:ln/>
+        </p:spPr>
+        <p:txBody>
+          <a:bodyPr wrap="square" lIns="0" tIns="0" rIns="0" bIns="0" rtlCol="0" anchor="ctr"/>
+          <a:lstStyle/>
+          <a:p>
+            <a:pPr indent="0" marL="0">
+              <a:buNone/>
+            </a:pPr>
+            <a:r>
+              <a:rPr lang="en-US" sz="2800" b="1" dirty="0">
+                <a:solidFill>
+                  <a:srgbClr val="0F172A"/>
+                </a:solidFill>
+                <a:latin typeface="Calibri" pitchFamily="34" charset="0"/>
+                <a:ea typeface="Calibri" pitchFamily="34" charset="-122"/>
+                <a:cs typeface="Calibri" pitchFamily="34" charset="-120"/>
+              </a:rPr>
+              <a:t>Search Terms Performance</a:t>
+            </a:r>
+            <a:endParaRPr lang="en-US" sz="2800" dirty="0"/>
+          </a:p>
+        </p:txBody>
+      </p:sp>
+      <p:sp>
+        <p:nvSpPr>
+          <p:cNvPr id="4" name="Shape 2"/>
+          <p:cNvSpPr/>
+          <p:nvPr/>
+        </p:nvSpPr>
+        <p:spPr>
+          <a:xfrm>
+            <a:off x="731520" y="1371600"/>
+            <a:ext cx="10698480" cy="3657600"/>
+          </a:xfrm>
+          <a:prstGeom prst="rect">
+            <a:avLst/>
+          </a:prstGeom>
+          <a:solidFill>
+            <a:srgbClr val="FFFFFF"/>
+          </a:solidFill>
+          <a:ln/>
+          <a:effectLst>
+            <a:outerShdw sx="100000" sy="100000" kx="0" ky="0" algn="bl" rotWithShape="0" blurRad="63500" dist="25400" dir="8100000">
+              <a:srgbClr val="000000">
+                <a:alpha val="7000"/>
+              </a:srgbClr>
+            </a:outerShdw>
+          </a:effectLst>
+        </p:spPr>
+      </p:sp>
+      <p:sp>
+        <p:nvSpPr>
+          <p:cNvPr id="5" name="Text 3"/>
+          <p:cNvSpPr/>
+          <p:nvPr/>
+        </p:nvSpPr>
+        <p:spPr>
+          <a:xfrm>
+            <a:off x="731520" y="1371600"/>
+            <a:ext cx="10698480" cy="3657600"/>
+          </a:xfrm>
+          <a:prstGeom prst="rect">
+            <a:avLst/>
+          </a:prstGeom>
+          <a:noFill/>
+          <a:ln/>
+        </p:spPr>
+        <p:txBody>
+          <a:bodyPr wrap="square" rtlCol="0" anchor="ctr"/>
+          <a:lstStyle/>
+          <a:p>
+            <a:pPr algn="ctr" indent="0" marL="0">
+              <a:buNone/>
+            </a:pPr>
+            <a:r>
+              <a:rPr lang="en-US" sz="1000" dirty="0">
+                <a:solidFill>
+                  <a:srgbClr val="94A3B8"/>
+                </a:solidFill>
+                <a:latin typeface="Calibri" pitchFamily="34" charset="0"/>
+                <a:ea typeface="Calibri" pitchFamily="34" charset="-122"/>
+                <a:cs typeface="Calibri" pitchFamily="34" charset="-120"/>
+              </a:rPr>
+              <a:t>{{chart_search_terms}}</a:t>
+            </a:r>
+            <a:endParaRPr lang="en-US" sz="1000" dirty="0"/>
+          </a:p>
+        </p:txBody>
+      </p:sp>
+      <p:sp>
+        <p:nvSpPr>
+          <p:cNvPr id="6" name="Text 4"/>
+          <p:cNvSpPr/>
+          <p:nvPr/>
+        </p:nvSpPr>
+        <p:spPr>
+          <a:xfrm>
+            <a:off x="731520" y="5257800"/>
+            <a:ext cx="10698480" cy="1097280"/>
+          </a:xfrm>
+          <a:prstGeom prst="rect">
+            <a:avLst/>
+          </a:prstGeom>
+          <a:noFill/>
+          <a:ln/>
+        </p:spPr>
+        <p:txBody>
+          <a:bodyPr wrap="square" rtlCol="0" anchor="t"/>
+          <a:lstStyle/>
+          <a:p>
+            <a:pPr indent="0" marL="0">
+              <a:lnSpc>
+                <a:spcPct val="135000"/>
+              </a:lnSpc>
+              <a:buNone/>
+            </a:pPr>
+            <a:r>
+              <a:rPr lang="en-US" sz="1200" dirty="0">
+                <a:solidFill>
+                  <a:srgbClr val="334155"/>
+                </a:solidFill>
+                <a:latin typeface="Calibri" pitchFamily="34" charset="0"/>
+                <a:ea typeface="Calibri" pitchFamily="34" charset="-122"/>
+                <a:cs typeface="Calibri" pitchFamily="34" charset="-120"/>
+              </a:rPr>
+              <a:t>{{google_ads_narrative}}</a:t>
+            </a:r>
+            <a:endParaRPr lang="en-US" sz="1200" dirty="0"/>
+          </a:p>
+        </p:txBody>
+      </p:sp>
+      <p:sp>
+        <p:nvSpPr>
+          <p:cNvPr id="7" name="Text 5"/>
+          <p:cNvSpPr/>
+          <p:nvPr/>
+        </p:nvSpPr>
+        <p:spPr>
+          <a:xfrm>
+            <a:off x="731520" y="6510528"/>
+            <a:ext cx="10698480" cy="256032"/>
+          </a:xfrm>
+          <a:prstGeom prst="rect">
+            <a:avLst/>
+          </a:prstGeom>
+          <a:noFill/>
+          <a:ln/>
+        </p:spPr>
+        <p:txBody>
+          <a:bodyPr wrap="square" rtlCol="0" anchor="ctr"/>
+          <a:lstStyle/>
+          <a:p>
+            <a:pPr indent="0" marL="0">
+              <a:buNone/>
+            </a:pPr>
+            <a:r>
+              <a:rPr lang="en-US" sz="800" dirty="0">
+                <a:solidFill>
+                  <a:srgbClr val="94A3B8"/>
+                </a:solidFill>
+                <a:latin typeface="Calibri" pitchFamily="34" charset="0"/>
+                <a:ea typeface="Calibri" pitchFamily="34" charset="-122"/>
+                <a:cs typeface="Calibri" pitchFamily="34" charset="-120"/>
+              </a:rPr>
+              <a:t>{{agency_name}}  •  Confidential  •  Page 12</a:t>
+            </a:r>
+            <a:endParaRPr lang="en-US" sz="800" dirty="0"/>
+          </a:p>
+        </p:txBody>
+      </p:sp>
+    </p:spTree>
+  </p:cSld>
+  <p:clrMapOvr>
+    <a:masterClrMapping/>
+  </p:clrMapOvr>
+</p:sld>
+</file>
+
+<file path=ppt/slides/slide13.xml><?xml version="1.0" encoding="utf-8"?>
+<p:sld xmlns:a="http://schemas.openxmlformats.org/drawingml/2006/main" xmlns:r="http://schemas.openxmlformats.org/officeDocument/2006/relationships" xmlns:p="http://schemas.openxmlformats.org/presentationml/2006/main">
+  <p:cSld name="Slide 13">
+    <p:bg>
+      <p:bgPr>
+        <a:solidFill>
+          <a:srgbClr val="F8FAFC"/>
+        </a:solidFill>
+      </p:bgPr>
+    </p:bg>
+    <p:spTree>
+      <p:nvGrpSpPr>
+        <p:cNvPr id="1" name=""/>
+        <p:cNvGrpSpPr/>
+        <p:nvPr/>
+      </p:nvGrpSpPr>
+      <p:grpSpPr>
+        <a:xfrm>
+          <a:off x="0" y="0"/>
+          <a:ext cx="0" cy="0"/>
+          <a:chOff x="0" y="0"/>
+          <a:chExt cx="0" cy="0"/>
+        </a:xfrm>
+      </p:grpSpPr>
+      <p:sp>
+        <p:nvSpPr>
+          <p:cNvPr id="2" name="Shape 0"/>
+          <p:cNvSpPr/>
+          <p:nvPr/>
+        </p:nvSpPr>
+        <p:spPr>
+          <a:xfrm>
+            <a:off x="0" y="0"/>
+            <a:ext cx="54864" cy="6858000"/>
+          </a:xfrm>
+          <a:prstGeom prst="rect">
+            <a:avLst/>
+          </a:prstGeom>
+          <a:solidFill>
+            <a:srgbClr val="F97316"/>
+          </a:solidFill>
+          <a:ln/>
+        </p:spPr>
+      </p:sp>
+      <p:sp>
+        <p:nvSpPr>
+          <p:cNvPr id="3" name="Text 1"/>
+          <p:cNvSpPr/>
+          <p:nvPr/>
+        </p:nvSpPr>
+        <p:spPr>
+          <a:xfrm>
+            <a:off x="731520" y="411480"/>
+            <a:ext cx="10698480" cy="640080"/>
+          </a:xfrm>
+          <a:prstGeom prst="rect">
+            <a:avLst/>
+          </a:prstGeom>
+          <a:noFill/>
+          <a:ln/>
+        </p:spPr>
+        <p:txBody>
+          <a:bodyPr wrap="square" lIns="0" tIns="0" rIns="0" bIns="0" rtlCol="0" anchor="ctr"/>
+          <a:lstStyle/>
+          <a:p>
+            <a:pPr indent="0" marL="0">
+              <a:buNone/>
+            </a:pPr>
+            <a:r>
+              <a:rPr lang="en-US" sz="2800" b="1" dirty="0">
+                <a:solidFill>
+                  <a:srgbClr val="0F172A"/>
+                </a:solidFill>
+                <a:latin typeface="Calibri" pitchFamily="34" charset="0"/>
+                <a:ea typeface="Calibri" pitchFamily="34" charset="-122"/>
+                <a:cs typeface="Calibri" pitchFamily="34" charset="-120"/>
+              </a:rPr>
+              <a:t>Organic Search — SEO</a:t>
+            </a:r>
+            <a:endParaRPr lang="en-US" sz="2800" dirty="0"/>
+          </a:p>
+        </p:txBody>
+      </p:sp>
+      <p:sp>
+        <p:nvSpPr>
+          <p:cNvPr id="4" name="Shape 2"/>
+          <p:cNvSpPr/>
+          <p:nvPr/>
+        </p:nvSpPr>
+        <p:spPr>
+          <a:xfrm>
+            <a:off x="731520" y="1371600"/>
+            <a:ext cx="5120640" cy="2743200"/>
+          </a:xfrm>
+          <a:prstGeom prst="rect">
+            <a:avLst/>
+          </a:prstGeom>
+          <a:solidFill>
+            <a:srgbClr val="FFFFFF"/>
+          </a:solidFill>
+          <a:ln/>
+          <a:effectLst>
+            <a:outerShdw sx="100000" sy="100000" kx="0" ky="0" algn="bl" rotWithShape="0" blurRad="63500" dist="25400" dir="8100000">
+              <a:srgbClr val="000000">
+                <a:alpha val="7000"/>
+              </a:srgbClr>
+            </a:outerShdw>
+          </a:effectLst>
+        </p:spPr>
+      </p:sp>
+      <p:sp>
+        <p:nvSpPr>
+          <p:cNvPr id="5" name="Text 3"/>
+          <p:cNvSpPr/>
+          <p:nvPr/>
+        </p:nvSpPr>
+        <p:spPr>
+          <a:xfrm>
+            <a:off x="731520" y="1371600"/>
+            <a:ext cx="5120640" cy="2743200"/>
+          </a:xfrm>
+          <a:prstGeom prst="rect">
+            <a:avLst/>
+          </a:prstGeom>
+          <a:noFill/>
+          <a:ln/>
+        </p:spPr>
+        <p:txBody>
+          <a:bodyPr wrap="square" rtlCol="0" anchor="ctr"/>
+          <a:lstStyle/>
+          <a:p>
+            <a:pPr algn="ctr" indent="0" marL="0">
+              <a:buNone/>
+            </a:pPr>
+            <a:r>
+              <a:rPr lang="en-US" sz="1000" dirty="0">
+                <a:solidFill>
+                  <a:srgbClr val="94A3B8"/>
+                </a:solidFill>
+                <a:latin typeface="Calibri" pitchFamily="34" charset="0"/>
+                <a:ea typeface="Calibri" pitchFamily="34" charset="-122"/>
+                <a:cs typeface="Calibri" pitchFamily="34" charset="-120"/>
+              </a:rPr>
+              <a:t>{{chart_seo_trend}}</a:t>
+            </a:r>
+            <a:endParaRPr lang="en-US" sz="1000" dirty="0"/>
+          </a:p>
+        </p:txBody>
+      </p:sp>
+      <p:sp>
+        <p:nvSpPr>
+          <p:cNvPr id="6" name="Shape 4"/>
+          <p:cNvSpPr/>
+          <p:nvPr/>
+        </p:nvSpPr>
+        <p:spPr>
+          <a:xfrm>
+            <a:off x="6217920" y="1371600"/>
+            <a:ext cx="5212080" cy="2743200"/>
+          </a:xfrm>
+          <a:prstGeom prst="rect">
+            <a:avLst/>
+          </a:prstGeom>
+          <a:solidFill>
+            <a:srgbClr val="FFFFFF"/>
+          </a:solidFill>
+          <a:ln/>
+          <a:effectLst>
+            <a:outerShdw sx="100000" sy="100000" kx="0" ky="0" algn="bl" rotWithShape="0" blurRad="63500" dist="25400" dir="8100000">
+              <a:srgbClr val="000000">
+                <a:alpha val="7000"/>
+              </a:srgbClr>
+            </a:outerShdw>
+          </a:effectLst>
+        </p:spPr>
+      </p:sp>
+      <p:sp>
+        <p:nvSpPr>
+          <p:cNvPr id="7" name="Text 5"/>
+          <p:cNvSpPr/>
+          <p:nvPr/>
+        </p:nvSpPr>
+        <p:spPr>
+          <a:xfrm>
+            <a:off x="6217920" y="1371600"/>
+            <a:ext cx="5212080" cy="2743200"/>
+          </a:xfrm>
+          <a:prstGeom prst="rect">
+            <a:avLst/>
+          </a:prstGeom>
+          <a:noFill/>
+          <a:ln/>
+        </p:spPr>
+        <p:txBody>
+          <a:bodyPr wrap="square" rtlCol="0" anchor="ctr"/>
+          <a:lstStyle/>
+          <a:p>
+            <a:pPr algn="ctr" indent="0" marL="0">
+              <a:buNone/>
+            </a:pPr>
+            <a:r>
+              <a:rPr lang="en-US" sz="1000" dirty="0">
+                <a:solidFill>
+                  <a:srgbClr val="94A3B8"/>
+                </a:solidFill>
+                <a:latin typeface="Calibri" pitchFamily="34" charset="0"/>
+                <a:ea typeface="Calibri" pitchFamily="34" charset="-122"/>
+                <a:cs typeface="Calibri" pitchFamily="34" charset="-120"/>
+              </a:rPr>
+              <a:t>{{chart_top_queries}}</a:t>
+            </a:r>
+            <a:endParaRPr lang="en-US" sz="1000" dirty="0"/>
+          </a:p>
+        </p:txBody>
+      </p:sp>
+      <p:sp>
+        <p:nvSpPr>
+          <p:cNvPr id="8" name="Text 6"/>
+          <p:cNvSpPr/>
+          <p:nvPr/>
+        </p:nvSpPr>
+        <p:spPr>
+          <a:xfrm>
+            <a:off x="731520" y="4389120"/>
+            <a:ext cx="10698480" cy="1828800"/>
+          </a:xfrm>
+          <a:prstGeom prst="rect">
+            <a:avLst/>
+          </a:prstGeom>
+          <a:noFill/>
+          <a:ln/>
+        </p:spPr>
+        <p:txBody>
+          <a:bodyPr wrap="square" rtlCol="0" anchor="t"/>
+          <a:lstStyle/>
+          <a:p>
+            <a:pPr indent="0" marL="0">
+              <a:lnSpc>
+                <a:spcPct val="135000"/>
+              </a:lnSpc>
+              <a:buNone/>
+            </a:pPr>
+            <a:r>
+              <a:rPr lang="en-US" sz="1200" dirty="0">
+                <a:solidFill>
+                  <a:srgbClr val="334155"/>
+                </a:solidFill>
+                <a:latin typeface="Calibri" pitchFamily="34" charset="0"/>
+                <a:ea typeface="Calibri" pitchFamily="34" charset="-122"/>
+                <a:cs typeface="Calibri" pitchFamily="34" charset="-120"/>
+              </a:rPr>
+              <a:t>{{seo_narrative}}</a:t>
+            </a:r>
+            <a:endParaRPr lang="en-US" sz="1200" dirty="0"/>
+          </a:p>
+        </p:txBody>
+      </p:sp>
+      <p:sp>
+        <p:nvSpPr>
+          <p:cNvPr id="9" name="Text 7"/>
+          <p:cNvSpPr/>
+          <p:nvPr/>
+        </p:nvSpPr>
+        <p:spPr>
+          <a:xfrm>
+            <a:off x="731520" y="6510528"/>
+            <a:ext cx="10698480" cy="256032"/>
+          </a:xfrm>
+          <a:prstGeom prst="rect">
+            <a:avLst/>
+          </a:prstGeom>
+          <a:noFill/>
+          <a:ln/>
+        </p:spPr>
+        <p:txBody>
+          <a:bodyPr wrap="square" rtlCol="0" anchor="ctr"/>
+          <a:lstStyle/>
+          <a:p>
+            <a:pPr indent="0" marL="0">
+              <a:buNone/>
+            </a:pPr>
+            <a:r>
+              <a:rPr lang="en-US" sz="800" dirty="0">
+                <a:solidFill>
+                  <a:srgbClr val="94A3B8"/>
+                </a:solidFill>
+                <a:latin typeface="Calibri" pitchFamily="34" charset="0"/>
+                <a:ea typeface="Calibri" pitchFamily="34" charset="-122"/>
+                <a:cs typeface="Calibri" pitchFamily="34" charset="-120"/>
+              </a:rPr>
+              <a:t>{{agency_name}}  •  Confidential  •  Page 13</a:t>
+            </a:r>
+            <a:endParaRPr lang="en-US" sz="800" dirty="0"/>
+          </a:p>
+        </p:txBody>
+      </p:sp>
+    </p:spTree>
+  </p:cSld>
+  <p:clrMapOvr>
+    <a:masterClrMapping/>
+  </p:clrMapOvr>
+</p:sld>
+</file>
+
+<file path=ppt/slides/slide14.xml><?xml version="1.0" encoding="utf-8"?>
+<p:sld xmlns:a="http://schemas.openxmlformats.org/drawingml/2006/main" xmlns:r="http://schemas.openxmlformats.org/officeDocument/2006/relationships" xmlns:p="http://schemas.openxmlformats.org/presentationml/2006/main">
+  <p:cSld name="Slide 14">
+    <p:bg>
+      <p:bgPr>
+        <a:solidFill>
+          <a:srgbClr val="F8FAFC"/>
+        </a:solidFill>
+      </p:bgPr>
+    </p:bg>
+    <p:spTree>
+      <p:nvGrpSpPr>
+        <p:cNvPr id="1" name=""/>
+        <p:cNvGrpSpPr/>
+        <p:nvPr/>
+      </p:nvGrpSpPr>
+      <p:grpSpPr>
+        <a:xfrm>
+          <a:off x="0" y="0"/>
+          <a:ext cx="0" cy="0"/>
+          <a:chOff x="0" y="0"/>
+          <a:chExt cx="0" cy="0"/>
+        </a:xfrm>
+      </p:grpSpPr>
+      <p:sp>
+        <p:nvSpPr>
+          <p:cNvPr id="2" name="Shape 0"/>
+          <p:cNvSpPr/>
+          <p:nvPr/>
+        </p:nvSpPr>
+        <p:spPr>
+          <a:xfrm>
+            <a:off x="0" y="0"/>
+            <a:ext cx="54864" cy="6858000"/>
+          </a:xfrm>
+          <a:prstGeom prst="rect">
+            <a:avLst/>
+          </a:prstGeom>
+          <a:solidFill>
+            <a:srgbClr val="8B5CF6"/>
+          </a:solidFill>
+          <a:ln/>
+        </p:spPr>
+      </p:sp>
+      <p:sp>
+        <p:nvSpPr>
+          <p:cNvPr id="3" name="Text 1"/>
+          <p:cNvSpPr/>
+          <p:nvPr/>
+        </p:nvSpPr>
+        <p:spPr>
+          <a:xfrm>
+            <a:off x="731520" y="411480"/>
+            <a:ext cx="10698480" cy="640080"/>
+          </a:xfrm>
+          <a:prstGeom prst="rect">
+            <a:avLst/>
+          </a:prstGeom>
+          <a:noFill/>
+          <a:ln/>
+        </p:spPr>
+        <p:txBody>
+          <a:bodyPr wrap="square" lIns="0" tIns="0" rIns="0" bIns="0" rtlCol="0" anchor="ctr"/>
+          <a:lstStyle/>
+          <a:p>
+            <a:pPr indent="0" marL="0">
+              <a:buNone/>
+            </a:pPr>
+            <a:r>
+              <a:rPr lang="en-US" sz="2800" b="1" dirty="0">
+                <a:solidFill>
+                  <a:srgbClr val="0F172A"/>
+                </a:solidFill>
+                <a:latin typeface="Calibri" pitchFamily="34" charset="0"/>
+                <a:ea typeface="Calibri" pitchFamily="34" charset="-122"/>
+                <a:cs typeface="Calibri" pitchFamily="34" charset="-120"/>
+              </a:rPr>
+              <a:t>{{csv_source_name}}</a:t>
+            </a:r>
+            <a:endParaRPr lang="en-US" sz="2800" dirty="0"/>
+          </a:p>
+        </p:txBody>
+      </p:sp>
+      <p:sp>
+        <p:nvSpPr>
+          <p:cNvPr id="4" name="Shape 2"/>
+          <p:cNvSpPr/>
+          <p:nvPr/>
+        </p:nvSpPr>
+        <p:spPr>
+          <a:xfrm>
+            <a:off x="731520" y="1463040"/>
+            <a:ext cx="5029200" cy="685800"/>
+          </a:xfrm>
+          <a:prstGeom prst="rect">
+            <a:avLst/>
+          </a:prstGeom>
+          <a:solidFill>
+            <a:srgbClr val="FFFFFF"/>
+          </a:solidFill>
+          <a:ln/>
+          <a:effectLst>
+            <a:outerShdw sx="100000" sy="100000" kx="0" ky="0" algn="bl" rotWithShape="0" blurRad="63500" dist="25400" dir="8100000">
+              <a:srgbClr val="000000">
+                <a:alpha val="7000"/>
+              </a:srgbClr>
+            </a:outerShdw>
+          </a:effectLst>
+        </p:spPr>
+      </p:sp>
+      <p:sp>
+        <p:nvSpPr>
+          <p:cNvPr id="5" name="Shape 3"/>
+          <p:cNvSpPr/>
+          <p:nvPr/>
+        </p:nvSpPr>
+        <p:spPr>
+          <a:xfrm>
+            <a:off x="731520" y="1463040"/>
+            <a:ext cx="64008" cy="685800"/>
+          </a:xfrm>
+          <a:prstGeom prst="rect">
+            <a:avLst/>
+          </a:prstGeom>
+          <a:solidFill>
+            <a:srgbClr val="F97316"/>
+          </a:solidFill>
+          <a:ln/>
+        </p:spPr>
+      </p:sp>
+      <p:sp>
+        <p:nvSpPr>
+          <p:cNvPr id="6" name="Text 4"/>
+          <p:cNvSpPr/>
+          <p:nvPr/>
+        </p:nvSpPr>
+        <p:spPr>
+          <a:xfrm>
+            <a:off x="914400" y="1508760"/>
+            <a:ext cx="4754880" cy="228600"/>
+          </a:xfrm>
+          <a:prstGeom prst="rect">
+            <a:avLst/>
+          </a:prstGeom>
+          <a:noFill/>
+          <a:ln/>
+        </p:spPr>
+        <p:txBody>
+          <a:bodyPr wrap="square" rtlCol="0" anchor="ctr"/>
+          <a:lstStyle/>
+          <a:p>
+            <a:pPr indent="0" marL="0">
+              <a:buNone/>
+            </a:pPr>
+            <a:r>
+              <a:rPr lang="en-US" sz="900" b="1" spc="100" kern="0" dirty="0">
+                <a:solidFill>
+                  <a:srgbClr val="64748B"/>
+                </a:solidFill>
+                <a:latin typeface="Calibri" pitchFamily="34" charset="0"/>
+                <a:ea typeface="Calibri" pitchFamily="34" charset="-122"/>
+                <a:cs typeface="Calibri" pitchFamily="34" charset="-120"/>
+              </a:rPr>
+              <a:t>{{csv_kpi_0_label}}</a:t>
+            </a:r>
+            <a:endParaRPr lang="en-US" sz="900" dirty="0"/>
+          </a:p>
+        </p:txBody>
+      </p:sp>
+      <p:sp>
+        <p:nvSpPr>
+          <p:cNvPr id="7" name="Text 5"/>
+          <p:cNvSpPr/>
+          <p:nvPr/>
+        </p:nvSpPr>
+        <p:spPr>
+          <a:xfrm>
+            <a:off x="914400" y="1737360"/>
+            <a:ext cx="4754880" cy="347472"/>
+          </a:xfrm>
+          <a:prstGeom prst="rect">
+            <a:avLst/>
+          </a:prstGeom>
+          <a:noFill/>
+          <a:ln/>
+        </p:spPr>
+        <p:txBody>
+          <a:bodyPr wrap="square" rtlCol="0" anchor="ctr"/>
+          <a:lstStyle/>
+          <a:p>
+            <a:pPr indent="0" marL="0">
+              <a:buNone/>
+            </a:pPr>
+            <a:r>
+              <a:rPr lang="en-US" sz="2000" b="1" dirty="0">
+                <a:solidFill>
+                  <a:srgbClr val="0F172A"/>
+                </a:solidFill>
+                <a:latin typeface="Calibri" pitchFamily="34" charset="0"/>
+                <a:ea typeface="Calibri" pitchFamily="34" charset="-122"/>
+                <a:cs typeface="Calibri" pitchFamily="34" charset="-120"/>
+              </a:rPr>
+              <a:t>{{csv_kpi_0_value}}</a:t>
+            </a:r>
+            <a:endParaRPr lang="en-US" sz="2000" dirty="0"/>
+          </a:p>
+        </p:txBody>
+      </p:sp>
+      <p:sp>
+        <p:nvSpPr>
+          <p:cNvPr id="8" name="Shape 6"/>
+          <p:cNvSpPr/>
+          <p:nvPr/>
+        </p:nvSpPr>
+        <p:spPr>
+          <a:xfrm>
+            <a:off x="6583680" y="1463040"/>
+            <a:ext cx="5029200" cy="685800"/>
+          </a:xfrm>
+          <a:prstGeom prst="rect">
+            <a:avLst/>
+          </a:prstGeom>
+          <a:solidFill>
+            <a:srgbClr val="FFFFFF"/>
+          </a:solidFill>
+          <a:ln/>
+          <a:effectLst>
+            <a:outerShdw sx="100000" sy="100000" kx="0" ky="0" algn="bl" rotWithShape="0" blurRad="63500" dist="25400" dir="8100000">
+              <a:srgbClr val="000000">
+                <a:alpha val="7000"/>
+              </a:srgbClr>
+            </a:outerShdw>
+          </a:effectLst>
+        </p:spPr>
+      </p:sp>
+      <p:sp>
+        <p:nvSpPr>
+          <p:cNvPr id="9" name="Shape 7"/>
+          <p:cNvSpPr/>
+          <p:nvPr/>
+        </p:nvSpPr>
+        <p:spPr>
+          <a:xfrm>
+            <a:off x="6583680" y="1463040"/>
+            <a:ext cx="64008" cy="685800"/>
+          </a:xfrm>
+          <a:prstGeom prst="rect">
+            <a:avLst/>
+          </a:prstGeom>
+          <a:solidFill>
+            <a:srgbClr val="8B5CF6"/>
+          </a:solidFill>
+          <a:ln/>
+        </p:spPr>
+      </p:sp>
+      <p:sp>
+        <p:nvSpPr>
+          <p:cNvPr id="10" name="Text 8"/>
+          <p:cNvSpPr/>
+          <p:nvPr/>
+        </p:nvSpPr>
+        <p:spPr>
+          <a:xfrm>
+            <a:off x="6766560" y="1508760"/>
+            <a:ext cx="4754880" cy="228600"/>
+          </a:xfrm>
+          <a:prstGeom prst="rect">
+            <a:avLst/>
+          </a:prstGeom>
+          <a:noFill/>
+          <a:ln/>
+        </p:spPr>
+        <p:txBody>
+          <a:bodyPr wrap="square" rtlCol="0" anchor="ctr"/>
+          <a:lstStyle/>
+          <a:p>
+            <a:pPr indent="0" marL="0">
+              <a:buNone/>
+            </a:pPr>
+            <a:r>
+              <a:rPr lang="en-US" sz="900" b="1" spc="100" kern="0" dirty="0">
+                <a:solidFill>
+                  <a:srgbClr val="64748B"/>
+                </a:solidFill>
+                <a:latin typeface="Calibri" pitchFamily="34" charset="0"/>
+                <a:ea typeface="Calibri" pitchFamily="34" charset="-122"/>
+                <a:cs typeface="Calibri" pitchFamily="34" charset="-120"/>
+              </a:rPr>
+              <a:t>{{csv_kpi_1_label}}</a:t>
+            </a:r>
+            <a:endParaRPr lang="en-US" sz="900" dirty="0"/>
+          </a:p>
+        </p:txBody>
+      </p:sp>
+      <p:sp>
+        <p:nvSpPr>
+          <p:cNvPr id="11" name="Text 9"/>
+          <p:cNvSpPr/>
+          <p:nvPr/>
+        </p:nvSpPr>
+        <p:spPr>
+          <a:xfrm>
+            <a:off x="6766560" y="1737360"/>
+            <a:ext cx="4754880" cy="347472"/>
+          </a:xfrm>
+          <a:prstGeom prst="rect">
+            <a:avLst/>
+          </a:prstGeom>
+          <a:noFill/>
+          <a:ln/>
+        </p:spPr>
+        <p:txBody>
+          <a:bodyPr wrap="square" rtlCol="0" anchor="ctr"/>
+          <a:lstStyle/>
+          <a:p>
+            <a:pPr indent="0" marL="0">
+              <a:buNone/>
+            </a:pPr>
+            <a:r>
+              <a:rPr lang="en-US" sz="2000" b="1" dirty="0">
+                <a:solidFill>
+                  <a:srgbClr val="0F172A"/>
+                </a:solidFill>
+                <a:latin typeface="Calibri" pitchFamily="34" charset="0"/>
+                <a:ea typeface="Calibri" pitchFamily="34" charset="-122"/>
+                <a:cs typeface="Calibri" pitchFamily="34" charset="-120"/>
+              </a:rPr>
+              <a:t>{{csv_kpi_1_value}}</a:t>
+            </a:r>
+            <a:endParaRPr lang="en-US" sz="2000" dirty="0"/>
+          </a:p>
+        </p:txBody>
+      </p:sp>
+      <p:sp>
+        <p:nvSpPr>
+          <p:cNvPr id="12" name="Shape 10"/>
+          <p:cNvSpPr/>
+          <p:nvPr/>
+        </p:nvSpPr>
+        <p:spPr>
+          <a:xfrm>
+            <a:off x="731520" y="2286000"/>
+            <a:ext cx="5029200" cy="685800"/>
+          </a:xfrm>
+          <a:prstGeom prst="rect">
+            <a:avLst/>
+          </a:prstGeom>
+          <a:solidFill>
+            <a:srgbClr val="FFFFFF"/>
+          </a:solidFill>
+          <a:ln/>
+          <a:effectLst>
+            <a:outerShdw sx="100000" sy="100000" kx="0" ky="0" algn="bl" rotWithShape="0" blurRad="63500" dist="25400" dir="8100000">
+              <a:srgbClr val="000000">
+                <a:alpha val="7000"/>
+              </a:srgbClr>
+            </a:outerShdw>
+          </a:effectLst>
+        </p:spPr>
+      </p:sp>
+      <p:sp>
+        <p:nvSpPr>
+          <p:cNvPr id="13" name="Shape 11"/>
+          <p:cNvSpPr/>
+          <p:nvPr/>
+        </p:nvSpPr>
+        <p:spPr>
+          <a:xfrm>
+            <a:off x="731520" y="2286000"/>
+            <a:ext cx="64008" cy="685800"/>
+          </a:xfrm>
+          <a:prstGeom prst="rect">
+            <a:avLst/>
+          </a:prstGeom>
+          <a:solidFill>
+            <a:srgbClr val="14B8A6"/>
+          </a:solidFill>
+          <a:ln/>
+        </p:spPr>
+      </p:sp>
+      <p:sp>
+        <p:nvSpPr>
+          <p:cNvPr id="14" name="Text 12"/>
+          <p:cNvSpPr/>
+          <p:nvPr/>
+        </p:nvSpPr>
+        <p:spPr>
+          <a:xfrm>
+            <a:off x="914400" y="2331720"/>
+            <a:ext cx="4754880" cy="228600"/>
+          </a:xfrm>
+          <a:prstGeom prst="rect">
+            <a:avLst/>
+          </a:prstGeom>
+          <a:noFill/>
+          <a:ln/>
+        </p:spPr>
+        <p:txBody>
+          <a:bodyPr wrap="square" rtlCol="0" anchor="ctr"/>
+          <a:lstStyle/>
+          <a:p>
+            <a:pPr indent="0" marL="0">
+              <a:buNone/>
+            </a:pPr>
+            <a:r>
+              <a:rPr lang="en-US" sz="900" b="1" spc="100" kern="0" dirty="0">
+                <a:solidFill>
+                  <a:srgbClr val="64748B"/>
+                </a:solidFill>
+                <a:latin typeface="Calibri" pitchFamily="34" charset="0"/>
+                <a:ea typeface="Calibri" pitchFamily="34" charset="-122"/>
+                <a:cs typeface="Calibri" pitchFamily="34" charset="-120"/>
+              </a:rPr>
+              <a:t>{{csv_kpi_2_label}}</a:t>
+            </a:r>
+            <a:endParaRPr lang="en-US" sz="900" dirty="0"/>
+          </a:p>
+        </p:txBody>
+      </p:sp>
+      <p:sp>
+        <p:nvSpPr>
+          <p:cNvPr id="15" name="Text 13"/>
+          <p:cNvSpPr/>
+          <p:nvPr/>
+        </p:nvSpPr>
+        <p:spPr>
+          <a:xfrm>
+            <a:off x="914400" y="2560320"/>
+            <a:ext cx="4754880" cy="347472"/>
+          </a:xfrm>
+          <a:prstGeom prst="rect">
+            <a:avLst/>
+          </a:prstGeom>
+          <a:noFill/>
+          <a:ln/>
+        </p:spPr>
+        <p:txBody>
+          <a:bodyPr wrap="square" rtlCol="0" anchor="ctr"/>
+          <a:lstStyle/>
+          <a:p>
+            <a:pPr indent="0" marL="0">
+              <a:buNone/>
+            </a:pPr>
+            <a:r>
+              <a:rPr lang="en-US" sz="2000" b="1" dirty="0">
+                <a:solidFill>
+                  <a:srgbClr val="0F172A"/>
+                </a:solidFill>
+                <a:latin typeface="Calibri" pitchFamily="34" charset="0"/>
+                <a:ea typeface="Calibri" pitchFamily="34" charset="-122"/>
+                <a:cs typeface="Calibri" pitchFamily="34" charset="-120"/>
+              </a:rPr>
+              <a:t>{{csv_kpi_2_value}}</a:t>
+            </a:r>
+            <a:endParaRPr lang="en-US" sz="2000" dirty="0"/>
+          </a:p>
+        </p:txBody>
+      </p:sp>
+      <p:sp>
+        <p:nvSpPr>
+          <p:cNvPr id="16" name="Shape 14"/>
+          <p:cNvSpPr/>
+          <p:nvPr/>
+        </p:nvSpPr>
+        <p:spPr>
+          <a:xfrm>
+            <a:off x="6583680" y="2286000"/>
+            <a:ext cx="5029200" cy="685800"/>
+          </a:xfrm>
+          <a:prstGeom prst="rect">
+            <a:avLst/>
+          </a:prstGeom>
+          <a:solidFill>
+            <a:srgbClr val="FFFFFF"/>
+          </a:solidFill>
+          <a:ln/>
+          <a:effectLst>
+            <a:outerShdw sx="100000" sy="100000" kx="0" ky="0" algn="bl" rotWithShape="0" blurRad="63500" dist="25400" dir="8100000">
+              <a:srgbClr val="000000">
+                <a:alpha val="7000"/>
+              </a:srgbClr>
+            </a:outerShdw>
+          </a:effectLst>
+        </p:spPr>
+      </p:sp>
+      <p:sp>
+        <p:nvSpPr>
+          <p:cNvPr id="17" name="Shape 15"/>
+          <p:cNvSpPr/>
+          <p:nvPr/>
+        </p:nvSpPr>
+        <p:spPr>
+          <a:xfrm>
+            <a:off x="6583680" y="2286000"/>
+            <a:ext cx="64008" cy="685800"/>
+          </a:xfrm>
+          <a:prstGeom prst="rect">
+            <a:avLst/>
+          </a:prstGeom>
+          <a:solidFill>
+            <a:srgbClr val="F97316"/>
+          </a:solidFill>
+          <a:ln/>
+        </p:spPr>
+      </p:sp>
+      <p:sp>
+        <p:nvSpPr>
+          <p:cNvPr id="18" name="Text 16"/>
+          <p:cNvSpPr/>
+          <p:nvPr/>
+        </p:nvSpPr>
+        <p:spPr>
+          <a:xfrm>
+            <a:off x="6766560" y="2331720"/>
+            <a:ext cx="4754880" cy="228600"/>
+          </a:xfrm>
+          <a:prstGeom prst="rect">
+            <a:avLst/>
+          </a:prstGeom>
+          <a:noFill/>
+          <a:ln/>
+        </p:spPr>
+        <p:txBody>
+          <a:bodyPr wrap="square" rtlCol="0" anchor="ctr"/>
+          <a:lstStyle/>
+          <a:p>
+            <a:pPr indent="0" marL="0">
+              <a:buNone/>
+            </a:pPr>
+            <a:r>
+              <a:rPr lang="en-US" sz="900" b="1" spc="100" kern="0" dirty="0">
+                <a:solidFill>
+                  <a:srgbClr val="64748B"/>
+                </a:solidFill>
+                <a:latin typeface="Calibri" pitchFamily="34" charset="0"/>
+                <a:ea typeface="Calibri" pitchFamily="34" charset="-122"/>
+                <a:cs typeface="Calibri" pitchFamily="34" charset="-120"/>
+              </a:rPr>
+              <a:t>{{csv_kpi_3_label}}</a:t>
+            </a:r>
+            <a:endParaRPr lang="en-US" sz="900" dirty="0"/>
+          </a:p>
+        </p:txBody>
+      </p:sp>
+      <p:sp>
+        <p:nvSpPr>
+          <p:cNvPr id="19" name="Text 17"/>
+          <p:cNvSpPr/>
+          <p:nvPr/>
+        </p:nvSpPr>
+        <p:spPr>
+          <a:xfrm>
+            <a:off x="6766560" y="2560320"/>
+            <a:ext cx="4754880" cy="347472"/>
+          </a:xfrm>
+          <a:prstGeom prst="rect">
+            <a:avLst/>
+          </a:prstGeom>
+          <a:noFill/>
+          <a:ln/>
+        </p:spPr>
+        <p:txBody>
+          <a:bodyPr wrap="square" rtlCol="0" anchor="ctr"/>
+          <a:lstStyle/>
+          <a:p>
+            <a:pPr indent="0" marL="0">
+              <a:buNone/>
+            </a:pPr>
+            <a:r>
+              <a:rPr lang="en-US" sz="2000" b="1" dirty="0">
+                <a:solidFill>
+                  <a:srgbClr val="0F172A"/>
+                </a:solidFill>
+                <a:latin typeface="Calibri" pitchFamily="34" charset="0"/>
+                <a:ea typeface="Calibri" pitchFamily="34" charset="-122"/>
+                <a:cs typeface="Calibri" pitchFamily="34" charset="-120"/>
+              </a:rPr>
+              <a:t>{{csv_kpi_3_value}}</a:t>
+            </a:r>
+            <a:endParaRPr lang="en-US" sz="2000" dirty="0"/>
+          </a:p>
+        </p:txBody>
+      </p:sp>
+      <p:sp>
+        <p:nvSpPr>
+          <p:cNvPr id="20" name="Shape 18"/>
+          <p:cNvSpPr/>
+          <p:nvPr/>
+        </p:nvSpPr>
+        <p:spPr>
+          <a:xfrm>
+            <a:off x="731520" y="3108960"/>
+            <a:ext cx="5029200" cy="685800"/>
+          </a:xfrm>
+          <a:prstGeom prst="rect">
+            <a:avLst/>
+          </a:prstGeom>
+          <a:solidFill>
+            <a:srgbClr val="FFFFFF"/>
+          </a:solidFill>
+          <a:ln/>
+          <a:effectLst>
+            <a:outerShdw sx="100000" sy="100000" kx="0" ky="0" algn="bl" rotWithShape="0" blurRad="63500" dist="25400" dir="8100000">
+              <a:srgbClr val="000000">
+                <a:alpha val="7000"/>
+              </a:srgbClr>
+            </a:outerShdw>
+          </a:effectLst>
+        </p:spPr>
+      </p:sp>
+      <p:sp>
+        <p:nvSpPr>
+          <p:cNvPr id="21" name="Shape 19"/>
+          <p:cNvSpPr/>
+          <p:nvPr/>
+        </p:nvSpPr>
+        <p:spPr>
+          <a:xfrm>
+            <a:off x="731520" y="3108960"/>
+            <a:ext cx="64008" cy="685800"/>
+          </a:xfrm>
+          <a:prstGeom prst="rect">
+            <a:avLst/>
+          </a:prstGeom>
+          <a:solidFill>
+            <a:srgbClr val="8B5CF6"/>
+          </a:solidFill>
+          <a:ln/>
+        </p:spPr>
+      </p:sp>
+      <p:sp>
+        <p:nvSpPr>
+          <p:cNvPr id="22" name="Text 20"/>
+          <p:cNvSpPr/>
+          <p:nvPr/>
+        </p:nvSpPr>
+        <p:spPr>
+          <a:xfrm>
+            <a:off x="914400" y="3154680"/>
+            <a:ext cx="4754880" cy="228600"/>
+          </a:xfrm>
+          <a:prstGeom prst="rect">
+            <a:avLst/>
+          </a:prstGeom>
+          <a:noFill/>
+          <a:ln/>
+        </p:spPr>
+        <p:txBody>
+          <a:bodyPr wrap="square" rtlCol="0" anchor="ctr"/>
+          <a:lstStyle/>
+          <a:p>
+            <a:pPr indent="0" marL="0">
+              <a:buNone/>
+            </a:pPr>
+            <a:r>
+              <a:rPr lang="en-US" sz="900" b="1" spc="100" kern="0" dirty="0">
+                <a:solidFill>
+                  <a:srgbClr val="64748B"/>
+                </a:solidFill>
+                <a:latin typeface="Calibri" pitchFamily="34" charset="0"/>
+                <a:ea typeface="Calibri" pitchFamily="34" charset="-122"/>
+                <a:cs typeface="Calibri" pitchFamily="34" charset="-120"/>
+              </a:rPr>
+              <a:t>{{csv_kpi_4_label}}</a:t>
+            </a:r>
+            <a:endParaRPr lang="en-US" sz="900" dirty="0"/>
+          </a:p>
+        </p:txBody>
+      </p:sp>
+      <p:sp>
+        <p:nvSpPr>
+          <p:cNvPr id="23" name="Text 21"/>
+          <p:cNvSpPr/>
+          <p:nvPr/>
+        </p:nvSpPr>
+        <p:spPr>
+          <a:xfrm>
+            <a:off x="914400" y="3383280"/>
+            <a:ext cx="4754880" cy="347472"/>
+          </a:xfrm>
+          <a:prstGeom prst="rect">
+            <a:avLst/>
+          </a:prstGeom>
+          <a:noFill/>
+          <a:ln/>
+        </p:spPr>
+        <p:txBody>
+          <a:bodyPr wrap="square" rtlCol="0" anchor="ctr"/>
+          <a:lstStyle/>
+          <a:p>
+            <a:pPr indent="0" marL="0">
+              <a:buNone/>
+            </a:pPr>
+            <a:r>
+              <a:rPr lang="en-US" sz="2000" b="1" dirty="0">
+                <a:solidFill>
+                  <a:srgbClr val="0F172A"/>
+                </a:solidFill>
+                <a:latin typeface="Calibri" pitchFamily="34" charset="0"/>
+                <a:ea typeface="Calibri" pitchFamily="34" charset="-122"/>
+                <a:cs typeface="Calibri" pitchFamily="34" charset="-120"/>
+              </a:rPr>
+              <a:t>{{csv_kpi_4_value}}</a:t>
+            </a:r>
+            <a:endParaRPr lang="en-US" sz="2000" dirty="0"/>
+          </a:p>
+        </p:txBody>
+      </p:sp>
+      <p:sp>
+        <p:nvSpPr>
+          <p:cNvPr id="24" name="Shape 22"/>
+          <p:cNvSpPr/>
+          <p:nvPr/>
+        </p:nvSpPr>
+        <p:spPr>
+          <a:xfrm>
+            <a:off x="6583680" y="3108960"/>
+            <a:ext cx="5029200" cy="685800"/>
+          </a:xfrm>
+          <a:prstGeom prst="rect">
+            <a:avLst/>
+          </a:prstGeom>
+          <a:solidFill>
+            <a:srgbClr val="FFFFFF"/>
+          </a:solidFill>
+          <a:ln/>
+          <a:effectLst>
+            <a:outerShdw sx="100000" sy="100000" kx="0" ky="0" algn="bl" rotWithShape="0" blurRad="63500" dist="25400" dir="8100000">
+              <a:srgbClr val="000000">
+                <a:alpha val="7000"/>
+              </a:srgbClr>
+            </a:outerShdw>
+          </a:effectLst>
+        </p:spPr>
+      </p:sp>
+      <p:sp>
+        <p:nvSpPr>
+          <p:cNvPr id="25" name="Shape 23"/>
+          <p:cNvSpPr/>
+          <p:nvPr/>
+        </p:nvSpPr>
+        <p:spPr>
+          <a:xfrm>
+            <a:off x="6583680" y="3108960"/>
+            <a:ext cx="64008" cy="685800"/>
+          </a:xfrm>
+          <a:prstGeom prst="rect">
+            <a:avLst/>
+          </a:prstGeom>
+          <a:solidFill>
+            <a:srgbClr val="14B8A6"/>
+          </a:solidFill>
+          <a:ln/>
+        </p:spPr>
+      </p:sp>
+      <p:sp>
+        <p:nvSpPr>
+          <p:cNvPr id="26" name="Text 24"/>
+          <p:cNvSpPr/>
+          <p:nvPr/>
+        </p:nvSpPr>
+        <p:spPr>
+          <a:xfrm>
+            <a:off x="6766560" y="3154680"/>
+            <a:ext cx="4754880" cy="228600"/>
+          </a:xfrm>
+          <a:prstGeom prst="rect">
+            <a:avLst/>
+          </a:prstGeom>
+          <a:noFill/>
+          <a:ln/>
+        </p:spPr>
+        <p:txBody>
+          <a:bodyPr wrap="square" rtlCol="0" anchor="ctr"/>
+          <a:lstStyle/>
+          <a:p>
+            <a:pPr indent="0" marL="0">
+              <a:buNone/>
+            </a:pPr>
+            <a:r>
+              <a:rPr lang="en-US" sz="900" b="1" spc="100" kern="0" dirty="0">
+                <a:solidFill>
+                  <a:srgbClr val="64748B"/>
+                </a:solidFill>
+                <a:latin typeface="Calibri" pitchFamily="34" charset="0"/>
+                <a:ea typeface="Calibri" pitchFamily="34" charset="-122"/>
+                <a:cs typeface="Calibri" pitchFamily="34" charset="-120"/>
+              </a:rPr>
+              <a:t>{{csv_kpi_5_label}}</a:t>
+            </a:r>
+            <a:endParaRPr lang="en-US" sz="900" dirty="0"/>
+          </a:p>
+        </p:txBody>
+      </p:sp>
+      <p:sp>
+        <p:nvSpPr>
+          <p:cNvPr id="27" name="Text 25"/>
+          <p:cNvSpPr/>
+          <p:nvPr/>
+        </p:nvSpPr>
+        <p:spPr>
+          <a:xfrm>
+            <a:off x="6766560" y="3383280"/>
+            <a:ext cx="4754880" cy="347472"/>
+          </a:xfrm>
+          <a:prstGeom prst="rect">
+            <a:avLst/>
+          </a:prstGeom>
+          <a:noFill/>
+          <a:ln/>
+        </p:spPr>
+        <p:txBody>
+          <a:bodyPr wrap="square" rtlCol="0" anchor="ctr"/>
+          <a:lstStyle/>
+          <a:p>
+            <a:pPr indent="0" marL="0">
+              <a:buNone/>
+            </a:pPr>
+            <a:r>
+              <a:rPr lang="en-US" sz="2000" b="1" dirty="0">
+                <a:solidFill>
+                  <a:srgbClr val="0F172A"/>
+                </a:solidFill>
+                <a:latin typeface="Calibri" pitchFamily="34" charset="0"/>
+                <a:ea typeface="Calibri" pitchFamily="34" charset="-122"/>
+                <a:cs typeface="Calibri" pitchFamily="34" charset="-120"/>
+              </a:rPr>
+              <a:t>{{csv_kpi_5_value}}</a:t>
+            </a:r>
+            <a:endParaRPr lang="en-US" sz="2000" dirty="0"/>
+          </a:p>
+        </p:txBody>
+      </p:sp>
+      <p:sp>
+        <p:nvSpPr>
+          <p:cNvPr id="28" name="Shape 26"/>
+          <p:cNvSpPr/>
+          <p:nvPr/>
+        </p:nvSpPr>
+        <p:spPr>
+          <a:xfrm>
+            <a:off x="731520" y="3749040"/>
+            <a:ext cx="10698480" cy="2286000"/>
+          </a:xfrm>
+          <a:prstGeom prst="rect">
+            <a:avLst/>
+          </a:prstGeom>
+          <a:solidFill>
+            <a:srgbClr val="FFFFFF"/>
+          </a:solidFill>
+          <a:ln/>
+          <a:effectLst>
+            <a:outerShdw sx="100000" sy="100000" kx="0" ky="0" algn="bl" rotWithShape="0" blurRad="63500" dist="25400" dir="8100000">
+              <a:srgbClr val="000000">
+                <a:alpha val="7000"/>
+              </a:srgbClr>
+            </a:outerShdw>
+          </a:effectLst>
+        </p:spPr>
+      </p:sp>
+      <p:sp>
+        <p:nvSpPr>
+          <p:cNvPr id="29" name="Text 27"/>
+          <p:cNvSpPr/>
+          <p:nvPr/>
+        </p:nvSpPr>
+        <p:spPr>
+          <a:xfrm>
+            <a:off x="731520" y="3749040"/>
+            <a:ext cx="10698480" cy="2286000"/>
+          </a:xfrm>
+          <a:prstGeom prst="rect">
+            <a:avLst/>
+          </a:prstGeom>
+          <a:noFill/>
+          <a:ln/>
+        </p:spPr>
+        <p:txBody>
+          <a:bodyPr wrap="square" rtlCol="0" anchor="ctr"/>
+          <a:lstStyle/>
+          <a:p>
+            <a:pPr algn="ctr" indent="0" marL="0">
+              <a:buNone/>
+            </a:pPr>
+            <a:r>
+              <a:rPr lang="en-US" sz="1000" dirty="0">
+                <a:solidFill>
+                  <a:srgbClr val="94A3B8"/>
+                </a:solidFill>
+                <a:latin typeface="Calibri" pitchFamily="34" charset="0"/>
+                <a:ea typeface="Calibri" pitchFamily="34" charset="-122"/>
+                <a:cs typeface="Calibri" pitchFamily="34" charset="-120"/>
+              </a:rPr>
+              <a:t>{{chart_csv_data}}</a:t>
+            </a:r>
+            <a:endParaRPr lang="en-US" sz="1000" dirty="0"/>
+          </a:p>
+        </p:txBody>
+      </p:sp>
+      <p:sp>
+        <p:nvSpPr>
+          <p:cNvPr id="30" name="Text 28"/>
+          <p:cNvSpPr/>
+          <p:nvPr/>
+        </p:nvSpPr>
+        <p:spPr>
+          <a:xfrm>
+            <a:off x="731520" y="6510528"/>
+            <a:ext cx="10698480" cy="256032"/>
+          </a:xfrm>
+          <a:prstGeom prst="rect">
+            <a:avLst/>
+          </a:prstGeom>
+          <a:noFill/>
+          <a:ln/>
+        </p:spPr>
+        <p:txBody>
+          <a:bodyPr wrap="square" rtlCol="0" anchor="ctr"/>
+          <a:lstStyle/>
+          <a:p>
+            <a:pPr indent="0" marL="0">
+              <a:buNone/>
+            </a:pPr>
+            <a:r>
+              <a:rPr lang="en-US" sz="800" dirty="0">
+                <a:solidFill>
+                  <a:srgbClr val="94A3B8"/>
+                </a:solidFill>
+                <a:latin typeface="Calibri" pitchFamily="34" charset="0"/>
+                <a:ea typeface="Calibri" pitchFamily="34" charset="-122"/>
+                <a:cs typeface="Calibri" pitchFamily="34" charset="-120"/>
+              </a:rPr>
+              <a:t>{{agency_name}}  •  Confidential  •  Page 14</a:t>
+            </a:r>
+            <a:endParaRPr lang="en-US" sz="800" dirty="0"/>
+          </a:p>
+        </p:txBody>
+      </p:sp>
+    </p:spTree>
+  </p:cSld>
+  <p:clrMapOvr>
+    <a:masterClrMapping/>
+  </p:clrMapOvr>
+</p:sld>
+</file>
+
+<file path=ppt/slides/slide15.xml><?xml version="1.0" encoding="utf-8"?>
+<p:sld xmlns:a="http://schemas.openxmlformats.org/drawingml/2006/main" xmlns:r="http://schemas.openxmlformats.org/officeDocument/2006/relationships" xmlns:p="http://schemas.openxmlformats.org/presentationml/2006/main">
+  <p:cSld name="Slide 15">
+    <p:bg>
+      <p:bgPr>
+        <a:solidFill>
+          <a:srgbClr val="F8FAFC"/>
+        </a:solidFill>
+      </p:bgPr>
+    </p:bg>
+    <p:spTree>
+      <p:nvGrpSpPr>
+        <p:cNvPr id="1" name=""/>
+        <p:cNvGrpSpPr/>
+        <p:nvPr/>
+      </p:nvGrpSpPr>
+      <p:grpSpPr>
+        <a:xfrm>
+          <a:off x="0" y="0"/>
+          <a:ext cx="0" cy="0"/>
+          <a:chOff x="0" y="0"/>
+          <a:chExt cx="0" cy="0"/>
+        </a:xfrm>
+      </p:grpSpPr>
+      <p:sp>
+        <p:nvSpPr>
+          <p:cNvPr id="2" name="Shape 0"/>
+          <p:cNvSpPr/>
+          <p:nvPr/>
+        </p:nvSpPr>
+        <p:spPr>
+          <a:xfrm>
+            <a:off x="0" y="0"/>
+            <a:ext cx="54864" cy="6858000"/>
+          </a:xfrm>
+          <a:prstGeom prst="rect">
+            <a:avLst/>
+          </a:prstGeom>
+          <a:solidFill>
+            <a:srgbClr val="F97316"/>
+          </a:solidFill>
+          <a:ln/>
+        </p:spPr>
+      </p:sp>
+      <p:sp>
+        <p:nvSpPr>
+          <p:cNvPr id="3" name="Text 1"/>
+          <p:cNvSpPr/>
+          <p:nvPr/>
+        </p:nvSpPr>
+        <p:spPr>
+          <a:xfrm>
+            <a:off x="731520" y="411480"/>
+            <a:ext cx="10698480" cy="640080"/>
+          </a:xfrm>
+          <a:prstGeom prst="rect">
+            <a:avLst/>
+          </a:prstGeom>
+          <a:noFill/>
+          <a:ln/>
+        </p:spPr>
+        <p:txBody>
+          <a:bodyPr wrap="square" lIns="0" tIns="0" rIns="0" bIns="0" rtlCol="0" anchor="ctr"/>
+          <a:lstStyle/>
+          <a:p>
+            <a:pPr indent="0" marL="0">
+              <a:buNone/>
+            </a:pPr>
+            <a:r>
+              <a:rPr lang="en-US" sz="2800" b="1" dirty="0">
+                <a:solidFill>
+                  <a:srgbClr val="0F172A"/>
+                </a:solidFill>
+                <a:latin typeface="Calibri" pitchFamily="34" charset="0"/>
+                <a:ea typeface="Calibri" pitchFamily="34" charset="-122"/>
+                <a:cs typeface="Calibri" pitchFamily="34" charset="-120"/>
+              </a:rPr>
+              <a:t>Conversion Funnel</a:t>
+            </a:r>
+            <a:endParaRPr lang="en-US" sz="2800" dirty="0"/>
+          </a:p>
+        </p:txBody>
+      </p:sp>
+      <p:sp>
+        <p:nvSpPr>
+          <p:cNvPr id="4" name="Shape 2"/>
+          <p:cNvSpPr/>
+          <p:nvPr/>
+        </p:nvSpPr>
+        <p:spPr>
+          <a:xfrm>
+            <a:off x="731520" y="1371600"/>
+            <a:ext cx="10698480" cy="3657600"/>
+          </a:xfrm>
+          <a:prstGeom prst="rect">
+            <a:avLst/>
+          </a:prstGeom>
+          <a:solidFill>
+            <a:srgbClr val="FFFFFF"/>
+          </a:solidFill>
+          <a:ln/>
+          <a:effectLst>
+            <a:outerShdw sx="100000" sy="100000" kx="0" ky="0" algn="bl" rotWithShape="0" blurRad="63500" dist="25400" dir="8100000">
+              <a:srgbClr val="000000">
+                <a:alpha val="7000"/>
+              </a:srgbClr>
+            </a:outerShdw>
+          </a:effectLst>
+        </p:spPr>
+      </p:sp>
+      <p:sp>
+        <p:nvSpPr>
+          <p:cNvPr id="5" name="Text 3"/>
+          <p:cNvSpPr/>
+          <p:nvPr/>
+        </p:nvSpPr>
+        <p:spPr>
+          <a:xfrm>
+            <a:off x="731520" y="1371600"/>
+            <a:ext cx="10698480" cy="3657600"/>
+          </a:xfrm>
+          <a:prstGeom prst="rect">
+            <a:avLst/>
+          </a:prstGeom>
+          <a:noFill/>
+          <a:ln/>
+        </p:spPr>
+        <p:txBody>
+          <a:bodyPr wrap="square" rtlCol="0" anchor="ctr"/>
+          <a:lstStyle/>
+          <a:p>
+            <a:pPr algn="ctr" indent="0" marL="0">
+              <a:buNone/>
+            </a:pPr>
+            <a:r>
+              <a:rPr lang="en-US" sz="1000" dirty="0">
+                <a:solidFill>
+                  <a:srgbClr val="94A3B8"/>
+                </a:solidFill>
+                <a:latin typeface="Calibri" pitchFamily="34" charset="0"/>
+                <a:ea typeface="Calibri" pitchFamily="34" charset="-122"/>
+                <a:cs typeface="Calibri" pitchFamily="34" charset="-120"/>
+              </a:rPr>
+              <a:t>{{chart_conversion_funnel}}</a:t>
+            </a:r>
+            <a:endParaRPr lang="en-US" sz="1000" dirty="0"/>
+          </a:p>
+        </p:txBody>
+      </p:sp>
+      <p:sp>
+        <p:nvSpPr>
+          <p:cNvPr id="6" name="Text 4"/>
+          <p:cNvSpPr/>
+          <p:nvPr/>
+        </p:nvSpPr>
+        <p:spPr>
+          <a:xfrm>
+            <a:off x="731520" y="5257800"/>
+            <a:ext cx="10698480" cy="1097280"/>
+          </a:xfrm>
+          <a:prstGeom prst="rect">
+            <a:avLst/>
+          </a:prstGeom>
+          <a:noFill/>
+          <a:ln/>
+        </p:spPr>
+        <p:txBody>
+          <a:bodyPr wrap="square" rtlCol="0" anchor="t"/>
+          <a:lstStyle/>
+          <a:p>
+            <a:pPr indent="0" marL="0">
+              <a:lnSpc>
+                <a:spcPct val="135000"/>
+              </a:lnSpc>
+              <a:buNone/>
+            </a:pPr>
+            <a:r>
+              <a:rPr lang="en-US" sz="1200" dirty="0">
+                <a:solidFill>
+                  <a:srgbClr val="334155"/>
+                </a:solidFill>
+                <a:latin typeface="Calibri" pitchFamily="34" charset="0"/>
+                <a:ea typeface="Calibri" pitchFamily="34" charset="-122"/>
+                <a:cs typeface="Calibri" pitchFamily="34" charset="-120"/>
+              </a:rPr>
+              <a:t>{{website_narrative}}</a:t>
+            </a:r>
+            <a:endParaRPr lang="en-US" sz="1200" dirty="0"/>
+          </a:p>
+        </p:txBody>
+      </p:sp>
+      <p:sp>
+        <p:nvSpPr>
+          <p:cNvPr id="7" name="Text 5"/>
+          <p:cNvSpPr/>
+          <p:nvPr/>
+        </p:nvSpPr>
+        <p:spPr>
+          <a:xfrm>
+            <a:off x="731520" y="6510528"/>
+            <a:ext cx="10698480" cy="256032"/>
+          </a:xfrm>
+          <a:prstGeom prst="rect">
+            <a:avLst/>
+          </a:prstGeom>
+          <a:noFill/>
+          <a:ln/>
+        </p:spPr>
+        <p:txBody>
+          <a:bodyPr wrap="square" rtlCol="0" anchor="ctr"/>
+          <a:lstStyle/>
+          <a:p>
+            <a:pPr indent="0" marL="0">
+              <a:buNone/>
+            </a:pPr>
+            <a:r>
+              <a:rPr lang="en-US" sz="800" dirty="0">
+                <a:solidFill>
+                  <a:srgbClr val="94A3B8"/>
+                </a:solidFill>
+                <a:latin typeface="Calibri" pitchFamily="34" charset="0"/>
+                <a:ea typeface="Calibri" pitchFamily="34" charset="-122"/>
+                <a:cs typeface="Calibri" pitchFamily="34" charset="-120"/>
+              </a:rPr>
+              <a:t>{{agency_name}}  •  Confidential  •  Page 15</a:t>
+            </a:r>
+            <a:endParaRPr lang="en-US" sz="800" dirty="0"/>
+          </a:p>
+        </p:txBody>
+      </p:sp>
+    </p:spTree>
+  </p:cSld>
+  <p:clrMapOvr>
+    <a:masterClrMapping/>
+  </p:clrMapOvr>
+</p:sld>
+</file>
+
+<file path=ppt/slides/slide16.xml><?xml version="1.0" encoding="utf-8"?>
+<p:sld xmlns:a="http://schemas.openxmlformats.org/drawingml/2006/main" xmlns:r="http://schemas.openxmlformats.org/officeDocument/2006/relationships" xmlns:p="http://schemas.openxmlformats.org/presentationml/2006/main">
+  <p:cSld name="Slide 16">
+    <p:bg>
+      <p:bgPr>
+        <a:solidFill>
+          <a:srgbClr val="F8FAFC"/>
+        </a:solidFill>
+      </p:bgPr>
+    </p:bg>
+    <p:spTree>
+      <p:nvGrpSpPr>
+        <p:cNvPr id="1" name=""/>
+        <p:cNvGrpSpPr/>
+        <p:nvPr/>
+      </p:nvGrpSpPr>
+      <p:grpSpPr>
+        <a:xfrm>
+          <a:off x="0" y="0"/>
+          <a:ext cx="0" cy="0"/>
+          <a:chOff x="0" y="0"/>
+          <a:chExt cx="0" cy="0"/>
+        </a:xfrm>
+      </p:grpSpPr>
+      <p:sp>
+        <p:nvSpPr>
+          <p:cNvPr id="2" name="Shape 0"/>
+          <p:cNvSpPr/>
+          <p:nvPr/>
+        </p:nvSpPr>
+        <p:spPr>
+          <a:xfrm>
+            <a:off x="0" y="0"/>
+            <a:ext cx="54864" cy="6858000"/>
+          </a:xfrm>
+          <a:prstGeom prst="rect">
+            <a:avLst/>
+          </a:prstGeom>
+          <a:solidFill>
+            <a:srgbClr val="059669"/>
+          </a:solidFill>
+          <a:ln/>
+        </p:spPr>
+      </p:sp>
+      <p:sp>
+        <p:nvSpPr>
+          <p:cNvPr id="3" name="Shape 1"/>
+          <p:cNvSpPr/>
+          <p:nvPr/>
+        </p:nvSpPr>
+        <p:spPr>
+          <a:xfrm>
+            <a:off x="54864" y="0"/>
+            <a:ext cx="12106656" cy="1051560"/>
+          </a:xfrm>
+          <a:prstGeom prst="rect">
+            <a:avLst/>
+          </a:prstGeom>
+          <a:solidFill>
+            <a:srgbClr val="ECFDF5"/>
+          </a:solidFill>
+          <a:ln/>
+        </p:spPr>
+      </p:sp>
+      <p:sp>
+        <p:nvSpPr>
+          <p:cNvPr id="4" name="Text 2"/>
+          <p:cNvSpPr/>
+          <p:nvPr/>
+        </p:nvSpPr>
+        <p:spPr>
+          <a:xfrm>
+            <a:off x="731520" y="411480"/>
+            <a:ext cx="10698480" cy="640080"/>
+          </a:xfrm>
+          <a:prstGeom prst="rect">
+            <a:avLst/>
+          </a:prstGeom>
+          <a:noFill/>
+          <a:ln/>
+        </p:spPr>
+        <p:txBody>
+          <a:bodyPr wrap="square" lIns="0" tIns="0" rIns="0" bIns="0" rtlCol="0" anchor="ctr"/>
+          <a:lstStyle/>
+          <a:p>
+            <a:pPr indent="0" marL="0">
+              <a:buNone/>
+            </a:pPr>
+            <a:r>
+              <a:rPr lang="en-US" sz="2800" b="1" dirty="0">
+                <a:solidFill>
+                  <a:srgbClr val="065F46"/>
+                </a:solidFill>
+                <a:latin typeface="Calibri" pitchFamily="34" charset="0"/>
+                <a:ea typeface="Calibri" pitchFamily="34" charset="-122"/>
+                <a:cs typeface="Calibri" pitchFamily="34" charset="-120"/>
+              </a:rPr>
+              <a:t>Key Wins &amp; Highlights</a:t>
+            </a:r>
+            <a:endParaRPr lang="en-US" sz="2800" dirty="0"/>
+          </a:p>
+        </p:txBody>
+      </p:sp>
+      <p:sp>
+        <p:nvSpPr>
+          <p:cNvPr id="5" name="Text 3"/>
+          <p:cNvSpPr/>
+          <p:nvPr/>
+        </p:nvSpPr>
+        <p:spPr>
+          <a:xfrm>
+            <a:off x="731520" y="1371600"/>
+            <a:ext cx="10698480" cy="4572000"/>
+          </a:xfrm>
+          <a:prstGeom prst="rect">
+            <a:avLst/>
+          </a:prstGeom>
+          <a:noFill/>
+          <a:ln/>
+        </p:spPr>
+        <p:txBody>
+          <a:bodyPr wrap="square" rtlCol="0" anchor="t"/>
+          <a:lstStyle/>
+          <a:p>
+            <a:pPr indent="0" marL="0">
+              <a:lnSpc>
+                <a:spcPct val="150000"/>
+              </a:lnSpc>
+              <a:buNone/>
+            </a:pPr>
+            <a:r>
+              <a:rPr lang="en-US" sz="1200" dirty="0">
+                <a:solidFill>
+                  <a:srgbClr val="334155"/>
+                </a:solidFill>
+                <a:latin typeface="Calibri" pitchFamily="34" charset="0"/>
+                <a:ea typeface="Calibri" pitchFamily="34" charset="-122"/>
+                <a:cs typeface="Calibri" pitchFamily="34" charset="-120"/>
+              </a:rPr>
+              <a:t>{{key_wins}}</a:t>
+            </a:r>
+            <a:endParaRPr lang="en-US" sz="1200" dirty="0"/>
+          </a:p>
+        </p:txBody>
+      </p:sp>
+      <p:sp>
+        <p:nvSpPr>
+          <p:cNvPr id="6" name="Text 4"/>
+          <p:cNvSpPr/>
+          <p:nvPr/>
+        </p:nvSpPr>
+        <p:spPr>
+          <a:xfrm>
+            <a:off x="731520" y="6510528"/>
+            <a:ext cx="10698480" cy="256032"/>
+          </a:xfrm>
+          <a:prstGeom prst="rect">
+            <a:avLst/>
+          </a:prstGeom>
+          <a:noFill/>
+          <a:ln/>
+        </p:spPr>
+        <p:txBody>
+          <a:bodyPr wrap="square" rtlCol="0" anchor="ctr"/>
+          <a:lstStyle/>
+          <a:p>
+            <a:pPr indent="0" marL="0">
+              <a:buNone/>
+            </a:pPr>
+            <a:r>
+              <a:rPr lang="en-US" sz="800" dirty="0">
+                <a:solidFill>
+                  <a:srgbClr val="94A3B8"/>
+                </a:solidFill>
+                <a:latin typeface="Calibri" pitchFamily="34" charset="0"/>
+                <a:ea typeface="Calibri" pitchFamily="34" charset="-122"/>
+                <a:cs typeface="Calibri" pitchFamily="34" charset="-120"/>
+              </a:rPr>
+              <a:t>{{agency_name}}  •  Confidential  •  Page 16</a:t>
+            </a:r>
+            <a:endParaRPr lang="en-US" sz="800" dirty="0"/>
+          </a:p>
+        </p:txBody>
+      </p:sp>
+    </p:spTree>
+  </p:cSld>
+  <p:clrMapOvr>
+    <a:masterClrMapping/>
+  </p:clrMapOvr>
+</p:sld>
+</file>
+
+<file path=ppt/slides/slide17.xml><?xml version="1.0" encoding="utf-8"?>
+<p:sld xmlns:a="http://schemas.openxmlformats.org/drawingml/2006/main" xmlns:r="http://schemas.openxmlformats.org/officeDocument/2006/relationships" xmlns:p="http://schemas.openxmlformats.org/presentationml/2006/main">
+  <p:cSld name="Slide 17">
+    <p:bg>
+      <p:bgPr>
+        <a:solidFill>
+          <a:srgbClr val="F8FAFC"/>
+        </a:solidFill>
+      </p:bgPr>
+    </p:bg>
+    <p:spTree>
+      <p:nvGrpSpPr>
+        <p:cNvPr id="1" name=""/>
+        <p:cNvGrpSpPr/>
+        <p:nvPr/>
+      </p:nvGrpSpPr>
+      <p:grpSpPr>
+        <a:xfrm>
+          <a:off x="0" y="0"/>
+          <a:ext cx="0" cy="0"/>
+          <a:chOff x="0" y="0"/>
+          <a:chExt cx="0" cy="0"/>
+        </a:xfrm>
+      </p:grpSpPr>
+      <p:sp>
+        <p:nvSpPr>
+          <p:cNvPr id="2" name="Shape 0"/>
+          <p:cNvSpPr/>
+          <p:nvPr/>
+        </p:nvSpPr>
+        <p:spPr>
+          <a:xfrm>
+            <a:off x="0" y="0"/>
+            <a:ext cx="54864" cy="6858000"/>
+          </a:xfrm>
+          <a:prstGeom prst="rect">
+            <a:avLst/>
+          </a:prstGeom>
+          <a:solidFill>
+            <a:srgbClr val="D97706"/>
+          </a:solidFill>
+          <a:ln/>
+        </p:spPr>
+      </p:sp>
+      <p:sp>
+        <p:nvSpPr>
+          <p:cNvPr id="3" name="Shape 1"/>
+          <p:cNvSpPr/>
+          <p:nvPr/>
+        </p:nvSpPr>
+        <p:spPr>
+          <a:xfrm>
+            <a:off x="54864" y="0"/>
+            <a:ext cx="12106656" cy="1051560"/>
+          </a:xfrm>
+          <a:prstGeom prst="rect">
+            <a:avLst/>
+          </a:prstGeom>
+          <a:solidFill>
+            <a:srgbClr val="FFFBEB"/>
+          </a:solidFill>
+          <a:ln/>
+        </p:spPr>
+      </p:sp>
+      <p:sp>
+        <p:nvSpPr>
+          <p:cNvPr id="4" name="Text 2"/>
+          <p:cNvSpPr/>
+          <p:nvPr/>
+        </p:nvSpPr>
+        <p:spPr>
+          <a:xfrm>
+            <a:off x="731520" y="411480"/>
+            <a:ext cx="10698480" cy="640080"/>
+          </a:xfrm>
+          <a:prstGeom prst="rect">
+            <a:avLst/>
+          </a:prstGeom>
+          <a:noFill/>
+          <a:ln/>
+        </p:spPr>
+        <p:txBody>
+          <a:bodyPr wrap="square" lIns="0" tIns="0" rIns="0" bIns="0" rtlCol="0" anchor="ctr"/>
+          <a:lstStyle/>
+          <a:p>
+            <a:pPr indent="0" marL="0">
+              <a:buNone/>
+            </a:pPr>
+            <a:r>
+              <a:rPr lang="en-US" sz="2800" b="1" dirty="0">
+                <a:solidFill>
+                  <a:srgbClr val="92400E"/>
+                </a:solidFill>
+                <a:latin typeface="Calibri" pitchFamily="34" charset="0"/>
+                <a:ea typeface="Calibri" pitchFamily="34" charset="-122"/>
+                <a:cs typeface="Calibri" pitchFamily="34" charset="-120"/>
+              </a:rPr>
+              <a:t>Concerns &amp; Recommendations</a:t>
+            </a:r>
+            <a:endParaRPr lang="en-US" sz="2800" dirty="0"/>
+          </a:p>
+        </p:txBody>
+      </p:sp>
+      <p:sp>
+        <p:nvSpPr>
+          <p:cNvPr id="5" name="Text 3"/>
+          <p:cNvSpPr/>
+          <p:nvPr/>
+        </p:nvSpPr>
+        <p:spPr>
+          <a:xfrm>
+            <a:off x="731520" y="1371600"/>
+            <a:ext cx="10698480" cy="4572000"/>
+          </a:xfrm>
+          <a:prstGeom prst="rect">
+            <a:avLst/>
+          </a:prstGeom>
+          <a:noFill/>
+          <a:ln/>
+        </p:spPr>
+        <p:txBody>
+          <a:bodyPr wrap="square" rtlCol="0" anchor="t"/>
+          <a:lstStyle/>
+          <a:p>
+            <a:pPr indent="0" marL="0">
+              <a:lnSpc>
+                <a:spcPct val="150000"/>
+              </a:lnSpc>
+              <a:buNone/>
+            </a:pPr>
+            <a:r>
+              <a:rPr lang="en-US" sz="1200" dirty="0">
+                <a:solidFill>
+                  <a:srgbClr val="334155"/>
+                </a:solidFill>
+                <a:latin typeface="Calibri" pitchFamily="34" charset="0"/>
+                <a:ea typeface="Calibri" pitchFamily="34" charset="-122"/>
+                <a:cs typeface="Calibri" pitchFamily="34" charset="-120"/>
+              </a:rPr>
+              <a:t>{{concerns}}</a:t>
+            </a:r>
+            <a:endParaRPr lang="en-US" sz="1200" dirty="0"/>
+          </a:p>
+        </p:txBody>
+      </p:sp>
+      <p:sp>
+        <p:nvSpPr>
+          <p:cNvPr id="6" name="Text 4"/>
+          <p:cNvSpPr/>
+          <p:nvPr/>
+        </p:nvSpPr>
+        <p:spPr>
+          <a:xfrm>
+            <a:off x="731520" y="6510528"/>
+            <a:ext cx="10698480" cy="256032"/>
+          </a:xfrm>
+          <a:prstGeom prst="rect">
+            <a:avLst/>
+          </a:prstGeom>
+          <a:noFill/>
+          <a:ln/>
+        </p:spPr>
+        <p:txBody>
+          <a:bodyPr wrap="square" rtlCol="0" anchor="ctr"/>
+          <a:lstStyle/>
+          <a:p>
+            <a:pPr indent="0" marL="0">
+              <a:buNone/>
+            </a:pPr>
+            <a:r>
+              <a:rPr lang="en-US" sz="800" dirty="0">
+                <a:solidFill>
+                  <a:srgbClr val="94A3B8"/>
+                </a:solidFill>
+                <a:latin typeface="Calibri" pitchFamily="34" charset="0"/>
+                <a:ea typeface="Calibri" pitchFamily="34" charset="-122"/>
+                <a:cs typeface="Calibri" pitchFamily="34" charset="-120"/>
+              </a:rPr>
+              <a:t>{{agency_name}}  •  Confidential  •  Page 17</a:t>
+            </a:r>
+            <a:endParaRPr lang="en-US" sz="800" dirty="0"/>
+          </a:p>
+        </p:txBody>
+      </p:sp>
+    </p:spTree>
+  </p:cSld>
+  <p:clrMapOvr>
+    <a:masterClrMapping/>
+  </p:clrMapOvr>
+</p:sld>
+</file>
+
+<file path=ppt/slides/slide18.xml><?xml version="1.0" encoding="utf-8"?>
+<p:sld xmlns:a="http://schemas.openxmlformats.org/drawingml/2006/main" xmlns:r="http://schemas.openxmlformats.org/officeDocument/2006/relationships" xmlns:p="http://schemas.openxmlformats.org/presentationml/2006/main">
+  <p:cSld name="Slide 18">
+    <p:bg>
+      <p:bgPr>
+        <a:solidFill>
+          <a:srgbClr val="F8FAFC"/>
+        </a:solidFill>
+      </p:bgPr>
+    </p:bg>
+    <p:spTree>
+      <p:nvGrpSpPr>
+        <p:cNvPr id="1" name=""/>
+        <p:cNvGrpSpPr/>
+        <p:nvPr/>
+      </p:nvGrpSpPr>
+      <p:grpSpPr>
+        <a:xfrm>
+          <a:off x="0" y="0"/>
+          <a:ext cx="0" cy="0"/>
+          <a:chOff x="0" y="0"/>
+          <a:chExt cx="0" cy="0"/>
+        </a:xfrm>
+      </p:grpSpPr>
+      <p:sp>
+        <p:nvSpPr>
+          <p:cNvPr id="2" name="Shape 0"/>
+          <p:cNvSpPr/>
+          <p:nvPr/>
+        </p:nvSpPr>
+        <p:spPr>
+          <a:xfrm>
+            <a:off x="0" y="0"/>
+            <a:ext cx="54864" cy="6858000"/>
+          </a:xfrm>
+          <a:prstGeom prst="rect">
+            <a:avLst/>
+          </a:prstGeom>
+          <a:solidFill>
+            <a:srgbClr val="14B8A6"/>
+          </a:solidFill>
+          <a:ln/>
+        </p:spPr>
+      </p:sp>
+      <p:sp>
+        <p:nvSpPr>
+          <p:cNvPr id="3" name="Text 1"/>
+          <p:cNvSpPr/>
+          <p:nvPr/>
+        </p:nvSpPr>
+        <p:spPr>
+          <a:xfrm>
+            <a:off x="731520" y="411480"/>
+            <a:ext cx="10698480" cy="640080"/>
+          </a:xfrm>
+          <a:prstGeom prst="rect">
+            <a:avLst/>
+          </a:prstGeom>
+          <a:noFill/>
+          <a:ln/>
+        </p:spPr>
+        <p:txBody>
+          <a:bodyPr wrap="square" lIns="0" tIns="0" rIns="0" bIns="0" rtlCol="0" anchor="ctr"/>
+          <a:lstStyle/>
+          <a:p>
+            <a:pPr indent="0" marL="0">
+              <a:buNone/>
+            </a:pPr>
+            <a:r>
+              <a:rPr lang="en-US" sz="2800" b="1" dirty="0">
+                <a:solidFill>
+                  <a:srgbClr val="0F172A"/>
+                </a:solidFill>
+                <a:latin typeface="Calibri" pitchFamily="34" charset="0"/>
+                <a:ea typeface="Calibri" pitchFamily="34" charset="-122"/>
+                <a:cs typeface="Calibri" pitchFamily="34" charset="-120"/>
+              </a:rPr>
+              <a:t>Next Steps &amp; Action Items</a:t>
+            </a:r>
+            <a:endParaRPr lang="en-US" sz="2800" dirty="0"/>
+          </a:p>
+        </p:txBody>
+      </p:sp>
+      <p:sp>
+        <p:nvSpPr>
+          <p:cNvPr id="4" name="Text 2"/>
+          <p:cNvSpPr/>
+          <p:nvPr/>
+        </p:nvSpPr>
+        <p:spPr>
+          <a:xfrm>
+            <a:off x="731520" y="1371600"/>
+            <a:ext cx="10698480" cy="3657600"/>
+          </a:xfrm>
+          <a:prstGeom prst="rect">
+            <a:avLst/>
+          </a:prstGeom>
+          <a:noFill/>
+          <a:ln/>
+        </p:spPr>
+        <p:txBody>
+          <a:bodyPr wrap="square" rtlCol="0" anchor="t"/>
+          <a:lstStyle/>
+          <a:p>
+            <a:pPr indent="0" marL="0">
+              <a:lnSpc>
+                <a:spcPct val="150000"/>
+              </a:lnSpc>
+              <a:buNone/>
+            </a:pPr>
+            <a:r>
+              <a:rPr lang="en-US" sz="1200" dirty="0">
+                <a:solidFill>
+                  <a:srgbClr val="334155"/>
+                </a:solidFill>
+                <a:latin typeface="Calibri" pitchFamily="34" charset="0"/>
+                <a:ea typeface="Calibri" pitchFamily="34" charset="-122"/>
+                <a:cs typeface="Calibri" pitchFamily="34" charset="-120"/>
+              </a:rPr>
+              <a:t>{{next_steps}}</a:t>
+            </a:r>
+            <a:endParaRPr lang="en-US" sz="1200" dirty="0"/>
+          </a:p>
+        </p:txBody>
+      </p:sp>
+      <p:sp>
+        <p:nvSpPr>
+          <p:cNvPr id="5" name="Shape 3"/>
+          <p:cNvSpPr/>
+          <p:nvPr/>
+        </p:nvSpPr>
+        <p:spPr>
+          <a:xfrm>
+            <a:off x="0" y="5760720"/>
+            <a:ext cx="12161520" cy="1097280"/>
+          </a:xfrm>
+          <a:prstGeom prst="rect">
+            <a:avLst/>
+          </a:prstGeom>
+          <a:solidFill>
+            <a:srgbClr val="F97316"/>
+          </a:solidFill>
+          <a:ln/>
+        </p:spPr>
+      </p:sp>
+      <p:sp>
+        <p:nvSpPr>
+          <p:cNvPr id="6" name="Text 4"/>
+          <p:cNvSpPr/>
+          <p:nvPr/>
+        </p:nvSpPr>
+        <p:spPr>
+          <a:xfrm>
+            <a:off x="731520" y="5806440"/>
+            <a:ext cx="10698480" cy="411480"/>
+          </a:xfrm>
+          <a:prstGeom prst="rect">
+            <a:avLst/>
+          </a:prstGeom>
+          <a:noFill/>
+          <a:ln/>
+        </p:spPr>
+        <p:txBody>
+          <a:bodyPr wrap="square" rtlCol="0" anchor="ctr"/>
+          <a:lstStyle/>
+          <a:p>
+            <a:pPr indent="0" marL="0">
+              <a:buNone/>
+            </a:pPr>
+            <a:r>
+              <a:rPr lang="en-US" sz="1300" b="1" dirty="0">
+                <a:solidFill>
+                  <a:srgbClr val="FFFFFF"/>
+                </a:solidFill>
+                <a:latin typeface="Calibri" pitchFamily="34" charset="0"/>
+                <a:ea typeface="Calibri" pitchFamily="34" charset="-122"/>
+                <a:cs typeface="Calibri" pitchFamily="34" charset="-120"/>
+              </a:rPr>
+              <a:t>Questions? Reply to this email or schedule a call.</a:t>
+            </a:r>
+            <a:endParaRPr lang="en-US" sz="1300" dirty="0"/>
+          </a:p>
+        </p:txBody>
+      </p:sp>
+      <p:sp>
+        <p:nvSpPr>
+          <p:cNvPr id="7" name="Text 5"/>
+          <p:cNvSpPr/>
+          <p:nvPr/>
+        </p:nvSpPr>
+        <p:spPr>
+          <a:xfrm>
+            <a:off x="731520" y="6263640"/>
+            <a:ext cx="10698480" cy="320040"/>
+          </a:xfrm>
+          <a:prstGeom prst="rect">
+            <a:avLst/>
+          </a:prstGeom>
+          <a:noFill/>
+          <a:ln/>
+        </p:spPr>
+        <p:txBody>
+          <a:bodyPr wrap="square" rtlCol="0" anchor="ctr"/>
+          <a:lstStyle/>
+          <a:p>
+            <a:pPr indent="0" marL="0">
+              <a:buNone/>
+            </a:pPr>
+            <a:r>
+              <a:rPr lang="en-US" sz="1100" dirty="0">
+                <a:solidFill>
+                  <a:srgbClr val="FED7AA"/>
+                </a:solidFill>
+                <a:latin typeface="Calibri" pitchFamily="34" charset="0"/>
+                <a:ea typeface="Calibri" pitchFamily="34" charset="-122"/>
+                <a:cs typeface="Calibri" pitchFamily="34" charset="-120"/>
+              </a:rPr>
+              <a:t>{{agency_name}}  •  {{agency_email}}</a:t>
+            </a:r>
+            <a:endParaRPr lang="en-US" sz="1100" dirty="0"/>
+          </a:p>
+        </p:txBody>
+      </p:sp>
+    </p:spTree>
+  </p:cSld>
+  <p:clrMapOvr>
+    <a:masterClrMapping/>
+  </p:clrMapOvr>
+</p:sld>
+</file>
+
+<file path=ppt/slides/slide19.xml><?xml version="1.0" encoding="utf-8"?>
+<p:sld xmlns:a="http://schemas.openxmlformats.org/drawingml/2006/main" xmlns:r="http://schemas.openxmlformats.org/officeDocument/2006/relationships" xmlns:p="http://schemas.openxmlformats.org/presentationml/2006/main">
+  <p:cSld name="Slide 19">
+    <p:bg>
+      <p:bgPr>
+        <a:solidFill>
+          <a:srgbClr val="F8FAFC"/>
+        </a:solidFill>
+      </p:bgPr>
+    </p:bg>
+    <p:spTree>
+      <p:nvGrpSpPr>
+        <p:cNvPr id="1" name=""/>
+        <p:cNvGrpSpPr/>
+        <p:nvPr/>
+      </p:nvGrpSpPr>
+      <p:grpSpPr>
+        <a:xfrm>
+          <a:off x="0" y="0"/>
+          <a:ext cx="0" cy="0"/>
+          <a:chOff x="0" y="0"/>
+          <a:chExt cx="0" cy="0"/>
+        </a:xfrm>
+      </p:grpSpPr>
+      <p:sp>
+        <p:nvSpPr>
+          <p:cNvPr id="2" name="Shape 0"/>
+          <p:cNvSpPr/>
+          <p:nvPr/>
+        </p:nvSpPr>
+        <p:spPr>
+          <a:xfrm>
+            <a:off x="0" y="0"/>
+            <a:ext cx="54864" cy="6858000"/>
+          </a:xfrm>
+          <a:prstGeom prst="rect">
+            <a:avLst/>
+          </a:prstGeom>
+          <a:solidFill>
+            <a:srgbClr val="8B5CF6"/>
+          </a:solidFill>
+          <a:ln/>
+        </p:spPr>
+      </p:sp>
+      <p:sp>
+        <p:nvSpPr>
+          <p:cNvPr id="3" name="Text 1"/>
+          <p:cNvSpPr/>
+          <p:nvPr/>
+        </p:nvSpPr>
+        <p:spPr>
+          <a:xfrm>
+            <a:off x="731520" y="411480"/>
+            <a:ext cx="10698480" cy="640080"/>
+          </a:xfrm>
+          <a:prstGeom prst="rect">
+            <a:avLst/>
+          </a:prstGeom>
+          <a:noFill/>
+          <a:ln/>
+        </p:spPr>
+        <p:txBody>
+          <a:bodyPr wrap="square" rtlCol="0" anchor="ctr"/>
+          <a:lstStyle/>
+          <a:p>
+            <a:pPr indent="0" marL="0">
+              <a:buNone/>
+            </a:pPr>
+            <a:r>
+              <a:rPr lang="en-US" sz="2800" b="1" dirty="0">
+                <a:solidFill>
+                  <a:srgbClr val="0F172A"/>
+                </a:solidFill>
+                <a:latin typeface="Calibri" pitchFamily="34" charset="0"/>
+                <a:ea typeface="Calibri" pitchFamily="34" charset="-122"/>
+                <a:cs typeface="Calibri" pitchFamily="34" charset="-120"/>
+              </a:rPr>
+              <a:t>{{custom_section_title}}</a:t>
+            </a:r>
+            <a:endParaRPr lang="en-US" sz="2800" dirty="0"/>
+          </a:p>
+        </p:txBody>
+      </p:sp>
+      <p:sp>
+        <p:nvSpPr>
+          <p:cNvPr id="4" name="Text 2"/>
+          <p:cNvSpPr/>
+          <p:nvPr/>
+        </p:nvSpPr>
+        <p:spPr>
+          <a:xfrm>
+            <a:off x="731520" y="1371600"/>
+            <a:ext cx="10698480" cy="4572000"/>
+          </a:xfrm>
+          <a:prstGeom prst="rect">
+            <a:avLst/>
+          </a:prstGeom>
+          <a:noFill/>
+          <a:ln/>
+        </p:spPr>
+        <p:txBody>
+          <a:bodyPr wrap="square" rtlCol="0" anchor="t"/>
+          <a:lstStyle/>
+          <a:p>
+            <a:pPr indent="0" marL="0">
+              <a:lnSpc>
+                <a:spcPct val="140000"/>
+              </a:lnSpc>
+              <a:buNone/>
+            </a:pPr>
+            <a:r>
+              <a:rPr lang="en-US" sz="1200" dirty="0">
+                <a:solidFill>
+                  <a:srgbClr val="334155"/>
+                </a:solidFill>
+                <a:latin typeface="Calibri" pitchFamily="34" charset="0"/>
+                <a:ea typeface="Calibri" pitchFamily="34" charset="-122"/>
+                <a:cs typeface="Calibri" pitchFamily="34" charset="-120"/>
+              </a:rPr>
+              <a:t>{{custom_section_text}}</a:t>
+            </a:r>
+            <a:endParaRPr lang="en-US" sz="1200" dirty="0"/>
+          </a:p>
+        </p:txBody>
+      </p:sp>
+      <p:sp>
+        <p:nvSpPr>
+          <p:cNvPr id="5" name="Text 3"/>
+          <p:cNvSpPr/>
+          <p:nvPr/>
+        </p:nvSpPr>
+        <p:spPr>
+          <a:xfrm>
+            <a:off x="731520" y="6510528"/>
+            <a:ext cx="10698480" cy="256032"/>
+          </a:xfrm>
+          <a:prstGeom prst="rect">
+            <a:avLst/>
+          </a:prstGeom>
+          <a:noFill/>
+          <a:ln/>
+        </p:spPr>
+        <p:txBody>
+          <a:bodyPr wrap="square" rtlCol="0" anchor="ctr"/>
+          <a:lstStyle/>
+          <a:p>
+            <a:pPr indent="0" marL="0">
+              <a:buNone/>
+            </a:pPr>
+            <a:r>
+              <a:rPr lang="en-US" sz="800" dirty="0">
+                <a:solidFill>
+                  <a:srgbClr val="94A3B8"/>
+                </a:solidFill>
+                <a:latin typeface="Calibri" pitchFamily="34" charset="0"/>
+                <a:ea typeface="Calibri" pitchFamily="34" charset="-122"/>
+                <a:cs typeface="Calibri" pitchFamily="34" charset="-120"/>
+              </a:rPr>
+              <a:t>{{agency_name}}  •  Confidential  •  Page 19</a:t>
+            </a:r>
+            <a:endParaRPr lang="en-US" sz="800" dirty="0"/>
+          </a:p>
+        </p:txBody>
+      </p:sp>
+    </p:spTree>
+  </p:cSld>
+  <p:clrMapOvr>
+    <a:masterClrMapping/>
+  </p:clrMapOvr>
+</p:sld>
+</file>
+
 <file path=ppt/slides/slide2.xml><?xml version="1.0" encoding="utf-8"?>
 <p:sld xmlns:a="http://schemas.openxmlformats.org/drawingml/2006/main" xmlns:r="http://schemas.openxmlformats.org/officeDocument/2006/relationships" xmlns:p="http://schemas.openxmlformats.org/presentationml/2006/main">
   <p:cSld name="Slide 2">
@@ -3597,7 +7542,7 @@
             <a:avLst/>
           </a:prstGeom>
           <a:solidFill>
-            <a:srgbClr val="8B5CF6"/>
+            <a:srgbClr val="F97316"/>
           </a:solidFill>
           <a:ln/>
         </p:spPr>
@@ -3635,7 +7580,7 @@
                 <a:ea typeface="Calibri" pitchFamily="34" charset="-122"/>
                 <a:cs typeface="Calibri" pitchFamily="34" charset="-120"/>
               </a:rPr>
-              <a:t>Paid Advertising — Meta Ads</a:t>
+              <a:t>Website Engagement</a:t>
             </a:r>
             <a:endParaRPr lang="en-US" sz="2800" dirty="0"/>
           </a:p>
@@ -3701,7 +7646,7 @@
                 <a:ea typeface="Calibri" pitchFamily="34" charset="-122"/>
                 <a:cs typeface="Calibri" pitchFamily="34" charset="-120"/>
               </a:rPr>
-              <a:t>{{chart_spend}}</a:t>
+              <a:t>{{chart_device_breakdown}}</a:t>
             </a:r>
             <a:endParaRPr lang="en-US" sz="1000" dirty="0"/>
           </a:p>
@@ -3767,7 +7712,7 @@
                 <a:ea typeface="Calibri" pitchFamily="34" charset="-122"/>
                 <a:cs typeface="Calibri" pitchFamily="34" charset="-120"/>
               </a:rPr>
-              <a:t>{{chart_campaigns}}</a:t>
+              <a:t>{{chart_top_pages}}</a:t>
             </a:r>
             <a:endParaRPr lang="en-US" sz="1000" dirty="0"/>
           </a:p>
@@ -3809,7 +7754,7 @@
                 <a:ea typeface="Calibri" pitchFamily="34" charset="-122"/>
                 <a:cs typeface="Calibri" pitchFamily="34" charset="-120"/>
               </a:rPr>
-              <a:t>{{ads_narrative}}</a:t>
+              <a:t>{{website_narrative}}</a:t>
             </a:r>
             <a:endParaRPr lang="en-US" sz="1200" dirty="0"/>
           </a:p>
@@ -3901,34 +7846,14 @@
             <a:avLst/>
           </a:prstGeom>
           <a:solidFill>
-            <a:srgbClr val="059669"/>
+            <a:srgbClr val="F97316"/>
           </a:solidFill>
           <a:ln/>
         </p:spPr>
       </p:sp>
       <p:sp>
         <p:nvSpPr>
-          <p:cNvPr id="3" name="Shape 1"/>
-          <p:cNvSpPr/>
-          <p:nvPr/>
-        </p:nvSpPr>
-        <p:spPr>
-          <a:xfrm>
-            <a:off x="54864" y="0"/>
-            <a:ext cx="12106656" cy="1051560"/>
-          </a:xfrm>
-          <a:prstGeom prst="rect">
-            <a:avLst/>
-          </a:prstGeom>
-          <a:solidFill>
-            <a:srgbClr val="ECFDF5"/>
-          </a:solidFill>
-          <a:ln/>
-        </p:spPr>
-      </p:sp>
-      <p:sp>
-        <p:nvSpPr>
-          <p:cNvPr id="4" name="Text 2"/>
+          <p:cNvPr id="3" name="Text 1"/>
           <p:cNvSpPr/>
           <p:nvPr/>
         </p:nvSpPr>
@@ -3953,13 +7878,13 @@
             <a:r>
               <a:rPr lang="en-US" sz="2800" b="1" dirty="0">
                 <a:solidFill>
-                  <a:srgbClr val="065F46"/>
-                </a:solidFill>
-                <a:latin typeface="Calibri" pitchFamily="34" charset="0"/>
-                <a:ea typeface="Calibri" pitchFamily="34" charset="-122"/>
-                <a:cs typeface="Calibri" pitchFamily="34" charset="-120"/>
-              </a:rPr>
-              <a:t>Key Wins &amp; Highlights</a:t>
+                  <a:srgbClr val="0F172A"/>
+                </a:solidFill>
+                <a:latin typeface="Calibri" pitchFamily="34" charset="0"/>
+                <a:ea typeface="Calibri" pitchFamily="34" charset="-122"/>
+                <a:cs typeface="Calibri" pitchFamily="34" charset="-120"/>
+              </a:rPr>
+              <a:t>Audience Insights</a:t>
             </a:r>
             <a:endParaRPr lang="en-US" sz="2800" dirty="0"/>
           </a:p>
@@ -3967,6 +7892,33 @@
       </p:sp>
       <p:sp>
         <p:nvSpPr>
+          <p:cNvPr id="4" name="Shape 2"/>
+          <p:cNvSpPr/>
+          <p:nvPr/>
+        </p:nvSpPr>
+        <p:spPr>
+          <a:xfrm>
+            <a:off x="731520" y="1371600"/>
+            <a:ext cx="5120640" cy="2743200"/>
+          </a:xfrm>
+          <a:prstGeom prst="rect">
+            <a:avLst/>
+          </a:prstGeom>
+          <a:solidFill>
+            <a:srgbClr val="FFFFFF"/>
+          </a:solidFill>
+          <a:ln/>
+          <a:effectLst>
+            <a:outerShdw sx="100000" sy="100000" kx="0" ky="0" algn="bl" rotWithShape="0" blurRad="63500" dist="25400" dir="8100000">
+              <a:srgbClr val="000000">
+                <a:alpha val="7000"/>
+              </a:srgbClr>
+            </a:outerShdw>
+          </a:effectLst>
+        </p:spPr>
+      </p:sp>
+      <p:sp>
+        <p:nvSpPr>
           <p:cNvPr id="5" name="Text 3"/>
           <p:cNvSpPr/>
           <p:nvPr/>
@@ -3974,7 +7926,112 @@
         <p:spPr>
           <a:xfrm>
             <a:off x="731520" y="1371600"/>
-            <a:ext cx="10698480" cy="4572000"/>
+            <a:ext cx="5120640" cy="2743200"/>
+          </a:xfrm>
+          <a:prstGeom prst="rect">
+            <a:avLst/>
+          </a:prstGeom>
+          <a:noFill/>
+          <a:ln/>
+        </p:spPr>
+        <p:txBody>
+          <a:bodyPr wrap="square" rtlCol="0" anchor="ctr"/>
+          <a:lstStyle/>
+          <a:p>
+            <a:pPr algn="ctr" indent="0" marL="0">
+              <a:buNone/>
+            </a:pPr>
+            <a:r>
+              <a:rPr lang="en-US" sz="1000" dirty="0">
+                <a:solidFill>
+                  <a:srgbClr val="94A3B8"/>
+                </a:solidFill>
+                <a:latin typeface="Calibri" pitchFamily="34" charset="0"/>
+                <a:ea typeface="Calibri" pitchFamily="34" charset="-122"/>
+                <a:cs typeface="Calibri" pitchFamily="34" charset="-120"/>
+              </a:rPr>
+              <a:t>{{chart_new_vs_returning}}</a:t>
+            </a:r>
+            <a:endParaRPr lang="en-US" sz="1000" dirty="0"/>
+          </a:p>
+        </p:txBody>
+      </p:sp>
+      <p:sp>
+        <p:nvSpPr>
+          <p:cNvPr id="6" name="Shape 4"/>
+          <p:cNvSpPr/>
+          <p:nvPr/>
+        </p:nvSpPr>
+        <p:spPr>
+          <a:xfrm>
+            <a:off x="6217920" y="1371600"/>
+            <a:ext cx="5212080" cy="2743200"/>
+          </a:xfrm>
+          <a:prstGeom prst="rect">
+            <a:avLst/>
+          </a:prstGeom>
+          <a:solidFill>
+            <a:srgbClr val="FFFFFF"/>
+          </a:solidFill>
+          <a:ln/>
+          <a:effectLst>
+            <a:outerShdw sx="100000" sy="100000" kx="0" ky="0" algn="bl" rotWithShape="0" blurRad="63500" dist="25400" dir="8100000">
+              <a:srgbClr val="000000">
+                <a:alpha val="7000"/>
+              </a:srgbClr>
+            </a:outerShdw>
+          </a:effectLst>
+        </p:spPr>
+      </p:sp>
+      <p:sp>
+        <p:nvSpPr>
+          <p:cNvPr id="7" name="Text 5"/>
+          <p:cNvSpPr/>
+          <p:nvPr/>
+        </p:nvSpPr>
+        <p:spPr>
+          <a:xfrm>
+            <a:off x="6217920" y="1371600"/>
+            <a:ext cx="5212080" cy="2743200"/>
+          </a:xfrm>
+          <a:prstGeom prst="rect">
+            <a:avLst/>
+          </a:prstGeom>
+          <a:noFill/>
+          <a:ln/>
+        </p:spPr>
+        <p:txBody>
+          <a:bodyPr wrap="square" rtlCol="0" anchor="ctr"/>
+          <a:lstStyle/>
+          <a:p>
+            <a:pPr algn="ctr" indent="0" marL="0">
+              <a:buNone/>
+            </a:pPr>
+            <a:r>
+              <a:rPr lang="en-US" sz="1000" dirty="0">
+                <a:solidFill>
+                  <a:srgbClr val="94A3B8"/>
+                </a:solidFill>
+                <a:latin typeface="Calibri" pitchFamily="34" charset="0"/>
+                <a:ea typeface="Calibri" pitchFamily="34" charset="-122"/>
+                <a:cs typeface="Calibri" pitchFamily="34" charset="-120"/>
+              </a:rPr>
+              <a:t>{{chart_top_countries}}</a:t>
+            </a:r>
+            <a:endParaRPr lang="en-US" sz="1000" dirty="0"/>
+          </a:p>
+        </p:txBody>
+      </p:sp>
+      <p:sp>
+        <p:nvSpPr>
+          <p:cNvPr id="8" name="Text 6"/>
+          <p:cNvSpPr/>
+          <p:nvPr/>
+        </p:nvSpPr>
+        <p:spPr>
+          <a:xfrm>
+            <a:off x="731520" y="4389120"/>
+            <a:ext cx="10698480" cy="1828800"/>
           </a:xfrm>
           <a:prstGeom prst="rect">
             <a:avLst/>
@@ -3988,7 +8045,7 @@
           <a:p>
             <a:pPr indent="0" marL="0">
               <a:lnSpc>
-                <a:spcPct val="150000"/>
+                <a:spcPct val="135000"/>
               </a:lnSpc>
               <a:buNone/>
             </a:pPr>
@@ -4001,7 +8058,7 @@
                 <a:ea typeface="Calibri" pitchFamily="34" charset="-122"/>
                 <a:cs typeface="Calibri" pitchFamily="34" charset="-120"/>
               </a:rPr>
-              <a:t>{{key_wins}}</a:t>
+              <a:t>{{website_narrative}}</a:t>
             </a:r>
             <a:endParaRPr lang="en-US" sz="1200" dirty="0"/>
           </a:p>
@@ -4009,7 +8066,7 @@
       </p:sp>
       <p:sp>
         <p:nvSpPr>
-          <p:cNvPr id="6" name="Text 4"/>
+          <p:cNvPr id="9" name="Text 7"/>
           <p:cNvSpPr/>
           <p:nvPr/>
         </p:nvSpPr>
@@ -4093,34 +8150,14 @@
             <a:avLst/>
           </a:prstGeom>
           <a:solidFill>
-            <a:srgbClr val="D97706"/>
+            <a:srgbClr val="F97316"/>
           </a:solidFill>
           <a:ln/>
         </p:spPr>
       </p:sp>
       <p:sp>
         <p:nvSpPr>
-          <p:cNvPr id="3" name="Shape 1"/>
-          <p:cNvSpPr/>
-          <p:nvPr/>
-        </p:nvSpPr>
-        <p:spPr>
-          <a:xfrm>
-            <a:off x="54864" y="0"/>
-            <a:ext cx="12106656" cy="1051560"/>
-          </a:xfrm>
-          <a:prstGeom prst="rect">
-            <a:avLst/>
-          </a:prstGeom>
-          <a:solidFill>
-            <a:srgbClr val="FFFBEB"/>
-          </a:solidFill>
-          <a:ln/>
-        </p:spPr>
-      </p:sp>
-      <p:sp>
-        <p:nvSpPr>
-          <p:cNvPr id="4" name="Text 2"/>
+          <p:cNvPr id="3" name="Text 1"/>
           <p:cNvSpPr/>
           <p:nvPr/>
         </p:nvSpPr>
@@ -4145,13 +8182,13 @@
             <a:r>
               <a:rPr lang="en-US" sz="2800" b="1" dirty="0">
                 <a:solidFill>
-                  <a:srgbClr val="92400E"/>
-                </a:solidFill>
-                <a:latin typeface="Calibri" pitchFamily="34" charset="0"/>
-                <a:ea typeface="Calibri" pitchFamily="34" charset="-122"/>
-                <a:cs typeface="Calibri" pitchFamily="34" charset="-120"/>
-              </a:rPr>
-              <a:t>Concerns &amp; Recommendations</a:t>
+                  <a:srgbClr val="0F172A"/>
+                </a:solidFill>
+                <a:latin typeface="Calibri" pitchFamily="34" charset="0"/>
+                <a:ea typeface="Calibri" pitchFamily="34" charset="-122"/>
+                <a:cs typeface="Calibri" pitchFamily="34" charset="-120"/>
+              </a:rPr>
+              <a:t>Bounce Rate Analysis</a:t>
             </a:r>
             <a:endParaRPr lang="en-US" sz="2800" dirty="0"/>
           </a:p>
@@ -4159,6 +8196,33 @@
       </p:sp>
       <p:sp>
         <p:nvSpPr>
+          <p:cNvPr id="4" name="Shape 2"/>
+          <p:cNvSpPr/>
+          <p:nvPr/>
+        </p:nvSpPr>
+        <p:spPr>
+          <a:xfrm>
+            <a:off x="731520" y="1371600"/>
+            <a:ext cx="10698480" cy="3657600"/>
+          </a:xfrm>
+          <a:prstGeom prst="rect">
+            <a:avLst/>
+          </a:prstGeom>
+          <a:solidFill>
+            <a:srgbClr val="FFFFFF"/>
+          </a:solidFill>
+          <a:ln/>
+          <a:effectLst>
+            <a:outerShdw sx="100000" sy="100000" kx="0" ky="0" algn="bl" rotWithShape="0" blurRad="63500" dist="25400" dir="8100000">
+              <a:srgbClr val="000000">
+                <a:alpha val="7000"/>
+              </a:srgbClr>
+            </a:outerShdw>
+          </a:effectLst>
+        </p:spPr>
+      </p:sp>
+      <p:sp>
+        <p:nvSpPr>
           <p:cNvPr id="5" name="Text 3"/>
           <p:cNvSpPr/>
           <p:nvPr/>
@@ -4166,7 +8230,46 @@
         <p:spPr>
           <a:xfrm>
             <a:off x="731520" y="1371600"/>
-            <a:ext cx="10698480" cy="4572000"/>
+            <a:ext cx="10698480" cy="3657600"/>
+          </a:xfrm>
+          <a:prstGeom prst="rect">
+            <a:avLst/>
+          </a:prstGeom>
+          <a:noFill/>
+          <a:ln/>
+        </p:spPr>
+        <p:txBody>
+          <a:bodyPr wrap="square" rtlCol="0" anchor="ctr"/>
+          <a:lstStyle/>
+          <a:p>
+            <a:pPr algn="ctr" indent="0" marL="0">
+              <a:buNone/>
+            </a:pPr>
+            <a:r>
+              <a:rPr lang="en-US" sz="1000" dirty="0">
+                <a:solidFill>
+                  <a:srgbClr val="94A3B8"/>
+                </a:solidFill>
+                <a:latin typeface="Calibri" pitchFamily="34" charset="0"/>
+                <a:ea typeface="Calibri" pitchFamily="34" charset="-122"/>
+                <a:cs typeface="Calibri" pitchFamily="34" charset="-120"/>
+              </a:rPr>
+              <a:t>{{chart_bounce_rate}}</a:t>
+            </a:r>
+            <a:endParaRPr lang="en-US" sz="1000" dirty="0"/>
+          </a:p>
+        </p:txBody>
+      </p:sp>
+      <p:sp>
+        <p:nvSpPr>
+          <p:cNvPr id="6" name="Text 4"/>
+          <p:cNvSpPr/>
+          <p:nvPr/>
+        </p:nvSpPr>
+        <p:spPr>
+          <a:xfrm>
+            <a:off x="731520" y="5257800"/>
+            <a:ext cx="10698480" cy="1097280"/>
           </a:xfrm>
           <a:prstGeom prst="rect">
             <a:avLst/>
@@ -4180,7 +8283,7 @@
           <a:p>
             <a:pPr indent="0" marL="0">
               <a:lnSpc>
-                <a:spcPct val="150000"/>
+                <a:spcPct val="135000"/>
               </a:lnSpc>
               <a:buNone/>
             </a:pPr>
@@ -4193,7 +8296,7 @@
                 <a:ea typeface="Calibri" pitchFamily="34" charset="-122"/>
                 <a:cs typeface="Calibri" pitchFamily="34" charset="-120"/>
               </a:rPr>
-              <a:t>{{concerns}}</a:t>
+              <a:t>{{website_narrative}}</a:t>
             </a:r>
             <a:endParaRPr lang="en-US" sz="1200" dirty="0"/>
           </a:p>
@@ -4201,7 +8304,7 @@
       </p:sp>
       <p:sp>
         <p:nvSpPr>
-          <p:cNvPr id="6" name="Text 4"/>
+          <p:cNvPr id="7" name="Text 5"/>
           <p:cNvSpPr/>
           <p:nvPr/>
         </p:nvSpPr>
@@ -4285,7 +8388,7 @@
             <a:avLst/>
           </a:prstGeom>
           <a:solidFill>
-            <a:srgbClr val="14B8A6"/>
+            <a:srgbClr val="8B5CF6"/>
           </a:solidFill>
           <a:ln/>
         </p:spPr>
@@ -4323,7 +8426,7 @@
                 <a:ea typeface="Calibri" pitchFamily="34" charset="-122"/>
                 <a:cs typeface="Calibri" pitchFamily="34" charset="-120"/>
               </a:rPr>
-              <a:t>Next Steps &amp; Action Items</a:t>
+              <a:t>Paid Advertising — Meta Ads</a:t>
             </a:r>
             <a:endParaRPr lang="en-US" sz="2800" dirty="0"/>
           </a:p>
@@ -4331,14 +8434,146 @@
       </p:sp>
       <p:sp>
         <p:nvSpPr>
-          <p:cNvPr id="4" name="Text 2"/>
+          <p:cNvPr id="4" name="Shape 2"/>
           <p:cNvSpPr/>
           <p:nvPr/>
         </p:nvSpPr>
         <p:spPr>
           <a:xfrm>
             <a:off x="731520" y="1371600"/>
-            <a:ext cx="10698480" cy="3657600"/>
+            <a:ext cx="5120640" cy="2743200"/>
+          </a:xfrm>
+          <a:prstGeom prst="rect">
+            <a:avLst/>
+          </a:prstGeom>
+          <a:solidFill>
+            <a:srgbClr val="FFFFFF"/>
+          </a:solidFill>
+          <a:ln/>
+          <a:effectLst>
+            <a:outerShdw sx="100000" sy="100000" kx="0" ky="0" algn="bl" rotWithShape="0" blurRad="63500" dist="25400" dir="8100000">
+              <a:srgbClr val="000000">
+                <a:alpha val="7000"/>
+              </a:srgbClr>
+            </a:outerShdw>
+          </a:effectLst>
+        </p:spPr>
+      </p:sp>
+      <p:sp>
+        <p:nvSpPr>
+          <p:cNvPr id="5" name="Text 3"/>
+          <p:cNvSpPr/>
+          <p:nvPr/>
+        </p:nvSpPr>
+        <p:spPr>
+          <a:xfrm>
+            <a:off x="731520" y="1371600"/>
+            <a:ext cx="5120640" cy="2743200"/>
+          </a:xfrm>
+          <a:prstGeom prst="rect">
+            <a:avLst/>
+          </a:prstGeom>
+          <a:noFill/>
+          <a:ln/>
+        </p:spPr>
+        <p:txBody>
+          <a:bodyPr wrap="square" rtlCol="0" anchor="ctr"/>
+          <a:lstStyle/>
+          <a:p>
+            <a:pPr algn="ctr" indent="0" marL="0">
+              <a:buNone/>
+            </a:pPr>
+            <a:r>
+              <a:rPr lang="en-US" sz="1000" dirty="0">
+                <a:solidFill>
+                  <a:srgbClr val="94A3B8"/>
+                </a:solidFill>
+                <a:latin typeface="Calibri" pitchFamily="34" charset="0"/>
+                <a:ea typeface="Calibri" pitchFamily="34" charset="-122"/>
+                <a:cs typeface="Calibri" pitchFamily="34" charset="-120"/>
+              </a:rPr>
+              <a:t>{{chart_spend}}</a:t>
+            </a:r>
+            <a:endParaRPr lang="en-US" sz="1000" dirty="0"/>
+          </a:p>
+        </p:txBody>
+      </p:sp>
+      <p:sp>
+        <p:nvSpPr>
+          <p:cNvPr id="6" name="Shape 4"/>
+          <p:cNvSpPr/>
+          <p:nvPr/>
+        </p:nvSpPr>
+        <p:spPr>
+          <a:xfrm>
+            <a:off x="6217920" y="1371600"/>
+            <a:ext cx="5212080" cy="2743200"/>
+          </a:xfrm>
+          <a:prstGeom prst="rect">
+            <a:avLst/>
+          </a:prstGeom>
+          <a:solidFill>
+            <a:srgbClr val="FFFFFF"/>
+          </a:solidFill>
+          <a:ln/>
+          <a:effectLst>
+            <a:outerShdw sx="100000" sy="100000" kx="0" ky="0" algn="bl" rotWithShape="0" blurRad="63500" dist="25400" dir="8100000">
+              <a:srgbClr val="000000">
+                <a:alpha val="7000"/>
+              </a:srgbClr>
+            </a:outerShdw>
+          </a:effectLst>
+        </p:spPr>
+      </p:sp>
+      <p:sp>
+        <p:nvSpPr>
+          <p:cNvPr id="7" name="Text 5"/>
+          <p:cNvSpPr/>
+          <p:nvPr/>
+        </p:nvSpPr>
+        <p:spPr>
+          <a:xfrm>
+            <a:off x="6217920" y="1371600"/>
+            <a:ext cx="5212080" cy="2743200"/>
+          </a:xfrm>
+          <a:prstGeom prst="rect">
+            <a:avLst/>
+          </a:prstGeom>
+          <a:noFill/>
+          <a:ln/>
+        </p:spPr>
+        <p:txBody>
+          <a:bodyPr wrap="square" rtlCol="0" anchor="ctr"/>
+          <a:lstStyle/>
+          <a:p>
+            <a:pPr algn="ctr" indent="0" marL="0">
+              <a:buNone/>
+            </a:pPr>
+            <a:r>
+              <a:rPr lang="en-US" sz="1000" dirty="0">
+                <a:solidFill>
+                  <a:srgbClr val="94A3B8"/>
+                </a:solidFill>
+                <a:latin typeface="Calibri" pitchFamily="34" charset="0"/>
+                <a:ea typeface="Calibri" pitchFamily="34" charset="-122"/>
+                <a:cs typeface="Calibri" pitchFamily="34" charset="-120"/>
+              </a:rPr>
+              <a:t>{{chart_campaigns}}</a:t>
+            </a:r>
+            <a:endParaRPr lang="en-US" sz="1000" dirty="0"/>
+          </a:p>
+        </p:txBody>
+      </p:sp>
+      <p:sp>
+        <p:nvSpPr>
+          <p:cNvPr id="8" name="Text 6"/>
+          <p:cNvSpPr/>
+          <p:nvPr/>
+        </p:nvSpPr>
+        <p:spPr>
+          <a:xfrm>
+            <a:off x="731520" y="4389120"/>
+            <a:ext cx="10698480" cy="1828800"/>
           </a:xfrm>
           <a:prstGeom prst="rect">
             <a:avLst/>
@@ -4352,7 +8587,7 @@
           <a:p>
             <a:pPr indent="0" marL="0">
               <a:lnSpc>
-                <a:spcPct val="150000"/>
+                <a:spcPct val="135000"/>
               </a:lnSpc>
               <a:buNone/>
             </a:pPr>
@@ -4365,7 +8600,7 @@
                 <a:ea typeface="Calibri" pitchFamily="34" charset="-122"/>
                 <a:cs typeface="Calibri" pitchFamily="34" charset="-120"/>
               </a:rPr>
-              <a:t>{{next_steps}}</a:t>
+              <a:t>{{ads_narrative}}</a:t>
             </a:r>
             <a:endParaRPr lang="en-US" sz="1200" dirty="0"/>
           </a:p>
@@ -4373,34 +8608,14 @@
       </p:sp>
       <p:sp>
         <p:nvSpPr>
-          <p:cNvPr id="5" name="Shape 3"/>
-          <p:cNvSpPr/>
-          <p:nvPr/>
-        </p:nvSpPr>
-        <p:spPr>
-          <a:xfrm>
-            <a:off x="0" y="5760720"/>
-            <a:ext cx="12161520" cy="1097280"/>
-          </a:xfrm>
-          <a:prstGeom prst="rect">
-            <a:avLst/>
-          </a:prstGeom>
-          <a:solidFill>
-            <a:srgbClr val="F97316"/>
-          </a:solidFill>
-          <a:ln/>
-        </p:spPr>
-      </p:sp>
-      <p:sp>
-        <p:nvSpPr>
-          <p:cNvPr id="6" name="Text 4"/>
-          <p:cNvSpPr/>
-          <p:nvPr/>
-        </p:nvSpPr>
-        <p:spPr>
-          <a:xfrm>
-            <a:off x="731520" y="5806440"/>
-            <a:ext cx="10698480" cy="411480"/>
+          <p:cNvPr id="9" name="Text 7"/>
+          <p:cNvSpPr/>
+          <p:nvPr/>
+        </p:nvSpPr>
+        <p:spPr>
+          <a:xfrm>
+            <a:off x="731520" y="6510528"/>
+            <a:ext cx="10698480" cy="256032"/>
           </a:xfrm>
           <a:prstGeom prst="rect">
             <a:avLst/>
@@ -4416,56 +8631,17 @@
               <a:buNone/>
             </a:pPr>
             <a:r>
-              <a:rPr lang="en-US" sz="1300" b="1" dirty="0">
-                <a:solidFill>
-                  <a:srgbClr val="FFFFFF"/>
-                </a:solidFill>
-                <a:latin typeface="Calibri" pitchFamily="34" charset="0"/>
-                <a:ea typeface="Calibri" pitchFamily="34" charset="-122"/>
-                <a:cs typeface="Calibri" pitchFamily="34" charset="-120"/>
-              </a:rPr>
-              <a:t>Questions? Reply to this email or schedule a call.</a:t>
-            </a:r>
-            <a:endParaRPr lang="en-US" sz="1300" dirty="0"/>
-          </a:p>
-        </p:txBody>
-      </p:sp>
-      <p:sp>
-        <p:nvSpPr>
-          <p:cNvPr id="7" name="Text 5"/>
-          <p:cNvSpPr/>
-          <p:nvPr/>
-        </p:nvSpPr>
-        <p:spPr>
-          <a:xfrm>
-            <a:off x="731520" y="6263640"/>
-            <a:ext cx="10698480" cy="320040"/>
-          </a:xfrm>
-          <a:prstGeom prst="rect">
-            <a:avLst/>
-          </a:prstGeom>
-          <a:noFill/>
-          <a:ln/>
-        </p:spPr>
-        <p:txBody>
-          <a:bodyPr wrap="square" rtlCol="0" anchor="ctr"/>
-          <a:lstStyle/>
-          <a:p>
-            <a:pPr indent="0" marL="0">
-              <a:buNone/>
-            </a:pPr>
-            <a:r>
-              <a:rPr lang="en-US" sz="1100" dirty="0">
-                <a:solidFill>
-                  <a:srgbClr val="FED7AA"/>
-                </a:solidFill>
-                <a:latin typeface="Calibri" pitchFamily="34" charset="0"/>
-                <a:ea typeface="Calibri" pitchFamily="34" charset="-122"/>
-                <a:cs typeface="Calibri" pitchFamily="34" charset="-120"/>
-              </a:rPr>
-              <a:t>{{agency_name}}  •  {{agency_email}}</a:t>
-            </a:r>
-            <a:endParaRPr lang="en-US" sz="1100" dirty="0"/>
+              <a:rPr lang="en-US" sz="800" dirty="0">
+                <a:solidFill>
+                  <a:srgbClr val="94A3B8"/>
+                </a:solidFill>
+                <a:latin typeface="Calibri" pitchFamily="34" charset="0"/>
+                <a:ea typeface="Calibri" pitchFamily="34" charset="-122"/>
+                <a:cs typeface="Calibri" pitchFamily="34" charset="-120"/>
+              </a:rPr>
+              <a:t>{{agency_name}}  •  Confidential  •  Page 8</a:t>
+            </a:r>
+            <a:endParaRPr lang="en-US" sz="800" dirty="0"/>
           </a:p>
         </p:txBody>
       </p:sp>
@@ -4539,37 +8715,169 @@
           <a:ln/>
         </p:spPr>
         <p:txBody>
+          <a:bodyPr wrap="square" lIns="0" tIns="0" rIns="0" bIns="0" rtlCol="0" anchor="ctr"/>
+          <a:lstStyle/>
+          <a:p>
+            <a:pPr indent="0" marL="0">
+              <a:buNone/>
+            </a:pPr>
+            <a:r>
+              <a:rPr lang="en-US" sz="2800" b="1" dirty="0">
+                <a:solidFill>
+                  <a:srgbClr val="0F172A"/>
+                </a:solidFill>
+                <a:latin typeface="Calibri" pitchFamily="34" charset="0"/>
+                <a:ea typeface="Calibri" pitchFamily="34" charset="-122"/>
+                <a:cs typeface="Calibri" pitchFamily="34" charset="-120"/>
+              </a:rPr>
+              <a:t>Meta Ads — Audience</a:t>
+            </a:r>
+            <a:endParaRPr lang="en-US" sz="2800" dirty="0"/>
+          </a:p>
+        </p:txBody>
+      </p:sp>
+      <p:sp>
+        <p:nvSpPr>
+          <p:cNvPr id="4" name="Shape 2"/>
+          <p:cNvSpPr/>
+          <p:nvPr/>
+        </p:nvSpPr>
+        <p:spPr>
+          <a:xfrm>
+            <a:off x="731520" y="1371600"/>
+            <a:ext cx="5120640" cy="2743200"/>
+          </a:xfrm>
+          <a:prstGeom prst="rect">
+            <a:avLst/>
+          </a:prstGeom>
+          <a:solidFill>
+            <a:srgbClr val="FFFFFF"/>
+          </a:solidFill>
+          <a:ln/>
+          <a:effectLst>
+            <a:outerShdw sx="100000" sy="100000" kx="0" ky="0" algn="bl" rotWithShape="0" blurRad="63500" dist="25400" dir="8100000">
+              <a:srgbClr val="000000">
+                <a:alpha val="7000"/>
+              </a:srgbClr>
+            </a:outerShdw>
+          </a:effectLst>
+        </p:spPr>
+      </p:sp>
+      <p:sp>
+        <p:nvSpPr>
+          <p:cNvPr id="5" name="Text 3"/>
+          <p:cNvSpPr/>
+          <p:nvPr/>
+        </p:nvSpPr>
+        <p:spPr>
+          <a:xfrm>
+            <a:off x="731520" y="1371600"/>
+            <a:ext cx="5120640" cy="2743200"/>
+          </a:xfrm>
+          <a:prstGeom prst="rect">
+            <a:avLst/>
+          </a:prstGeom>
+          <a:noFill/>
+          <a:ln/>
+        </p:spPr>
+        <p:txBody>
           <a:bodyPr wrap="square" rtlCol="0" anchor="ctr"/>
           <a:lstStyle/>
           <a:p>
-            <a:pPr indent="0" marL="0">
-              <a:buNone/>
-            </a:pPr>
-            <a:r>
-              <a:rPr lang="en-US" sz="2800" b="1" dirty="0">
-                <a:solidFill>
-                  <a:srgbClr val="0F172A"/>
-                </a:solidFill>
-                <a:latin typeface="Calibri" pitchFamily="34" charset="0"/>
-                <a:ea typeface="Calibri" pitchFamily="34" charset="-122"/>
-                <a:cs typeface="Calibri" pitchFamily="34" charset="-120"/>
-              </a:rPr>
-              <a:t>{{custom_section_title}}</a:t>
-            </a:r>
-            <a:endParaRPr lang="en-US" sz="2800" dirty="0"/>
-          </a:p>
-        </p:txBody>
-      </p:sp>
-      <p:sp>
-        <p:nvSpPr>
-          <p:cNvPr id="4" name="Text 2"/>
-          <p:cNvSpPr/>
-          <p:nvPr/>
-        </p:nvSpPr>
-        <p:spPr>
-          <a:xfrm>
-            <a:off x="731520" y="1371600"/>
-            <a:ext cx="10698480" cy="4572000"/>
+            <a:pPr algn="ctr" indent="0" marL="0">
+              <a:buNone/>
+            </a:pPr>
+            <a:r>
+              <a:rPr lang="en-US" sz="1000" dirty="0">
+                <a:solidFill>
+                  <a:srgbClr val="94A3B8"/>
+                </a:solidFill>
+                <a:latin typeface="Calibri" pitchFamily="34" charset="0"/>
+                <a:ea typeface="Calibri" pitchFamily="34" charset="-122"/>
+                <a:cs typeface="Calibri" pitchFamily="34" charset="-120"/>
+              </a:rPr>
+              <a:t>{{chart_demographics}}</a:t>
+            </a:r>
+            <a:endParaRPr lang="en-US" sz="1000" dirty="0"/>
+          </a:p>
+        </p:txBody>
+      </p:sp>
+      <p:sp>
+        <p:nvSpPr>
+          <p:cNvPr id="6" name="Shape 4"/>
+          <p:cNvSpPr/>
+          <p:nvPr/>
+        </p:nvSpPr>
+        <p:spPr>
+          <a:xfrm>
+            <a:off x="6217920" y="1371600"/>
+            <a:ext cx="5212080" cy="2743200"/>
+          </a:xfrm>
+          <a:prstGeom prst="rect">
+            <a:avLst/>
+          </a:prstGeom>
+          <a:solidFill>
+            <a:srgbClr val="FFFFFF"/>
+          </a:solidFill>
+          <a:ln/>
+          <a:effectLst>
+            <a:outerShdw sx="100000" sy="100000" kx="0" ky="0" algn="bl" rotWithShape="0" blurRad="63500" dist="25400" dir="8100000">
+              <a:srgbClr val="000000">
+                <a:alpha val="7000"/>
+              </a:srgbClr>
+            </a:outerShdw>
+          </a:effectLst>
+        </p:spPr>
+      </p:sp>
+      <p:sp>
+        <p:nvSpPr>
+          <p:cNvPr id="7" name="Text 5"/>
+          <p:cNvSpPr/>
+          <p:nvPr/>
+        </p:nvSpPr>
+        <p:spPr>
+          <a:xfrm>
+            <a:off x="6217920" y="1371600"/>
+            <a:ext cx="5212080" cy="2743200"/>
+          </a:xfrm>
+          <a:prstGeom prst="rect">
+            <a:avLst/>
+          </a:prstGeom>
+          <a:noFill/>
+          <a:ln/>
+        </p:spPr>
+        <p:txBody>
+          <a:bodyPr wrap="square" rtlCol="0" anchor="ctr"/>
+          <a:lstStyle/>
+          <a:p>
+            <a:pPr algn="ctr" indent="0" marL="0">
+              <a:buNone/>
+            </a:pPr>
+            <a:r>
+              <a:rPr lang="en-US" sz="1000" dirty="0">
+                <a:solidFill>
+                  <a:srgbClr val="94A3B8"/>
+                </a:solidFill>
+                <a:latin typeface="Calibri" pitchFamily="34" charset="0"/>
+                <a:ea typeface="Calibri" pitchFamily="34" charset="-122"/>
+                <a:cs typeface="Calibri" pitchFamily="34" charset="-120"/>
+              </a:rPr>
+              <a:t>{{chart_placements}}</a:t>
+            </a:r>
+            <a:endParaRPr lang="en-US" sz="1000" dirty="0"/>
+          </a:p>
+        </p:txBody>
+      </p:sp>
+      <p:sp>
+        <p:nvSpPr>
+          <p:cNvPr id="8" name="Text 6"/>
+          <p:cNvSpPr/>
+          <p:nvPr/>
+        </p:nvSpPr>
+        <p:spPr>
+          <a:xfrm>
+            <a:off x="731520" y="4389120"/>
+            <a:ext cx="10698480" cy="1828800"/>
           </a:xfrm>
           <a:prstGeom prst="rect">
             <a:avLst/>
@@ -4583,7 +8891,7 @@
           <a:p>
             <a:pPr indent="0" marL="0">
               <a:lnSpc>
-                <a:spcPct val="140000"/>
+                <a:spcPct val="135000"/>
               </a:lnSpc>
               <a:buNone/>
             </a:pPr>
@@ -4596,7 +8904,7 @@
                 <a:ea typeface="Calibri" pitchFamily="34" charset="-122"/>
                 <a:cs typeface="Calibri" pitchFamily="34" charset="-120"/>
               </a:rPr>
-              <a:t>{{custom_section_text}}</a:t>
+              <a:t>{{ads_narrative}}</a:t>
             </a:r>
             <a:endParaRPr lang="en-US" sz="1200" dirty="0"/>
           </a:p>
@@ -4604,7 +8912,7 @@
       </p:sp>
       <p:sp>
         <p:nvSpPr>
-          <p:cNvPr id="5" name="Text 3"/>
+          <p:cNvPr id="9" name="Text 7"/>
           <p:cNvSpPr/>
           <p:nvPr/>
         </p:nvSpPr>

--- a/backend/templates/pptx/colorful_agency.pptx
+++ b/backend/templates/pptx/colorful_agency.pptx
@@ -2496,6 +2496,10 @@
           </a:solidFill>
           <a:ln/>
         </p:spPr>
+        <p:txBody>
+          <a:bodyPr/>
+          <a:p/>
+        </p:txBody>
       </p:sp>
       <p:sp>
         <p:nvSpPr>
@@ -2516,6 +2520,10 @@
           </a:solidFill>
           <a:ln/>
         </p:spPr>
+        <p:txBody>
+          <a:bodyPr/>
+          <a:p/>
+        </p:txBody>
       </p:sp>
       <p:sp>
         <p:nvSpPr>
@@ -2536,6 +2544,10 @@
           </a:solidFill>
           <a:ln/>
         </p:spPr>
+        <p:txBody>
+          <a:bodyPr/>
+          <a:p/>
+        </p:txBody>
       </p:sp>
       <p:sp>
         <p:nvSpPr>
@@ -2556,6 +2568,10 @@
           </a:solidFill>
           <a:ln/>
         </p:spPr>
+        <p:txBody>
+          <a:bodyPr/>
+          <a:p/>
+        </p:txBody>
       </p:sp>
       <p:sp>
         <p:nvSpPr>
@@ -2849,6 +2865,10 @@
           </a:solidFill>
           <a:ln/>
         </p:spPr>
+        <p:txBody>
+          <a:bodyPr/>
+          <a:p/>
+        </p:txBody>
       </p:sp>
     </p:spTree>
   </p:cSld>
@@ -2901,6 +2921,10 @@
           </a:solidFill>
           <a:ln/>
         </p:spPr>
+        <p:txBody>
+          <a:bodyPr/>
+          <a:p/>
+        </p:txBody>
       </p:sp>
       <p:sp>
         <p:nvSpPr>
@@ -2967,6 +2991,10 @@
             </a:outerShdw>
           </a:effectLst>
         </p:spPr>
+        <p:txBody>
+          <a:bodyPr/>
+          <a:p/>
+        </p:txBody>
       </p:sp>
       <p:sp>
         <p:nvSpPr>
@@ -3139,6 +3167,10 @@
           </a:solidFill>
           <a:ln/>
         </p:spPr>
+        <p:txBody>
+          <a:bodyPr/>
+          <a:p/>
+        </p:txBody>
       </p:sp>
       <p:sp>
         <p:nvSpPr>
@@ -3205,6 +3237,10 @@
             </a:outerShdw>
           </a:effectLst>
         </p:spPr>
+        <p:txBody>
+          <a:bodyPr/>
+          <a:p/>
+        </p:txBody>
       </p:sp>
       <p:sp>
         <p:nvSpPr>
@@ -3271,6 +3307,10 @@
             </a:outerShdw>
           </a:effectLst>
         </p:spPr>
+        <p:txBody>
+          <a:bodyPr/>
+          <a:p/>
+        </p:txBody>
       </p:sp>
       <p:sp>
         <p:nvSpPr>
@@ -3443,6 +3483,10 @@
           </a:solidFill>
           <a:ln/>
         </p:spPr>
+        <p:txBody>
+          <a:bodyPr/>
+          <a:p/>
+        </p:txBody>
       </p:sp>
       <p:sp>
         <p:nvSpPr>
@@ -3509,6 +3553,10 @@
             </a:outerShdw>
           </a:effectLst>
         </p:spPr>
+        <p:txBody>
+          <a:bodyPr/>
+          <a:p/>
+        </p:txBody>
       </p:sp>
       <p:sp>
         <p:nvSpPr>
@@ -3681,6 +3729,10 @@
           </a:solidFill>
           <a:ln/>
         </p:spPr>
+        <p:txBody>
+          <a:bodyPr/>
+          <a:p/>
+        </p:txBody>
       </p:sp>
       <p:sp>
         <p:nvSpPr>
@@ -3747,6 +3799,10 @@
             </a:outerShdw>
           </a:effectLst>
         </p:spPr>
+        <p:txBody>
+          <a:bodyPr/>
+          <a:p/>
+        </p:txBody>
       </p:sp>
       <p:sp>
         <p:nvSpPr>
@@ -3813,6 +3869,10 @@
             </a:outerShdw>
           </a:effectLst>
         </p:spPr>
+        <p:txBody>
+          <a:bodyPr/>
+          <a:p/>
+        </p:txBody>
       </p:sp>
       <p:sp>
         <p:nvSpPr>
@@ -3985,6 +4045,10 @@
           </a:solidFill>
           <a:ln/>
         </p:spPr>
+        <p:txBody>
+          <a:bodyPr/>
+          <a:p/>
+        </p:txBody>
       </p:sp>
       <p:sp>
         <p:nvSpPr>
@@ -4051,6 +4115,10 @@
             </a:outerShdw>
           </a:effectLst>
         </p:spPr>
+        <p:txBody>
+          <a:bodyPr/>
+          <a:p/>
+        </p:txBody>
       </p:sp>
       <p:sp>
         <p:nvSpPr>
@@ -4071,6 +4139,10 @@
           </a:solidFill>
           <a:ln/>
         </p:spPr>
+        <p:txBody>
+          <a:bodyPr/>
+          <a:p/>
+        </p:txBody>
       </p:sp>
       <p:sp>
         <p:nvSpPr>
@@ -4176,6 +4248,10 @@
             </a:outerShdw>
           </a:effectLst>
         </p:spPr>
+        <p:txBody>
+          <a:bodyPr/>
+          <a:p/>
+        </p:txBody>
       </p:sp>
       <p:sp>
         <p:nvSpPr>
@@ -4196,6 +4272,10 @@
           </a:solidFill>
           <a:ln/>
         </p:spPr>
+        <p:txBody>
+          <a:bodyPr/>
+          <a:p/>
+        </p:txBody>
       </p:sp>
       <p:sp>
         <p:nvSpPr>
@@ -4301,6 +4381,10 @@
             </a:outerShdw>
           </a:effectLst>
         </p:spPr>
+        <p:txBody>
+          <a:bodyPr/>
+          <a:p/>
+        </p:txBody>
       </p:sp>
       <p:sp>
         <p:nvSpPr>
@@ -4321,6 +4405,10 @@
           </a:solidFill>
           <a:ln/>
         </p:spPr>
+        <p:txBody>
+          <a:bodyPr/>
+          <a:p/>
+        </p:txBody>
       </p:sp>
       <p:sp>
         <p:nvSpPr>
@@ -4426,6 +4514,10 @@
             </a:outerShdw>
           </a:effectLst>
         </p:spPr>
+        <p:txBody>
+          <a:bodyPr/>
+          <a:p/>
+        </p:txBody>
       </p:sp>
       <p:sp>
         <p:nvSpPr>
@@ -4446,6 +4538,10 @@
           </a:solidFill>
           <a:ln/>
         </p:spPr>
+        <p:txBody>
+          <a:bodyPr/>
+          <a:p/>
+        </p:txBody>
       </p:sp>
       <p:sp>
         <p:nvSpPr>
@@ -4551,6 +4647,10 @@
             </a:outerShdw>
           </a:effectLst>
         </p:spPr>
+        <p:txBody>
+          <a:bodyPr/>
+          <a:p/>
+        </p:txBody>
       </p:sp>
       <p:sp>
         <p:nvSpPr>
@@ -4571,6 +4671,10 @@
           </a:solidFill>
           <a:ln/>
         </p:spPr>
+        <p:txBody>
+          <a:bodyPr/>
+          <a:p/>
+        </p:txBody>
       </p:sp>
       <p:sp>
         <p:nvSpPr>
@@ -4676,6 +4780,10 @@
             </a:outerShdw>
           </a:effectLst>
         </p:spPr>
+        <p:txBody>
+          <a:bodyPr/>
+          <a:p/>
+        </p:txBody>
       </p:sp>
       <p:sp>
         <p:nvSpPr>
@@ -4696,6 +4804,10 @@
           </a:solidFill>
           <a:ln/>
         </p:spPr>
+        <p:txBody>
+          <a:bodyPr/>
+          <a:p/>
+        </p:txBody>
       </p:sp>
       <p:sp>
         <p:nvSpPr>
@@ -4783,8 +4895,8 @@
         </p:nvSpPr>
         <p:spPr>
           <a:xfrm>
-            <a:off x="731520" y="3749040"/>
-            <a:ext cx="10698480" cy="2286000"/>
+            <a:off x="731520" y="3913632"/>
+            <a:ext cx="10698480" cy="2459736"/>
           </a:xfrm>
           <a:prstGeom prst="rect">
             <a:avLst/>
@@ -4801,6 +4913,10 @@
             </a:outerShdw>
           </a:effectLst>
         </p:spPr>
+        <p:txBody>
+          <a:bodyPr/>
+          <a:p/>
+        </p:txBody>
       </p:sp>
       <p:sp>
         <p:nvSpPr>
@@ -4810,8 +4926,8 @@
         </p:nvSpPr>
         <p:spPr>
           <a:xfrm>
-            <a:off x="731520" y="3749040"/>
-            <a:ext cx="10698480" cy="2286000"/>
+            <a:off x="731520" y="3913632"/>
+            <a:ext cx="10698480" cy="2459736"/>
           </a:xfrm>
           <a:prstGeom prst="rect">
             <a:avLst/>
@@ -5956,6 +6072,10 @@
           </a:solidFill>
           <a:ln/>
         </p:spPr>
+        <p:txBody>
+          <a:bodyPr/>
+          <a:p/>
+        </p:txBody>
       </p:sp>
       <p:sp>
         <p:nvSpPr>
@@ -6128,6 +6248,10 @@
           </a:solidFill>
           <a:ln/>
         </p:spPr>
+        <p:txBody>
+          <a:bodyPr/>
+          <a:p/>
+        </p:txBody>
       </p:sp>
       <p:sp>
         <p:nvSpPr>
@@ -6194,6 +6318,10 @@
             </a:outerShdw>
           </a:effectLst>
         </p:spPr>
+        <p:txBody>
+          <a:bodyPr/>
+          <a:p/>
+        </p:txBody>
       </p:sp>
       <p:sp>
         <p:nvSpPr>
@@ -6214,6 +6342,10 @@
           </a:solidFill>
           <a:ln/>
         </p:spPr>
+        <p:txBody>
+          <a:bodyPr/>
+          <a:p/>
+        </p:txBody>
       </p:sp>
       <p:sp>
         <p:nvSpPr>
@@ -6358,6 +6490,10 @@
             </a:outerShdw>
           </a:effectLst>
         </p:spPr>
+        <p:txBody>
+          <a:bodyPr/>
+          <a:p/>
+        </p:txBody>
       </p:sp>
       <p:sp>
         <p:nvSpPr>
@@ -6378,6 +6514,10 @@
           </a:solidFill>
           <a:ln/>
         </p:spPr>
+        <p:txBody>
+          <a:bodyPr/>
+          <a:p/>
+        </p:txBody>
       </p:sp>
       <p:sp>
         <p:nvSpPr>
@@ -6522,6 +6662,10 @@
             </a:outerShdw>
           </a:effectLst>
         </p:spPr>
+        <p:txBody>
+          <a:bodyPr/>
+          <a:p/>
+        </p:txBody>
       </p:sp>
       <p:sp>
         <p:nvSpPr>
@@ -6542,6 +6686,10 @@
           </a:solidFill>
           <a:ln/>
         </p:spPr>
+        <p:txBody>
+          <a:bodyPr/>
+          <a:p/>
+        </p:txBody>
       </p:sp>
       <p:sp>
         <p:nvSpPr>
@@ -6686,6 +6834,10 @@
             </a:outerShdw>
           </a:effectLst>
         </p:spPr>
+        <p:txBody>
+          <a:bodyPr/>
+          <a:p/>
+        </p:txBody>
       </p:sp>
       <p:sp>
         <p:nvSpPr>
@@ -6706,6 +6858,10 @@
           </a:solidFill>
           <a:ln/>
         </p:spPr>
+        <p:txBody>
+          <a:bodyPr/>
+          <a:p/>
+        </p:txBody>
       </p:sp>
       <p:sp>
         <p:nvSpPr>
@@ -6850,6 +7006,10 @@
             </a:outerShdw>
           </a:effectLst>
         </p:spPr>
+        <p:txBody>
+          <a:bodyPr/>
+          <a:p/>
+        </p:txBody>
       </p:sp>
       <p:sp>
         <p:nvSpPr>
@@ -6870,6 +7030,10 @@
           </a:solidFill>
           <a:ln/>
         </p:spPr>
+        <p:txBody>
+          <a:bodyPr/>
+          <a:p/>
+        </p:txBody>
       </p:sp>
       <p:sp>
         <p:nvSpPr>
@@ -7014,6 +7178,10 @@
             </a:outerShdw>
           </a:effectLst>
         </p:spPr>
+        <p:txBody>
+          <a:bodyPr/>
+          <a:p/>
+        </p:txBody>
       </p:sp>
       <p:sp>
         <p:nvSpPr>
@@ -7034,6 +7202,10 @@
           </a:solidFill>
           <a:ln/>
         </p:spPr>
+        <p:txBody>
+          <a:bodyPr/>
+          <a:p/>
+        </p:txBody>
       </p:sp>
       <p:sp>
         <p:nvSpPr>
@@ -7242,6 +7414,10 @@
           </a:solidFill>
           <a:ln/>
         </p:spPr>
+        <p:txBody>
+          <a:bodyPr/>
+          <a:p/>
+        </p:txBody>
       </p:sp>
       <p:sp>
         <p:nvSpPr>
@@ -7308,6 +7484,10 @@
             </a:outerShdw>
           </a:effectLst>
         </p:spPr>
+        <p:txBody>
+          <a:bodyPr/>
+          <a:p/>
+        </p:txBody>
       </p:sp>
       <p:sp>
         <p:nvSpPr>
@@ -7374,6 +7554,10 @@
             </a:outerShdw>
           </a:effectLst>
         </p:spPr>
+        <p:txBody>
+          <a:bodyPr/>
+          <a:p/>
+        </p:txBody>
       </p:sp>
       <p:sp>
         <p:nvSpPr>
@@ -7546,6 +7730,10 @@
           </a:solidFill>
           <a:ln/>
         </p:spPr>
+        <p:txBody>
+          <a:bodyPr/>
+          <a:p/>
+        </p:txBody>
       </p:sp>
       <p:sp>
         <p:nvSpPr>
@@ -7612,6 +7800,10 @@
             </a:outerShdw>
           </a:effectLst>
         </p:spPr>
+        <p:txBody>
+          <a:bodyPr/>
+          <a:p/>
+        </p:txBody>
       </p:sp>
       <p:sp>
         <p:nvSpPr>
@@ -7678,6 +7870,10 @@
             </a:outerShdw>
           </a:effectLst>
         </p:spPr>
+        <p:txBody>
+          <a:bodyPr/>
+          <a:p/>
+        </p:txBody>
       </p:sp>
       <p:sp>
         <p:nvSpPr>
@@ -7850,6 +8046,10 @@
           </a:solidFill>
           <a:ln/>
         </p:spPr>
+        <p:txBody>
+          <a:bodyPr/>
+          <a:p/>
+        </p:txBody>
       </p:sp>
       <p:sp>
         <p:nvSpPr>
@@ -7916,6 +8116,10 @@
             </a:outerShdw>
           </a:effectLst>
         </p:spPr>
+        <p:txBody>
+          <a:bodyPr/>
+          <a:p/>
+        </p:txBody>
       </p:sp>
       <p:sp>
         <p:nvSpPr>
@@ -7982,6 +8186,10 @@
             </a:outerShdw>
           </a:effectLst>
         </p:spPr>
+        <p:txBody>
+          <a:bodyPr/>
+          <a:p/>
+        </p:txBody>
       </p:sp>
       <p:sp>
         <p:nvSpPr>
@@ -8154,6 +8362,10 @@
           </a:solidFill>
           <a:ln/>
         </p:spPr>
+        <p:txBody>
+          <a:bodyPr/>
+          <a:p/>
+        </p:txBody>
       </p:sp>
       <p:sp>
         <p:nvSpPr>
@@ -8220,6 +8432,10 @@
             </a:outerShdw>
           </a:effectLst>
         </p:spPr>
+        <p:txBody>
+          <a:bodyPr/>
+          <a:p/>
+        </p:txBody>
       </p:sp>
       <p:sp>
         <p:nvSpPr>
@@ -8392,6 +8608,10 @@
           </a:solidFill>
           <a:ln/>
         </p:spPr>
+        <p:txBody>
+          <a:bodyPr/>
+          <a:p/>
+        </p:txBody>
       </p:sp>
       <p:sp>
         <p:nvSpPr>
@@ -8458,6 +8678,10 @@
             </a:outerShdw>
           </a:effectLst>
         </p:spPr>
+        <p:txBody>
+          <a:bodyPr/>
+          <a:p/>
+        </p:txBody>
       </p:sp>
       <p:sp>
         <p:nvSpPr>
@@ -8524,6 +8748,10 @@
             </a:outerShdw>
           </a:effectLst>
         </p:spPr>
+        <p:txBody>
+          <a:bodyPr/>
+          <a:p/>
+        </p:txBody>
       </p:sp>
       <p:sp>
         <p:nvSpPr>
@@ -8696,6 +8924,10 @@
           </a:solidFill>
           <a:ln/>
         </p:spPr>
+        <p:txBody>
+          <a:bodyPr/>
+          <a:p/>
+        </p:txBody>
       </p:sp>
       <p:sp>
         <p:nvSpPr>
@@ -8762,6 +8994,10 @@
             </a:outerShdw>
           </a:effectLst>
         </p:spPr>
+        <p:txBody>
+          <a:bodyPr/>
+          <a:p/>
+        </p:txBody>
       </p:sp>
       <p:sp>
         <p:nvSpPr>
@@ -8828,6 +9064,10 @@
             </a:outerShdw>
           </a:effectLst>
         </p:spPr>
+        <p:txBody>
+          <a:bodyPr/>
+          <a:p/>
+        </p:txBody>
       </p:sp>
       <p:sp>
         <p:nvSpPr>

--- a/backend/templates/pptx/colorful_agency.pptx
+++ b/backend/templates/pptx/colorful_agency.pptx
@@ -2496,10 +2496,6 @@
           </a:solidFill>
           <a:ln/>
         </p:spPr>
-        <p:txBody>
-          <a:bodyPr/>
-          <a:p/>
-        </p:txBody>
       </p:sp>
       <p:sp>
         <p:nvSpPr>
@@ -2520,10 +2516,6 @@
           </a:solidFill>
           <a:ln/>
         </p:spPr>
-        <p:txBody>
-          <a:bodyPr/>
-          <a:p/>
-        </p:txBody>
       </p:sp>
       <p:sp>
         <p:nvSpPr>
@@ -2544,10 +2536,6 @@
           </a:solidFill>
           <a:ln/>
         </p:spPr>
-        <p:txBody>
-          <a:bodyPr/>
-          <a:p/>
-        </p:txBody>
       </p:sp>
       <p:sp>
         <p:nvSpPr>
@@ -2568,10 +2556,6 @@
           </a:solidFill>
           <a:ln/>
         </p:spPr>
-        <p:txBody>
-          <a:bodyPr/>
-          <a:p/>
-        </p:txBody>
       </p:sp>
       <p:sp>
         <p:nvSpPr>
@@ -2865,10 +2849,6 @@
           </a:solidFill>
           <a:ln/>
         </p:spPr>
-        <p:txBody>
-          <a:bodyPr/>
-          <a:p/>
-        </p:txBody>
       </p:sp>
     </p:spTree>
   </p:cSld>
@@ -2921,10 +2901,6 @@
           </a:solidFill>
           <a:ln/>
         </p:spPr>
-        <p:txBody>
-          <a:bodyPr/>
-          <a:p/>
-        </p:txBody>
       </p:sp>
       <p:sp>
         <p:nvSpPr>
@@ -2991,10 +2967,6 @@
             </a:outerShdw>
           </a:effectLst>
         </p:spPr>
-        <p:txBody>
-          <a:bodyPr/>
-          <a:p/>
-        </p:txBody>
       </p:sp>
       <p:sp>
         <p:nvSpPr>
@@ -3167,10 +3139,6 @@
           </a:solidFill>
           <a:ln/>
         </p:spPr>
-        <p:txBody>
-          <a:bodyPr/>
-          <a:p/>
-        </p:txBody>
       </p:sp>
       <p:sp>
         <p:nvSpPr>
@@ -3237,10 +3205,6 @@
             </a:outerShdw>
           </a:effectLst>
         </p:spPr>
-        <p:txBody>
-          <a:bodyPr/>
-          <a:p/>
-        </p:txBody>
       </p:sp>
       <p:sp>
         <p:nvSpPr>
@@ -3307,10 +3271,6 @@
             </a:outerShdw>
           </a:effectLst>
         </p:spPr>
-        <p:txBody>
-          <a:bodyPr/>
-          <a:p/>
-        </p:txBody>
       </p:sp>
       <p:sp>
         <p:nvSpPr>
@@ -3483,10 +3443,6 @@
           </a:solidFill>
           <a:ln/>
         </p:spPr>
-        <p:txBody>
-          <a:bodyPr/>
-          <a:p/>
-        </p:txBody>
       </p:sp>
       <p:sp>
         <p:nvSpPr>
@@ -3553,10 +3509,6 @@
             </a:outerShdw>
           </a:effectLst>
         </p:spPr>
-        <p:txBody>
-          <a:bodyPr/>
-          <a:p/>
-        </p:txBody>
       </p:sp>
       <p:sp>
         <p:nvSpPr>
@@ -3729,10 +3681,6 @@
           </a:solidFill>
           <a:ln/>
         </p:spPr>
-        <p:txBody>
-          <a:bodyPr/>
-          <a:p/>
-        </p:txBody>
       </p:sp>
       <p:sp>
         <p:nvSpPr>
@@ -3799,10 +3747,6 @@
             </a:outerShdw>
           </a:effectLst>
         </p:spPr>
-        <p:txBody>
-          <a:bodyPr/>
-          <a:p/>
-        </p:txBody>
       </p:sp>
       <p:sp>
         <p:nvSpPr>
@@ -3869,10 +3813,6 @@
             </a:outerShdw>
           </a:effectLst>
         </p:spPr>
-        <p:txBody>
-          <a:bodyPr/>
-          <a:p/>
-        </p:txBody>
       </p:sp>
       <p:sp>
         <p:nvSpPr>
@@ -4045,10 +3985,6 @@
           </a:solidFill>
           <a:ln/>
         </p:spPr>
-        <p:txBody>
-          <a:bodyPr/>
-          <a:p/>
-        </p:txBody>
       </p:sp>
       <p:sp>
         <p:nvSpPr>
@@ -4115,10 +4051,6 @@
             </a:outerShdw>
           </a:effectLst>
         </p:spPr>
-        <p:txBody>
-          <a:bodyPr/>
-          <a:p/>
-        </p:txBody>
       </p:sp>
       <p:sp>
         <p:nvSpPr>
@@ -4139,10 +4071,6 @@
           </a:solidFill>
           <a:ln/>
         </p:spPr>
-        <p:txBody>
-          <a:bodyPr/>
-          <a:p/>
-        </p:txBody>
       </p:sp>
       <p:sp>
         <p:nvSpPr>
@@ -4248,10 +4176,6 @@
             </a:outerShdw>
           </a:effectLst>
         </p:spPr>
-        <p:txBody>
-          <a:bodyPr/>
-          <a:p/>
-        </p:txBody>
       </p:sp>
       <p:sp>
         <p:nvSpPr>
@@ -4272,10 +4196,6 @@
           </a:solidFill>
           <a:ln/>
         </p:spPr>
-        <p:txBody>
-          <a:bodyPr/>
-          <a:p/>
-        </p:txBody>
       </p:sp>
       <p:sp>
         <p:nvSpPr>
@@ -4381,10 +4301,6 @@
             </a:outerShdw>
           </a:effectLst>
         </p:spPr>
-        <p:txBody>
-          <a:bodyPr/>
-          <a:p/>
-        </p:txBody>
       </p:sp>
       <p:sp>
         <p:nvSpPr>
@@ -4405,10 +4321,6 @@
           </a:solidFill>
           <a:ln/>
         </p:spPr>
-        <p:txBody>
-          <a:bodyPr/>
-          <a:p/>
-        </p:txBody>
       </p:sp>
       <p:sp>
         <p:nvSpPr>
@@ -4514,10 +4426,6 @@
             </a:outerShdw>
           </a:effectLst>
         </p:spPr>
-        <p:txBody>
-          <a:bodyPr/>
-          <a:p/>
-        </p:txBody>
       </p:sp>
       <p:sp>
         <p:nvSpPr>
@@ -4538,10 +4446,6 @@
           </a:solidFill>
           <a:ln/>
         </p:spPr>
-        <p:txBody>
-          <a:bodyPr/>
-          <a:p/>
-        </p:txBody>
       </p:sp>
       <p:sp>
         <p:nvSpPr>
@@ -4647,10 +4551,6 @@
             </a:outerShdw>
           </a:effectLst>
         </p:spPr>
-        <p:txBody>
-          <a:bodyPr/>
-          <a:p/>
-        </p:txBody>
       </p:sp>
       <p:sp>
         <p:nvSpPr>
@@ -4671,10 +4571,6 @@
           </a:solidFill>
           <a:ln/>
         </p:spPr>
-        <p:txBody>
-          <a:bodyPr/>
-          <a:p/>
-        </p:txBody>
       </p:sp>
       <p:sp>
         <p:nvSpPr>
@@ -4780,10 +4676,6 @@
             </a:outerShdw>
           </a:effectLst>
         </p:spPr>
-        <p:txBody>
-          <a:bodyPr/>
-          <a:p/>
-        </p:txBody>
       </p:sp>
       <p:sp>
         <p:nvSpPr>
@@ -4804,10 +4696,6 @@
           </a:solidFill>
           <a:ln/>
         </p:spPr>
-        <p:txBody>
-          <a:bodyPr/>
-          <a:p/>
-        </p:txBody>
       </p:sp>
       <p:sp>
         <p:nvSpPr>
@@ -4895,8 +4783,8 @@
         </p:nvSpPr>
         <p:spPr>
           <a:xfrm>
-            <a:off x="731520" y="3913632"/>
-            <a:ext cx="10698480" cy="2459736"/>
+            <a:off x="731520" y="3749040"/>
+            <a:ext cx="10698480" cy="2286000"/>
           </a:xfrm>
           <a:prstGeom prst="rect">
             <a:avLst/>
@@ -4913,10 +4801,6 @@
             </a:outerShdw>
           </a:effectLst>
         </p:spPr>
-        <p:txBody>
-          <a:bodyPr/>
-          <a:p/>
-        </p:txBody>
       </p:sp>
       <p:sp>
         <p:nvSpPr>
@@ -4926,8 +4810,8 @@
         </p:nvSpPr>
         <p:spPr>
           <a:xfrm>
-            <a:off x="731520" y="3913632"/>
-            <a:ext cx="10698480" cy="2459736"/>
+            <a:off x="731520" y="3749040"/>
+            <a:ext cx="10698480" cy="2286000"/>
           </a:xfrm>
           <a:prstGeom prst="rect">
             <a:avLst/>
@@ -6072,10 +5956,6 @@
           </a:solidFill>
           <a:ln/>
         </p:spPr>
-        <p:txBody>
-          <a:bodyPr/>
-          <a:p/>
-        </p:txBody>
       </p:sp>
       <p:sp>
         <p:nvSpPr>
@@ -6248,10 +6128,6 @@
           </a:solidFill>
           <a:ln/>
         </p:spPr>
-        <p:txBody>
-          <a:bodyPr/>
-          <a:p/>
-        </p:txBody>
       </p:sp>
       <p:sp>
         <p:nvSpPr>
@@ -6318,10 +6194,6 @@
             </a:outerShdw>
           </a:effectLst>
         </p:spPr>
-        <p:txBody>
-          <a:bodyPr/>
-          <a:p/>
-        </p:txBody>
       </p:sp>
       <p:sp>
         <p:nvSpPr>
@@ -6342,10 +6214,6 @@
           </a:solidFill>
           <a:ln/>
         </p:spPr>
-        <p:txBody>
-          <a:bodyPr/>
-          <a:p/>
-        </p:txBody>
       </p:sp>
       <p:sp>
         <p:nvSpPr>
@@ -6490,10 +6358,6 @@
             </a:outerShdw>
           </a:effectLst>
         </p:spPr>
-        <p:txBody>
-          <a:bodyPr/>
-          <a:p/>
-        </p:txBody>
       </p:sp>
       <p:sp>
         <p:nvSpPr>
@@ -6514,10 +6378,6 @@
           </a:solidFill>
           <a:ln/>
         </p:spPr>
-        <p:txBody>
-          <a:bodyPr/>
-          <a:p/>
-        </p:txBody>
       </p:sp>
       <p:sp>
         <p:nvSpPr>
@@ -6662,10 +6522,6 @@
             </a:outerShdw>
           </a:effectLst>
         </p:spPr>
-        <p:txBody>
-          <a:bodyPr/>
-          <a:p/>
-        </p:txBody>
       </p:sp>
       <p:sp>
         <p:nvSpPr>
@@ -6686,10 +6542,6 @@
           </a:solidFill>
           <a:ln/>
         </p:spPr>
-        <p:txBody>
-          <a:bodyPr/>
-          <a:p/>
-        </p:txBody>
       </p:sp>
       <p:sp>
         <p:nvSpPr>
@@ -6834,10 +6686,6 @@
             </a:outerShdw>
           </a:effectLst>
         </p:spPr>
-        <p:txBody>
-          <a:bodyPr/>
-          <a:p/>
-        </p:txBody>
       </p:sp>
       <p:sp>
         <p:nvSpPr>
@@ -6858,10 +6706,6 @@
           </a:solidFill>
           <a:ln/>
         </p:spPr>
-        <p:txBody>
-          <a:bodyPr/>
-          <a:p/>
-        </p:txBody>
       </p:sp>
       <p:sp>
         <p:nvSpPr>
@@ -7006,10 +6850,6 @@
             </a:outerShdw>
           </a:effectLst>
         </p:spPr>
-        <p:txBody>
-          <a:bodyPr/>
-          <a:p/>
-        </p:txBody>
       </p:sp>
       <p:sp>
         <p:nvSpPr>
@@ -7030,10 +6870,6 @@
           </a:solidFill>
           <a:ln/>
         </p:spPr>
-        <p:txBody>
-          <a:bodyPr/>
-          <a:p/>
-        </p:txBody>
       </p:sp>
       <p:sp>
         <p:nvSpPr>
@@ -7178,10 +7014,6 @@
             </a:outerShdw>
           </a:effectLst>
         </p:spPr>
-        <p:txBody>
-          <a:bodyPr/>
-          <a:p/>
-        </p:txBody>
       </p:sp>
       <p:sp>
         <p:nvSpPr>
@@ -7202,10 +7034,6 @@
           </a:solidFill>
           <a:ln/>
         </p:spPr>
-        <p:txBody>
-          <a:bodyPr/>
-          <a:p/>
-        </p:txBody>
       </p:sp>
       <p:sp>
         <p:nvSpPr>
@@ -7414,10 +7242,6 @@
           </a:solidFill>
           <a:ln/>
         </p:spPr>
-        <p:txBody>
-          <a:bodyPr/>
-          <a:p/>
-        </p:txBody>
       </p:sp>
       <p:sp>
         <p:nvSpPr>
@@ -7484,10 +7308,6 @@
             </a:outerShdw>
           </a:effectLst>
         </p:spPr>
-        <p:txBody>
-          <a:bodyPr/>
-          <a:p/>
-        </p:txBody>
       </p:sp>
       <p:sp>
         <p:nvSpPr>
@@ -7554,10 +7374,6 @@
             </a:outerShdw>
           </a:effectLst>
         </p:spPr>
-        <p:txBody>
-          <a:bodyPr/>
-          <a:p/>
-        </p:txBody>
       </p:sp>
       <p:sp>
         <p:nvSpPr>
@@ -7730,10 +7546,6 @@
           </a:solidFill>
           <a:ln/>
         </p:spPr>
-        <p:txBody>
-          <a:bodyPr/>
-          <a:p/>
-        </p:txBody>
       </p:sp>
       <p:sp>
         <p:nvSpPr>
@@ -7800,10 +7612,6 @@
             </a:outerShdw>
           </a:effectLst>
         </p:spPr>
-        <p:txBody>
-          <a:bodyPr/>
-          <a:p/>
-        </p:txBody>
       </p:sp>
       <p:sp>
         <p:nvSpPr>
@@ -7870,10 +7678,6 @@
             </a:outerShdw>
           </a:effectLst>
         </p:spPr>
-        <p:txBody>
-          <a:bodyPr/>
-          <a:p/>
-        </p:txBody>
       </p:sp>
       <p:sp>
         <p:nvSpPr>
@@ -7950,7 +7754,7 @@
                 <a:ea typeface="Calibri" pitchFamily="34" charset="-122"/>
                 <a:cs typeface="Calibri" pitchFamily="34" charset="-120"/>
               </a:rPr>
-              <a:t>{{website_narrative}}</a:t>
+              <a:t>{{engagement_narrative}}</a:t>
             </a:r>
             <a:endParaRPr lang="en-US" sz="1200" dirty="0"/>
           </a:p>
@@ -8046,10 +7850,6 @@
           </a:solidFill>
           <a:ln/>
         </p:spPr>
-        <p:txBody>
-          <a:bodyPr/>
-          <a:p/>
-        </p:txBody>
       </p:sp>
       <p:sp>
         <p:nvSpPr>
@@ -8116,10 +7916,6 @@
             </a:outerShdw>
           </a:effectLst>
         </p:spPr>
-        <p:txBody>
-          <a:bodyPr/>
-          <a:p/>
-        </p:txBody>
       </p:sp>
       <p:sp>
         <p:nvSpPr>
@@ -8186,10 +7982,6 @@
             </a:outerShdw>
           </a:effectLst>
         </p:spPr>
-        <p:txBody>
-          <a:bodyPr/>
-          <a:p/>
-        </p:txBody>
       </p:sp>
       <p:sp>
         <p:nvSpPr>
@@ -8362,10 +8154,6 @@
           </a:solidFill>
           <a:ln/>
         </p:spPr>
-        <p:txBody>
-          <a:bodyPr/>
-          <a:p/>
-        </p:txBody>
       </p:sp>
       <p:sp>
         <p:nvSpPr>
@@ -8432,10 +8220,6 @@
             </a:outerShdw>
           </a:effectLst>
         </p:spPr>
-        <p:txBody>
-          <a:bodyPr/>
-          <a:p/>
-        </p:txBody>
       </p:sp>
       <p:sp>
         <p:nvSpPr>
@@ -8608,10 +8392,6 @@
           </a:solidFill>
           <a:ln/>
         </p:spPr>
-        <p:txBody>
-          <a:bodyPr/>
-          <a:p/>
-        </p:txBody>
       </p:sp>
       <p:sp>
         <p:nvSpPr>
@@ -8678,10 +8458,6 @@
             </a:outerShdw>
           </a:effectLst>
         </p:spPr>
-        <p:txBody>
-          <a:bodyPr/>
-          <a:p/>
-        </p:txBody>
       </p:sp>
       <p:sp>
         <p:nvSpPr>
@@ -8748,10 +8524,6 @@
             </a:outerShdw>
           </a:effectLst>
         </p:spPr>
-        <p:txBody>
-          <a:bodyPr/>
-          <a:p/>
-        </p:txBody>
       </p:sp>
       <p:sp>
         <p:nvSpPr>
@@ -8924,10 +8696,6 @@
           </a:solidFill>
           <a:ln/>
         </p:spPr>
-        <p:txBody>
-          <a:bodyPr/>
-          <a:p/>
-        </p:txBody>
       </p:sp>
       <p:sp>
         <p:nvSpPr>
@@ -8994,10 +8762,6 @@
             </a:outerShdw>
           </a:effectLst>
         </p:spPr>
-        <p:txBody>
-          <a:bodyPr/>
-          <a:p/>
-        </p:txBody>
       </p:sp>
       <p:sp>
         <p:nvSpPr>
@@ -9064,10 +8828,6 @@
             </a:outerShdw>
           </a:effectLst>
         </p:spPr>
-        <p:txBody>
-          <a:bodyPr/>
-          <a:p/>
-        </p:txBody>
       </p:sp>
       <p:sp>
         <p:nvSpPr>

--- a/backend/templates/pptx/colorful_agency.pptx
+++ b/backend/templates/pptx/colorful_agency.pptx
@@ -2496,6 +2496,10 @@
           </a:solidFill>
           <a:ln/>
         </p:spPr>
+        <p:txBody>
+          <a:bodyPr/>
+          <a:p/>
+        </p:txBody>
       </p:sp>
       <p:sp>
         <p:nvSpPr>
@@ -2516,6 +2520,10 @@
           </a:solidFill>
           <a:ln/>
         </p:spPr>
+        <p:txBody>
+          <a:bodyPr/>
+          <a:p/>
+        </p:txBody>
       </p:sp>
       <p:sp>
         <p:nvSpPr>
@@ -2536,6 +2544,10 @@
           </a:solidFill>
           <a:ln/>
         </p:spPr>
+        <p:txBody>
+          <a:bodyPr/>
+          <a:p/>
+        </p:txBody>
       </p:sp>
       <p:sp>
         <p:nvSpPr>
@@ -2556,6 +2568,10 @@
           </a:solidFill>
           <a:ln/>
         </p:spPr>
+        <p:txBody>
+          <a:bodyPr/>
+          <a:p/>
+        </p:txBody>
       </p:sp>
       <p:sp>
         <p:nvSpPr>
@@ -2593,240 +2609,6 @@
               <a:t>PERFORMANCE REPORT</a:t>
             </a:r>
             <a:endParaRPr lang="en-US" sz="1200" dirty="0"/>
-          </a:p>
-        </p:txBody>
-      </p:sp>
-      <p:sp>
-        <p:nvSpPr>
-          <p:cNvPr id="7" name="Text 5"/>
-          <p:cNvSpPr/>
-          <p:nvPr/>
-        </p:nvSpPr>
-        <p:spPr>
-          <a:xfrm>
-            <a:off x="9418320" y="457200"/>
-            <a:ext cx="2011680" cy="914400"/>
-          </a:xfrm>
-          <a:prstGeom prst="rect">
-            <a:avLst/>
-          </a:prstGeom>
-          <a:noFill/>
-          <a:ln/>
-        </p:spPr>
-        <p:txBody>
-          <a:bodyPr wrap="square" rtlCol="0" anchor="ctr"/>
-          <a:lstStyle/>
-          <a:p>
-            <a:pPr algn="r" indent="0" marL="0">
-              <a:buNone/>
-            </a:pPr>
-            <a:r>
-              <a:rPr lang="en-US" sz="900" dirty="0">
-                <a:solidFill>
-                  <a:srgbClr val="94A3B8"/>
-                </a:solidFill>
-                <a:latin typeface="Calibri" pitchFamily="34" charset="0"/>
-                <a:ea typeface="Calibri" pitchFamily="34" charset="-122"/>
-                <a:cs typeface="Calibri" pitchFamily="34" charset="-120"/>
-              </a:rPr>
-              <a:t>{{agency_logo}}</a:t>
-            </a:r>
-            <a:endParaRPr lang="en-US" sz="900" dirty="0"/>
-          </a:p>
-        </p:txBody>
-      </p:sp>
-      <p:sp>
-        <p:nvSpPr>
-          <p:cNvPr id="8" name="Text 6"/>
-          <p:cNvSpPr/>
-          <p:nvPr/>
-        </p:nvSpPr>
-        <p:spPr>
-          <a:xfrm>
-            <a:off x="731520" y="1645920"/>
-            <a:ext cx="10698480" cy="1463040"/>
-          </a:xfrm>
-          <a:prstGeom prst="rect">
-            <a:avLst/>
-          </a:prstGeom>
-          <a:noFill/>
-          <a:ln/>
-        </p:spPr>
-        <p:txBody>
-          <a:bodyPr wrap="square" rtlCol="0" anchor="ctr"/>
-          <a:lstStyle/>
-          <a:p>
-            <a:pPr indent="0" marL="0">
-              <a:buNone/>
-            </a:pPr>
-            <a:r>
-              <a:rPr lang="en-US" sz="4000" b="1" dirty="0">
-                <a:solidFill>
-                  <a:srgbClr val="0F172A"/>
-                </a:solidFill>
-                <a:latin typeface="Calibri" pitchFamily="34" charset="0"/>
-                <a:ea typeface="Calibri" pitchFamily="34" charset="-122"/>
-                <a:cs typeface="Calibri" pitchFamily="34" charset="-120"/>
-              </a:rPr>
-              <a:t>{{client_name}}</a:t>
-            </a:r>
-            <a:endParaRPr lang="en-US" sz="4000" dirty="0"/>
-          </a:p>
-        </p:txBody>
-      </p:sp>
-      <p:sp>
-        <p:nvSpPr>
-          <p:cNvPr id="9" name="Text 7"/>
-          <p:cNvSpPr/>
-          <p:nvPr/>
-        </p:nvSpPr>
-        <p:spPr>
-          <a:xfrm>
-            <a:off x="731520" y="3291840"/>
-            <a:ext cx="7315200" cy="411480"/>
-          </a:xfrm>
-          <a:prstGeom prst="rect">
-            <a:avLst/>
-          </a:prstGeom>
-          <a:noFill/>
-          <a:ln/>
-        </p:spPr>
-        <p:txBody>
-          <a:bodyPr wrap="square" rtlCol="0" anchor="ctr"/>
-          <a:lstStyle/>
-          <a:p>
-            <a:pPr indent="0" marL="0">
-              <a:buNone/>
-            </a:pPr>
-            <a:r>
-              <a:rPr lang="en-US" sz="1400" dirty="0">
-                <a:solidFill>
-                  <a:srgbClr val="64748B"/>
-                </a:solidFill>
-                <a:latin typeface="Calibri" pitchFamily="34" charset="0"/>
-                <a:ea typeface="Calibri" pitchFamily="34" charset="-122"/>
-                <a:cs typeface="Calibri" pitchFamily="34" charset="-120"/>
-              </a:rPr>
-              <a:t>{{report_period}}</a:t>
-            </a:r>
-            <a:endParaRPr lang="en-US" sz="1400" dirty="0"/>
-          </a:p>
-        </p:txBody>
-      </p:sp>
-      <p:sp>
-        <p:nvSpPr>
-          <p:cNvPr id="10" name="Text 8"/>
-          <p:cNvSpPr/>
-          <p:nvPr/>
-        </p:nvSpPr>
-        <p:spPr>
-          <a:xfrm>
-            <a:off x="731520" y="3794760"/>
-            <a:ext cx="7315200" cy="365760"/>
-          </a:xfrm>
-          <a:prstGeom prst="rect">
-            <a:avLst/>
-          </a:prstGeom>
-          <a:noFill/>
-          <a:ln/>
-        </p:spPr>
-        <p:txBody>
-          <a:bodyPr wrap="square" rtlCol="0" anchor="ctr"/>
-          <a:lstStyle/>
-          <a:p>
-            <a:pPr indent="0" marL="0">
-              <a:buNone/>
-            </a:pPr>
-            <a:r>
-              <a:rPr lang="en-US" sz="1200" dirty="0">
-                <a:solidFill>
-                  <a:srgbClr val="94A3B8"/>
-                </a:solidFill>
-                <a:latin typeface="Calibri" pitchFamily="34" charset="0"/>
-                <a:ea typeface="Calibri" pitchFamily="34" charset="-122"/>
-                <a:cs typeface="Calibri" pitchFamily="34" charset="-120"/>
-              </a:rPr>
-              <a:t>{{report_type}}</a:t>
-            </a:r>
-            <a:endParaRPr lang="en-US" sz="1200" dirty="0"/>
-          </a:p>
-        </p:txBody>
-      </p:sp>
-      <p:sp>
-        <p:nvSpPr>
-          <p:cNvPr id="11" name="Text 9"/>
-          <p:cNvSpPr/>
-          <p:nvPr/>
-        </p:nvSpPr>
-        <p:spPr>
-          <a:xfrm>
-            <a:off x="8961120" y="3474720"/>
-            <a:ext cx="2286000" cy="1645920"/>
-          </a:xfrm>
-          <a:prstGeom prst="rect">
-            <a:avLst/>
-          </a:prstGeom>
-          <a:noFill/>
-          <a:ln/>
-        </p:spPr>
-        <p:txBody>
-          <a:bodyPr wrap="square" rtlCol="0" anchor="ctr"/>
-          <a:lstStyle/>
-          <a:p>
-            <a:pPr algn="ctr" indent="0" marL="0">
-              <a:buNone/>
-            </a:pPr>
-            <a:r>
-              <a:rPr lang="en-US" sz="900" dirty="0">
-                <a:solidFill>
-                  <a:srgbClr val="94A3B8"/>
-                </a:solidFill>
-                <a:latin typeface="Calibri" pitchFamily="34" charset="0"/>
-                <a:ea typeface="Calibri" pitchFamily="34" charset="-122"/>
-                <a:cs typeface="Calibri" pitchFamily="34" charset="-120"/>
-              </a:rPr>
-              <a:t>{{client_logo}}</a:t>
-            </a:r>
-            <a:endParaRPr lang="en-US" sz="900" dirty="0"/>
-          </a:p>
-        </p:txBody>
-      </p:sp>
-      <p:sp>
-        <p:nvSpPr>
-          <p:cNvPr id="12" name="Text 10"/>
-          <p:cNvSpPr/>
-          <p:nvPr/>
-        </p:nvSpPr>
-        <p:spPr>
-          <a:xfrm>
-            <a:off x="731520" y="6217920"/>
-            <a:ext cx="7315200" cy="320040"/>
-          </a:xfrm>
-          <a:prstGeom prst="rect">
-            <a:avLst/>
-          </a:prstGeom>
-          <a:noFill/>
-          <a:ln/>
-        </p:spPr>
-        <p:txBody>
-          <a:bodyPr wrap="square" rtlCol="0" anchor="ctr"/>
-          <a:lstStyle/>
-          <a:p>
-            <a:pPr indent="0" marL="0">
-              <a:buNone/>
-            </a:pPr>
-            <a:r>
-              <a:rPr lang="en-US" sz="1100" dirty="0">
-                <a:solidFill>
-                  <a:srgbClr val="94A3B8"/>
-                </a:solidFill>
-                <a:latin typeface="Calibri" pitchFamily="34" charset="0"/>
-                <a:ea typeface="Calibri" pitchFamily="34" charset="-122"/>
-                <a:cs typeface="Calibri" pitchFamily="34" charset="-120"/>
-              </a:rPr>
-              <a:t>Prepared by {{agency_name}}</a:t>
-            </a:r>
-            <a:endParaRPr lang="en-US" sz="1100" dirty="0"/>
           </a:p>
         </p:txBody>
       </p:sp>
@@ -2849,6 +2631,10 @@
           </a:solidFill>
           <a:ln/>
         </p:spPr>
+        <p:txBody>
+          <a:bodyPr/>
+          <a:p/>
+        </p:txBody>
       </p:sp>
     </p:spTree>
   </p:cSld>
